--- a/artifacts/speaking-portfolio-expanded/decks/adaptive-systems-30min-handout.pptx
+++ b/artifacts/speaking-portfolio-expanded/decks/adaptive-systems-30min-handout.pptx
@@ -3617,7 +3617,7 @@
                 <a:ea typeface="Arial"/>
                 <a:cs typeface="Arial"/>
               </a:rPr>
-              <a:t xml:space="preserve">Start in shadow mode: the conjured agents propose artifacts and apply none. Then permit one reversible change class. Widen authority per class, from evidence about that class. This is the same discipline for tools and for compute.</a:t>
+              <a:t xml:space="preserve">Start in shadow mode: the conjured agents propose artifacts and apply none. Then permit one reversible change class. Widen authority per class, from evidence about that class. This is the same discipline for tools and for compute. It is also the loop that lets the system adjust its own fan-out and token burn from measured acceptance: acceptance up and false repairs flat, that job class gets more parallel attempts and a bigger budget; false repairs up, both come down.</a:t>
             </a:r>
             <a:endParaRPr lang="en-US" sz="1200"/>
           </a:p>
@@ -6984,7 +6984,7 @@
                 <a:ea typeface="Arial"/>
                 <a:cs typeface="Arial"/>
               </a:rPr>
-              <a:t xml:space="preserve">Zoom out from the ingest job. The assistant with every customer's data and a toolbox that can send email, issue refunds, delete records and ship code is not a design we get to decline. It is arriving one integration at a time, and not only in our products. Browsers now ship a chat that drives the page. WebMCP lets an agent act on whatever site you have open. The next generation of CLIs will take natural language by default, and you will pass `--no-agent` to get the old behavior back. The intermediary intelligence layer is going to wrap everything, and I know who to blame: the kids. Actually, the kids hate AI. It will be their kids who demand an agent safety blanket on everything. I will be in a rocking chair explaining that the internet was better on vinyl.</a:t>
+              <a:t xml:space="preserve">Zoom out from the ingest job. The assistant with every customer's data and a toolbox that can send email, issue refunds, delete records and ship code is not a design we get to decline. It is arriving one integration at a time, and not only in our products. Browsers now ship a chat that drives the page. WebMCP lets an agent act on any site that opts in, and the list of sites that opt in only goes one direction. The next generation of CLIs will take natural language by default, and you will pass `--no-agent` to get the old behavior back. The intermediary intelligence layer is going to wrap everything, and I know who to blame: the kids. Actually, the kids hate AI. It will be their kids who demand an agent safety blanket on everything. I will be in a rocking chair explaining that the internet was better on vinyl.</a:t>
             </a:r>
             <a:endParaRPr lang="en-US" sz="1200"/>
           </a:p>
@@ -7557,7 +7557,7 @@
                 <a:ea typeface="Arial"/>
                 <a:cs typeface="Arial"/>
               </a:rPr>
-              <a:t xml:space="preserve">Zoom out from the ingest job. The assistant with every customer's data and a toolbox that can send email, issue refunds, delete records and ship code is not a design we get to decline. It is arriving one integration at a time, and not only in our products. Browsers now ship a chat that drives the page. WebMCP lets an agent act on whatever site you have open. The next generation of CLIs will take natural language by default, and you will pass `--no-agent` to get the old behavior back. The intermediary intelligence layer is going to wrap everything, and I know who to blame: the kids. Actually, the kids hate AI. It will be their kids who demand an agent safety blanket on everything. I will be in a rocking chair explaining that the internet was better on vinyl.</a:t>
+              <a:t xml:space="preserve">Zoom out from the ingest job. The assistant with every customer's data and a toolbox that can send email, issue refunds, delete records and ship code is not a design we get to decline. It is arriving one integration at a time, and not only in our products. Browsers now ship a chat that drives the page. WebMCP lets an agent act on any site that opts in, and the list of sites that opt in only goes one direction. The next generation of CLIs will take natural language by default, and you will pass `--no-agent` to get the old behavior back. The intermediary intelligence layer is going to wrap everything, and I know who to blame: the kids. Actually, the kids hate AI. It will be their kids who demand an agent safety blanket on everything. I will be in a rocking chair explaining that the internet was better on vinyl.</a:t>
             </a:r>
             <a:endParaRPr lang="en-US" sz="1200"/>
           </a:p>
@@ -9184,7 +9184,7 @@
                 <a:ea typeface="Arial"/>
                 <a:cs typeface="Arial"/>
               </a:rPr>
-              <a:t xml:space="preserve">Read customer data and post to a vendor never share one agent</a:t>
+              <a:t xml:space="preserve">Reads customer data? Then it never posts to a vendor.</a:t>
             </a:r>
             <a:endParaRPr lang="en-US" sz="1200"/>
           </a:p>
@@ -9803,7 +9803,7 @@
                 <a:ea typeface="Arial"/>
                 <a:cs typeface="Arial"/>
               </a:rPr>
-              <a:t xml:space="preserve">Read customer data and post to a vendor never share one agent</a:t>
+              <a:t xml:space="preserve">Reads customer data? Then it never posts to a vendor.</a:t>
             </a:r>
             <a:endParaRPr lang="en-US" sz="1200"/>
           </a:p>
@@ -13984,7 +13984,7 @@
                 <a:ea typeface="Arial"/>
                 <a:cs typeface="Arial"/>
               </a:rPr>
-              <a:t xml:space="preserve">Scale becomes something the app asks for</a:t>
+              <a:t xml:space="preserve">Compute Is a Tool Too</a:t>
             </a:r>
             <a:endParaRPr lang="en-US" sz="2550"/>
           </a:p>
@@ -14803,7 +14803,7 @@
                 <a:ea typeface="Arial"/>
                 <a:cs typeface="Arial"/>
               </a:rPr>
-              <a:t xml:space="preserve">Scale becomes something the app asks for (continued)</a:t>
+              <a:t xml:space="preserve">Compute Is a Tool Too (continued)</a:t>
             </a:r>
             <a:endParaRPr lang="en-US" sz="2550"/>
           </a:p>
@@ -15245,7 +15245,7 @@
                 <a:ea typeface="Arial"/>
                 <a:cs typeface="Arial"/>
               </a:rPr>
-              <a:t xml:space="preserve">Widen authority only from measured outcomes</a:t>
+              <a:t xml:space="preserve">Widen Per Class, Never Per Streak</a:t>
             </a:r>
             <a:endParaRPr lang="en-US" sz="2550"/>
           </a:p>
@@ -15643,6 +15643,75 @@
             </a:r>
             <a:endParaRPr lang="en-US" sz="1500"/>
           </a:p>
+          <a:p>
+            <a:pPr marL="0" indent="0">
+              <a:lnSpc>
+                <a:spcPts val="1950"/>
+              </a:lnSpc>
+              <a:spcAft>
+                <a:spcPts val="0"/>
+              </a:spcAft>
+              <a:buNone/>
+            </a:pPr>
+            <a:r>
+              <a:rPr lang="en-US" sz="1500" b="0">
+                <a:solidFill>
+                  <a:srgbClr val="202B33"/>
+                </a:solidFill>
+                <a:latin typeface="Arial"/>
+                <a:ea typeface="Arial"/>
+                <a:cs typeface="Arial"/>
+              </a:rPr>
+              <a:t xml:space="preserve">Start in shadow mode: the conjured agents</a:t>
+            </a:r>
+            <a:endParaRPr lang="en-US" sz="1500"/>
+          </a:p>
+          <a:p>
+            <a:pPr marL="0" indent="0">
+              <a:lnSpc>
+                <a:spcPts val="1950"/>
+              </a:lnSpc>
+              <a:spcAft>
+                <a:spcPts val="0"/>
+              </a:spcAft>
+              <a:buNone/>
+            </a:pPr>
+            <a:r>
+              <a:rPr lang="en-US" sz="1500" b="0">
+                <a:solidFill>
+                  <a:srgbClr val="202B33"/>
+                </a:solidFill>
+                <a:latin typeface="Arial"/>
+                <a:ea typeface="Arial"/>
+                <a:cs typeface="Arial"/>
+              </a:rPr>
+              <a:t xml:space="preserve">propose artifacts and apply none. Then</a:t>
+            </a:r>
+            <a:endParaRPr lang="en-US" sz="1500"/>
+          </a:p>
+          <a:p>
+            <a:pPr marL="0" indent="0">
+              <a:lnSpc>
+                <a:spcPts val="1950"/>
+              </a:lnSpc>
+              <a:spcAft>
+                <a:spcPts val="0"/>
+              </a:spcAft>
+              <a:buNone/>
+            </a:pPr>
+            <a:r>
+              <a:rPr lang="en-US" sz="1500" b="0">
+                <a:solidFill>
+                  <a:srgbClr val="202B33"/>
+                </a:solidFill>
+                <a:latin typeface="Arial"/>
+                <a:ea typeface="Arial"/>
+                <a:cs typeface="Arial"/>
+              </a:rPr>
+              <a:t xml:space="preserve">permit one reversible change class. Widen</a:t>
+            </a:r>
+            <a:endParaRPr lang="en-US" sz="1500"/>
+          </a:p>
         </p:txBody>
       </p:sp>
       <p:sp>
@@ -15688,7 +15757,7 @@
                 <a:ea typeface="Arial"/>
                 <a:cs typeface="Arial"/>
               </a:rPr>
-              <a:t xml:space="preserve">Start in shadow mode: the conjured agents</a:t>
+              <a:t xml:space="preserve">authority per class, from evidence about</a:t>
             </a:r>
             <a:endParaRPr lang="en-US" sz="1500"/>
           </a:p>
@@ -15711,7 +15780,7 @@
                 <a:ea typeface="Arial"/>
                 <a:cs typeface="Arial"/>
               </a:rPr>
-              <a:t xml:space="preserve">propose artifacts and apply none. Then</a:t>
+              <a:t xml:space="preserve">that class. This is the same discipline for</a:t>
             </a:r>
             <a:endParaRPr lang="en-US" sz="1500"/>
           </a:p>
@@ -15734,7 +15803,7 @@
                 <a:ea typeface="Arial"/>
                 <a:cs typeface="Arial"/>
               </a:rPr>
-              <a:t xml:space="preserve">permit one reversible change class. Widen</a:t>
+              <a:t xml:space="preserve">tools and for compute. It is also the loop</a:t>
             </a:r>
             <a:endParaRPr lang="en-US" sz="1500"/>
           </a:p>
@@ -15757,7 +15826,7 @@
                 <a:ea typeface="Arial"/>
                 <a:cs typeface="Arial"/>
               </a:rPr>
-              <a:t xml:space="preserve">authority per class, from evidence about</a:t>
+              <a:t xml:space="preserve">that lets the system adjust its own fan-out</a:t>
             </a:r>
             <a:endParaRPr lang="en-US" sz="1500"/>
           </a:p>
@@ -15780,7 +15849,7 @@
                 <a:ea typeface="Arial"/>
                 <a:cs typeface="Arial"/>
               </a:rPr>
-              <a:t xml:space="preserve">that class. This is the same discipline for</a:t>
+              <a:t xml:space="preserve">and token burn from measured acceptance:</a:t>
             </a:r>
             <a:endParaRPr lang="en-US" sz="1500"/>
           </a:p>
@@ -15803,7 +15872,76 @@
                 <a:ea typeface="Arial"/>
                 <a:cs typeface="Arial"/>
               </a:rPr>
-              <a:t xml:space="preserve">tools and for compute.</a:t>
+              <a:t xml:space="preserve">acceptance up and false repairs flat, that</a:t>
+            </a:r>
+            <a:endParaRPr lang="en-US" sz="1500"/>
+          </a:p>
+          <a:p>
+            <a:pPr marL="0" indent="0">
+              <a:lnSpc>
+                <a:spcPts val="1950"/>
+              </a:lnSpc>
+              <a:spcAft>
+                <a:spcPts val="0"/>
+              </a:spcAft>
+              <a:buNone/>
+            </a:pPr>
+            <a:r>
+              <a:rPr lang="en-US" sz="1500" b="0">
+                <a:solidFill>
+                  <a:srgbClr val="202B33"/>
+                </a:solidFill>
+                <a:latin typeface="Arial"/>
+                <a:ea typeface="Arial"/>
+                <a:cs typeface="Arial"/>
+              </a:rPr>
+              <a:t xml:space="preserve">job class gets more parallel attempts and a</a:t>
+            </a:r>
+            <a:endParaRPr lang="en-US" sz="1500"/>
+          </a:p>
+          <a:p>
+            <a:pPr marL="0" indent="0">
+              <a:lnSpc>
+                <a:spcPts val="1950"/>
+              </a:lnSpc>
+              <a:spcAft>
+                <a:spcPts val="0"/>
+              </a:spcAft>
+              <a:buNone/>
+            </a:pPr>
+            <a:r>
+              <a:rPr lang="en-US" sz="1500" b="0">
+                <a:solidFill>
+                  <a:srgbClr val="202B33"/>
+                </a:solidFill>
+                <a:latin typeface="Arial"/>
+                <a:ea typeface="Arial"/>
+                <a:cs typeface="Arial"/>
+              </a:rPr>
+              <a:t xml:space="preserve">bigger budget; false repairs up, both come</a:t>
+            </a:r>
+            <a:endParaRPr lang="en-US" sz="1500"/>
+          </a:p>
+          <a:p>
+            <a:pPr marL="0" indent="0">
+              <a:lnSpc>
+                <a:spcPts val="1950"/>
+              </a:lnSpc>
+              <a:spcAft>
+                <a:spcPts val="0"/>
+              </a:spcAft>
+              <a:buNone/>
+            </a:pPr>
+            <a:r>
+              <a:rPr lang="en-US" sz="1500" b="0">
+                <a:solidFill>
+                  <a:srgbClr val="202B33"/>
+                </a:solidFill>
+                <a:latin typeface="Arial"/>
+                <a:ea typeface="Arial"/>
+                <a:cs typeface="Arial"/>
+              </a:rPr>
+              <a:t xml:space="preserve">down.</a:t>
             </a:r>
             <a:endParaRPr lang="en-US" sz="1500"/>
           </a:p>
@@ -20390,7 +20528,7 @@
                 <a:ea typeface="Arial"/>
                 <a:cs typeface="Arial"/>
               </a:rPr>
-              <a:t xml:space="preserve">The bar is: diff the schema and page a human</a:t>
+              <a:t xml:space="preserve">The Bar Is a Pager</a:t>
             </a:r>
             <a:endParaRPr lang="en-US" sz="2550"/>
           </a:p>
@@ -21315,30 +21453,7 @@
                 <a:ea typeface="Arial"/>
                 <a:cs typeface="Arial"/>
               </a:rPr>
-              <a:t xml:space="preserve">The assistant with everything is coming, one</a:t>
-            </a:r>
-            <a:endParaRPr lang="en-US" sz="2550"/>
-          </a:p>
-          <a:p>
-            <a:pPr marL="0" indent="0">
-              <a:lnSpc>
-                <a:spcPts val="3060"/>
-              </a:lnSpc>
-              <a:spcAft>
-                <a:spcPts val="0"/>
-              </a:spcAft>
-              <a:buNone/>
-            </a:pPr>
-            <a:r>
-              <a:rPr lang="en-US" sz="2550" b="1">
-                <a:solidFill>
-                  <a:srgbClr val="202B33"/>
-                </a:solidFill>
-                <a:latin typeface="Arial"/>
-                <a:ea typeface="Arial"/>
-                <a:cs typeface="Arial"/>
-              </a:rPr>
-              <a:t xml:space="preserve">integration at a time</a:t>
+              <a:t xml:space="preserve">Sorry, You're Building It</a:t>
             </a:r>
             <a:endParaRPr lang="en-US" sz="2550"/>
           </a:p>
@@ -21790,7 +21905,7 @@
                 <a:ea typeface="Arial"/>
                 <a:cs typeface="Arial"/>
               </a:rPr>
-              <a:t xml:space="preserve">lets an agent act on whatever site you have open. The</a:t>
+              <a:t xml:space="preserve">lets an agent act on any site that opts in, and the</a:t>
             </a:r>
             <a:endParaRPr lang="en-US" sz="1200"/>
           </a:p>
@@ -21813,7 +21928,7 @@
                 <a:ea typeface="Arial"/>
                 <a:cs typeface="Arial"/>
               </a:rPr>
-              <a:t xml:space="preserve">next generation of CLIs will take natural language by</a:t>
+              <a:t xml:space="preserve">list of sites that opt in only goes one direction.</a:t>
             </a:r>
             <a:endParaRPr lang="en-US" sz="1200"/>
           </a:p>
@@ -21836,7 +21951,7 @@
                 <a:ea typeface="Arial"/>
                 <a:cs typeface="Arial"/>
               </a:rPr>
-              <a:t xml:space="preserve">default, and you will pass --no-agent to get the old</a:t>
+              <a:t xml:space="preserve">The next generation of CLIs will take natural</a:t>
             </a:r>
             <a:endParaRPr lang="en-US" sz="1200"/>
           </a:p>
@@ -21859,7 +21974,7 @@
                 <a:ea typeface="Arial"/>
                 <a:cs typeface="Arial"/>
               </a:rPr>
-              <a:t xml:space="preserve">behavior back. The intermediary intelligence layer is</a:t>
+              <a:t xml:space="preserve">language by default, and you will pass --no-agent to</a:t>
             </a:r>
             <a:endParaRPr lang="en-US" sz="1200"/>
           </a:p>
@@ -21882,7 +21997,7 @@
                 <a:ea typeface="Arial"/>
                 <a:cs typeface="Arial"/>
               </a:rPr>
-              <a:t xml:space="preserve">going to wrap everything, and I know who to blame:</a:t>
+              <a:t xml:space="preserve">get the old behavior back. The intermediary</a:t>
             </a:r>
             <a:endParaRPr lang="en-US" sz="1200"/>
           </a:p>
@@ -21905,7 +22020,7 @@
                 <a:ea typeface="Arial"/>
                 <a:cs typeface="Arial"/>
               </a:rPr>
-              <a:t xml:space="preserve">the kids. Actually, the kids hate AI. It will be</a:t>
+              <a:t xml:space="preserve">intelligence layer is going to wrap everything, and I</a:t>
             </a:r>
             <a:endParaRPr lang="en-US" sz="1200"/>
           </a:p>
@@ -21928,7 +22043,7 @@
                 <a:ea typeface="Arial"/>
                 <a:cs typeface="Arial"/>
               </a:rPr>
-              <a:t xml:space="preserve">their kids who demand an agent safety blanket on</a:t>
+              <a:t xml:space="preserve">know who to blame: the kids. Actually, the kids hate</a:t>
             </a:r>
             <a:endParaRPr lang="en-US" sz="1200"/>
           </a:p>
@@ -21951,7 +22066,7 @@
                 <a:ea typeface="Arial"/>
                 <a:cs typeface="Arial"/>
               </a:rPr>
-              <a:t xml:space="preserve">everything. I will be in a rocking chair explaining</a:t>
+              <a:t xml:space="preserve">AI. It will be their kids who demand an agent safety</a:t>
             </a:r>
             <a:endParaRPr lang="en-US" sz="1200"/>
           </a:p>
@@ -21974,7 +22089,30 @@
                 <a:ea typeface="Arial"/>
                 <a:cs typeface="Arial"/>
               </a:rPr>
-              <a:t xml:space="preserve">that the internet was better on vinyl.</a:t>
+              <a:t xml:space="preserve">blanket on everything. I will be in a rocking chair</a:t>
+            </a:r>
+            <a:endParaRPr lang="en-US" sz="1200"/>
+          </a:p>
+          <a:p>
+            <a:pPr marL="0" indent="0">
+              <a:lnSpc>
+                <a:spcPts val="1575"/>
+              </a:lnSpc>
+              <a:spcAft>
+                <a:spcPts val="0"/>
+              </a:spcAft>
+              <a:buNone/>
+            </a:pPr>
+            <a:r>
+              <a:rPr lang="en-US" sz="1200" b="0">
+                <a:solidFill>
+                  <a:srgbClr val="202B33"/>
+                </a:solidFill>
+                <a:latin typeface="Arial"/>
+                <a:ea typeface="Arial"/>
+                <a:cs typeface="Arial"/>
+              </a:rPr>
+              <a:t xml:space="preserve">explaining that the internet was better on vinyl.</a:t>
             </a:r>
             <a:endParaRPr lang="en-US" sz="1200"/>
           </a:p>
@@ -22203,30 +22341,7 @@
                 <a:ea typeface="Arial"/>
                 <a:cs typeface="Arial"/>
               </a:rPr>
-              <a:t xml:space="preserve">The assistant with everything is coming, one</a:t>
-            </a:r>
-            <a:endParaRPr lang="en-US" sz="2550"/>
-          </a:p>
-          <a:p>
-            <a:pPr marL="0" indent="0">
-              <a:lnSpc>
-                <a:spcPts val="3060"/>
-              </a:lnSpc>
-              <a:spcAft>
-                <a:spcPts val="0"/>
-              </a:spcAft>
-              <a:buNone/>
-            </a:pPr>
-            <a:r>
-              <a:rPr lang="en-US" sz="2550" b="1">
-                <a:solidFill>
-                  <a:srgbClr val="202B33"/>
-                </a:solidFill>
-                <a:latin typeface="Arial"/>
-                <a:ea typeface="Arial"/>
-                <a:cs typeface="Arial"/>
-              </a:rPr>
-              <a:t xml:space="preserve">integration at a time (continued)</a:t>
+              <a:t xml:space="preserve">Sorry, You're Building It (continued)</a:t>
             </a:r>
             <a:endParaRPr lang="en-US" sz="2550"/>
           </a:p>
@@ -24884,7 +24999,7 @@
                 <a:ea typeface="Arial"/>
                 <a:cs typeface="Arial"/>
               </a:rPr>
-              <a:t xml:space="preserve">Read customer data and post to a vendor never share</a:t>
+              <a:t xml:space="preserve">Reads customer data? Then it never posts to a vendor.</a:t>
             </a:r>
             <a:endParaRPr lang="en-US" sz="1200"/>
           </a:p>
@@ -24907,7 +25022,7 @@
                 <a:ea typeface="Arial"/>
                 <a:cs typeface="Arial"/>
               </a:rPr>
-              <a:t xml:space="preserve">one agent</a:t>
+              <a:t xml:space="preserve"/>
             </a:r>
             <a:endParaRPr lang="en-US" sz="1200"/>
           </a:p>
@@ -24930,7 +25045,7 @@
                 <a:ea typeface="Arial"/>
                 <a:cs typeface="Arial"/>
               </a:rPr>
-              <a:t xml:space="preserve"/>
+              <a:t xml:space="preserve">A signed URL is a credential</a:t>
             </a:r>
             <a:endParaRPr lang="en-US" sz="1200"/>
           </a:p>
@@ -24953,7 +25068,7 @@
                 <a:ea typeface="Arial"/>
                 <a:cs typeface="Arial"/>
               </a:rPr>
-              <a:t xml:space="preserve">A signed URL is a credential</a:t>
+              <a:t xml:space="preserve"/>
             </a:r>
             <a:endParaRPr lang="en-US" sz="1200"/>
           </a:p>
@@ -24976,7 +25091,7 @@
                 <a:ea typeface="Arial"/>
                 <a:cs typeface="Arial"/>
               </a:rPr>
-              <a:t xml:space="preserve"/>
+              <a:t xml:space="preserve">Two guards do most of the work. First, tools come in</a:t>
             </a:r>
             <a:endParaRPr lang="en-US" sz="1200"/>
           </a:p>
@@ -24999,7 +25114,7 @@
                 <a:ea typeface="Arial"/>
                 <a:cs typeface="Arial"/>
               </a:rPr>
-              <a:t xml:space="preserve">Two guards do most of the work. First, tools come in</a:t>
+              <a:t xml:space="preserve">risk classes. Read is cheap to grant. Write, send,</a:t>
             </a:r>
             <a:endParaRPr lang="en-US" sz="1200"/>
           </a:p>
@@ -25022,7 +25137,7 @@
                 <a:ea typeface="Arial"/>
                 <a:cs typeface="Arial"/>
               </a:rPr>
-              <a:t xml:space="preserve">risk classes. Read is cheap to grant. Write, send,</a:t>
+              <a:t xml:space="preserve">pay, delete, deploy and export each need their own</a:t>
             </a:r>
             <a:endParaRPr lang="en-US" sz="1200"/>
           </a:p>
@@ -25045,7 +25160,7 @@
                 <a:ea typeface="Arial"/>
                 <a:cs typeface="Arial"/>
               </a:rPr>
-              <a:t xml:space="preserve">pay, delete, deploy and export each need their own</a:t>
+              <a:t xml:space="preserve">approval path, and a generated agent gets at most one</a:t>
             </a:r>
             <a:endParaRPr lang="en-US" sz="1200"/>
           </a:p>
@@ -25075,29 +25190,6 @@
             <a:noAutofit/>
           </a:bodyPr>
           <a:lstStyle/>
-          <a:p>
-            <a:pPr marL="0" indent="0">
-              <a:lnSpc>
-                <a:spcPts val="1575"/>
-              </a:lnSpc>
-              <a:spcAft>
-                <a:spcPts val="0"/>
-              </a:spcAft>
-              <a:buNone/>
-            </a:pPr>
-            <a:r>
-              <a:rPr lang="en-US" sz="1200" b="0">
-                <a:solidFill>
-                  <a:srgbClr val="202B33"/>
-                </a:solidFill>
-                <a:latin typeface="Arial"/>
-                <a:ea typeface="Arial"/>
-                <a:cs typeface="Arial"/>
-              </a:rPr>
-              <a:t xml:space="preserve">approval path, and a generated agent gets at most one</a:t>
-            </a:r>
-            <a:endParaRPr lang="en-US" sz="1200"/>
-          </a:p>
           <a:p>
             <a:pPr marL="0" indent="0">
               <a:lnSpc>

--- a/artifacts/speaking-portfolio-expanded/decks/adaptive-systems-30min-handout.pptx
+++ b/artifacts/speaking-portfolio-expanded/decks/adaptive-systems-30min-handout.pptx
@@ -26,8 +26,6 @@
     <p:sldId id="271" r:id="rIdSlide16"/>
     <p:sldId id="272" r:id="rIdSlide17"/>
     <p:sldId id="273" r:id="rIdSlide18"/>
-    <p:sldId id="274" r:id="rIdSlide19"/>
-    <p:sldId id="275" r:id="rIdSlide20"/>
   </p:sldIdLst>
   <p:sldSz cx="10058400" cy="7772400" type="custom"/>
   <p:notesSz cx="6858000" cy="9144000"/>
@@ -363,7 +361,7 @@
                 <a:ea typeface="Arial"/>
                 <a:cs typeface="Arial"/>
               </a:rPr>
-              <a:t xml:space="preserve">Source slide 6. 11:30 to 14:00</a:t>
+              <a:t xml:space="preserve">Source slide 6. 13:15 to 15:00</a:t>
             </a:r>
             <a:endParaRPr lang="en-US" sz="1200"/>
           </a:p>
@@ -844,7 +842,7 @@
                 <a:ea typeface="Arial"/>
                 <a:cs typeface="Arial"/>
               </a:rPr>
-              <a:t xml:space="preserve">Source slide 7. 14:00 to 15:30</a:t>
+              <a:t xml:space="preserve">Source slide 7. 15:00 to 16:15</a:t>
             </a:r>
             <a:endParaRPr lang="en-US" sz="1200"/>
           </a:p>
@@ -1325,7 +1323,7 @@
                 <a:ea typeface="Arial"/>
                 <a:cs typeface="Arial"/>
               </a:rPr>
-              <a:t xml:space="preserve">Source slide 9. 15:30 to 17:00</a:t>
+              <a:t xml:space="preserve">Source slide 9. 16:15 to 17:30</a:t>
             </a:r>
             <a:endParaRPr lang="en-US" sz="1200"/>
           </a:p>
@@ -1760,7 +1758,7 @@
                 <a:ea typeface="Arial"/>
                 <a:cs typeface="Arial"/>
               </a:rPr>
-              <a:t xml:space="preserve">Source slide 10. 17:00 to 21:30</a:t>
+              <a:t xml:space="preserve">Source slide 10. 17:30 to 21:30</a:t>
             </a:r>
             <a:endParaRPr lang="en-US" sz="1200"/>
           </a:p>
@@ -2333,7 +2331,7 @@
                 <a:ea typeface="Arial"/>
                 <a:cs typeface="Arial"/>
               </a:rPr>
-              <a:t xml:space="preserve">Source slide 11. 21:30 to 24:00</a:t>
+              <a:t xml:space="preserve">Source slide 11. 21:30 to 23:15</a:t>
             </a:r>
             <a:endParaRPr lang="en-US" sz="1200"/>
           </a:p>
@@ -2609,52 +2607,6 @@
                 <a:ea typeface="Arial"/>
                 <a:cs typeface="Arial"/>
               </a:rPr>
-              <a:t xml:space="preserve">The guard is the same one we used for tools. The agent chooses from a catalog of approved instance classes; the scheduler enforces leases and teardown; an unapproved faster region is not a candidate no matter how good the latency looks. The mechanics and the ecosystem are a companion talk.</a:t>
-            </a:r>
-            <a:endParaRPr lang="en-US" sz="1200"/>
-          </a:p>
-          <a:p>
-            <a:pPr marL="0" indent="0">
-              <a:lnSpc>
-                <a:spcPts val="1560"/>
-              </a:lnSpc>
-              <a:spcAft>
-                <a:spcPts val="0"/>
-              </a:spcAft>
-              <a:buNone/>
-            </a:pPr>
-            <a:r>
-              <a:rPr lang="en-US" sz="1200" b="0">
-                <a:solidFill>
-                  <a:srgbClr val="202b33"/>
-                </a:solidFill>
-                <a:latin typeface="Arial"/>
-                <a:ea typeface="Arial"/>
-                <a:cs typeface="Arial"/>
-              </a:rPr>
-              <a:t xml:space="preserve"/>
-            </a:r>
-            <a:endParaRPr lang="en-US" sz="1200"/>
-          </a:p>
-          <a:p>
-            <a:pPr marL="0" indent="0">
-              <a:lnSpc>
-                <a:spcPts val="1560"/>
-              </a:lnSpc>
-              <a:spcAft>
-                <a:spcPts val="0"/>
-              </a:spcAft>
-              <a:buNone/>
-            </a:pPr>
-            <a:r>
-              <a:rPr lang="en-US" sz="1200" b="0">
-                <a:solidFill>
-                  <a:srgbClr val="202b33"/>
-                </a:solidFill>
-                <a:latin typeface="Arial"/>
-                <a:ea typeface="Arial"/>
-                <a:cs typeface="Arial"/>
-              </a:rPr>
               <a:t xml:space="preserve">A job where per-customer compute would have changed the pricing conversation.</a:t>
             </a:r>
             <a:endParaRPr lang="en-US" sz="1200"/>
@@ -2747,7 +2699,7 @@
                 <a:ea typeface="Arial"/>
                 <a:cs typeface="Arial"/>
               </a:rPr>
-              <a:t xml:space="preserve">Bridge: whatever the app changed today, an engineer sees it in one report, and authority widens only from measured outcomes.</a:t>
+              <a:t xml:space="preserve">Bridge: the compute guard is the tool guard — an approved catalog, enforced leases, and no unapproved region no matter how good the latency looks. Whatever the app changed today, an engineer sees it in one report, and authority widens only from measured outcomes on the same recorded incidents: recoveries, but also false repairs, dropped records, cost and human corrections.</a:t>
             </a:r>
             <a:endParaRPr lang="en-US" sz="1200"/>
           </a:p>
@@ -2860,421 +2812,421 @@
                 <a:ea typeface="Arial"/>
                 <a:cs typeface="Arial"/>
               </a:rPr>
-              <a:t xml:space="preserve">Source slide 11. 21:30 to 24:00</a:t>
-            </a:r>
-            <a:endParaRPr lang="en-US" sz="1200"/>
-          </a:p>
-          <a:p>
-            <a:pPr marL="0" indent="0">
-              <a:lnSpc>
-                <a:spcPts val="1560"/>
-              </a:lnSpc>
-              <a:spcAft>
-                <a:spcPts val="0"/>
-              </a:spcAft>
-              <a:buNone/>
-            </a:pPr>
-            <a:r>
-              <a:rPr lang="en-US" sz="1200" b="0">
-                <a:solidFill>
-                  <a:srgbClr val="202b33"/>
-                </a:solidFill>
-                <a:latin typeface="Arial"/>
-                <a:ea typeface="Arial"/>
-                <a:cs typeface="Arial"/>
-              </a:rPr>
-              <a:t xml:space="preserve"/>
-            </a:r>
-            <a:endParaRPr lang="en-US" sz="1200"/>
-          </a:p>
-          <a:p>
-            <a:pPr marL="0" indent="0">
-              <a:lnSpc>
-                <a:spcPts val="1560"/>
-              </a:lnSpc>
-              <a:spcAft>
-                <a:spcPts val="0"/>
-              </a:spcAft>
-              <a:buNone/>
-            </a:pPr>
-            <a:r>
-              <a:rPr lang="en-US" sz="1200" b="0">
-                <a:solidFill>
-                  <a:srgbClr val="202b33"/>
-                </a:solidFill>
-                <a:latin typeface="Arial"/>
-                <a:ea typeface="Arial"/>
-                <a:cs typeface="Arial"/>
-              </a:rPr>
-              <a:t xml:space="preserve">Old: ops sizes the fleet for everyone</a:t>
-            </a:r>
-            <a:endParaRPr lang="en-US" sz="1200"/>
-          </a:p>
-          <a:p>
-            <a:pPr marL="0" indent="0">
-              <a:lnSpc>
-                <a:spcPts val="1560"/>
-              </a:lnSpc>
-              <a:spcAft>
-                <a:spcPts val="0"/>
-              </a:spcAft>
-              <a:buNone/>
-            </a:pPr>
-            <a:r>
-              <a:rPr lang="en-US" sz="1200" b="0">
-                <a:solidFill>
-                  <a:srgbClr val="202b33"/>
-                </a:solidFill>
-                <a:latin typeface="Arial"/>
-                <a:ea typeface="Arial"/>
-                <a:cs typeface="Arial"/>
-              </a:rPr>
-              <a:t xml:space="preserve"/>
-            </a:r>
-            <a:endParaRPr lang="en-US" sz="1200"/>
-          </a:p>
-          <a:p>
-            <a:pPr marL="0" indent="0">
-              <a:lnSpc>
-                <a:spcPts val="1560"/>
-              </a:lnSpc>
-              <a:spcAft>
-                <a:spcPts val="0"/>
-              </a:spcAft>
-              <a:buNone/>
-            </a:pPr>
-            <a:r>
-              <a:rPr lang="en-US" sz="1200" b="0">
-                <a:solidFill>
-                  <a:srgbClr val="202b33"/>
-                </a:solidFill>
-                <a:latin typeface="Arial"/>
-                <a:ea typeface="Arial"/>
-                <a:cs typeface="Arial"/>
-              </a:rPr>
-              <a:t xml:space="preserve">New: the job describes its shape and asks</a:t>
-            </a:r>
-            <a:endParaRPr lang="en-US" sz="1200"/>
-          </a:p>
-          <a:p>
-            <a:pPr marL="0" indent="0">
-              <a:lnSpc>
-                <a:spcPts val="1560"/>
-              </a:lnSpc>
-              <a:spcAft>
-                <a:spcPts val="0"/>
-              </a:spcAft>
-              <a:buNone/>
-            </a:pPr>
-            <a:r>
-              <a:rPr lang="en-US" sz="1200" b="0">
-                <a:solidFill>
-                  <a:srgbClr val="202b33"/>
-                </a:solidFill>
-                <a:latin typeface="Arial"/>
-                <a:ea typeface="Arial"/>
-                <a:cs typeface="Arial"/>
-              </a:rPr>
-              <a:t xml:space="preserve"/>
-            </a:r>
-            <a:endParaRPr lang="en-US" sz="1200"/>
-          </a:p>
-          <a:p>
-            <a:pPr marL="0" indent="0">
-              <a:lnSpc>
-                <a:spcPts val="1560"/>
-              </a:lnSpc>
-              <a:spcAft>
-                <a:spcPts val="0"/>
-              </a:spcAft>
-              <a:buNone/>
-            </a:pPr>
-            <a:r>
-              <a:rPr lang="en-US" sz="1200" b="0">
-                <a:solidFill>
-                  <a:srgbClr val="202b33"/>
-                </a:solidFill>
-                <a:latin typeface="Arial"/>
-                <a:ea typeface="Arial"/>
-                <a:cs typeface="Arial"/>
-              </a:rPr>
-              <a:t xml:space="preserve">Per-customer, per-job cost controls and pay-for-performance</a:t>
-            </a:r>
-            <a:endParaRPr lang="en-US" sz="1200"/>
-          </a:p>
-          <a:p>
-            <a:pPr marL="0" indent="0">
-              <a:lnSpc>
-                <a:spcPts val="1560"/>
-              </a:lnSpc>
-              <a:spcAft>
-                <a:spcPts val="0"/>
-              </a:spcAft>
-              <a:buNone/>
-            </a:pPr>
-            <a:r>
-              <a:rPr lang="en-US" sz="1200" b="0">
-                <a:solidFill>
-                  <a:srgbClr val="202b33"/>
-                </a:solidFill>
-                <a:latin typeface="Arial"/>
-                <a:ea typeface="Arial"/>
-                <a:cs typeface="Arial"/>
-              </a:rPr>
-              <a:t xml:space="preserve"/>
-            </a:r>
-            <a:endParaRPr lang="en-US" sz="1200"/>
-          </a:p>
-          <a:p>
-            <a:pPr marL="0" indent="0">
-              <a:lnSpc>
-                <a:spcPts val="1560"/>
-              </a:lnSpc>
-              <a:spcAft>
-                <a:spcPts val="0"/>
-              </a:spcAft>
-              <a:buNone/>
-            </a:pPr>
-            <a:r>
-              <a:rPr lang="en-US" sz="1200" b="0">
-                <a:solidFill>
-                  <a:srgbClr val="202b33"/>
-                </a:solidFill>
-                <a:latin typeface="Arial"/>
-                <a:ea typeface="Arial"/>
-                <a:cs typeface="Arial"/>
-              </a:rPr>
-              <a:t xml:space="preserve">One more thing the orchestrator can conjure: compute. Today scaling is an infra decision made once for everyone. Replica counts, instance classes, an autoscaler watching CPU. The agent inverts that. It knows this batch is mostly waiting on a provider, that eight sandboxes for six minutes would clear the backlog, and what this customer's plan allows.</a:t>
-            </a:r>
-            <a:endParaRPr lang="en-US" sz="1200"/>
-          </a:p>
-          <a:p>
-            <a:pPr marL="0" indent="0">
-              <a:lnSpc>
-                <a:spcPts val="1560"/>
-              </a:lnSpc>
-              <a:spcAft>
-                <a:spcPts val="0"/>
-              </a:spcAft>
-              <a:buNone/>
-            </a:pPr>
-            <a:r>
-              <a:rPr lang="en-US" sz="1200" b="0">
-                <a:solidFill>
-                  <a:srgbClr val="202b33"/>
-                </a:solidFill>
-                <a:latin typeface="Arial"/>
-                <a:ea typeface="Arial"/>
-                <a:cs typeface="Arial"/>
-              </a:rPr>
-              <a:t xml:space="preserve"/>
-            </a:r>
-            <a:endParaRPr lang="en-US" sz="1200"/>
-          </a:p>
-          <a:p>
-            <a:pPr marL="0" indent="0">
-              <a:lnSpc>
-                <a:spcPts val="1560"/>
-              </a:lnSpc>
-              <a:spcAft>
-                <a:spcPts val="0"/>
-              </a:spcAft>
-              <a:buNone/>
-            </a:pPr>
-            <a:r>
-              <a:rPr lang="en-US" sz="1200" b="0">
-                <a:solidFill>
-                  <a:srgbClr val="202b33"/>
-                </a:solidFill>
-                <a:latin typeface="Arial"/>
-                <a:ea typeface="Arial"/>
-                <a:cs typeface="Arial"/>
-              </a:rPr>
-              <a:t xml:space="preserve">So it asks. The request names shape, size, duration and a cost cap, and it is charged to this customer or this job rather than to a shared cluster. That is a new product surface: a customer can buy a faster turnaround, and a finance team can cap a single workflow instead of a whole environment.</a:t>
-            </a:r>
-            <a:endParaRPr lang="en-US" sz="1200"/>
-          </a:p>
-          <a:p>
-            <a:pPr marL="0" indent="0">
-              <a:lnSpc>
-                <a:spcPts val="1560"/>
-              </a:lnSpc>
-              <a:spcAft>
-                <a:spcPts val="0"/>
-              </a:spcAft>
-              <a:buNone/>
-            </a:pPr>
-            <a:r>
-              <a:rPr lang="en-US" sz="1200" b="0">
-                <a:solidFill>
-                  <a:srgbClr val="202b33"/>
-                </a:solidFill>
-                <a:latin typeface="Arial"/>
-                <a:ea typeface="Arial"/>
-                <a:cs typeface="Arial"/>
-              </a:rPr>
-              <a:t xml:space="preserve"/>
-            </a:r>
-            <a:endParaRPr lang="en-US" sz="1200"/>
-          </a:p>
-          <a:p>
-            <a:pPr marL="0" indent="0">
-              <a:lnSpc>
-                <a:spcPts val="1560"/>
-              </a:lnSpc>
-              <a:spcAft>
-                <a:spcPts val="0"/>
-              </a:spcAft>
-              <a:buNone/>
-            </a:pPr>
-            <a:r>
-              <a:rPr lang="en-US" sz="1200" b="0">
-                <a:solidFill>
-                  <a:srgbClr val="202b33"/>
-                </a:solidFill>
-                <a:latin typeface="Arial"/>
-                <a:ea typeface="Arial"/>
-                <a:cs typeface="Arial"/>
-              </a:rPr>
-              <a:t xml:space="preserve">The guard is the same one we used for tools. The agent chooses from a catalog of approved instance classes; the scheduler enforces leases and teardown; an unapproved faster region is not a candidate no matter how good the latency looks. The mechanics and the ecosystem are a companion talk.</a:t>
-            </a:r>
-            <a:endParaRPr lang="en-US" sz="1200"/>
-          </a:p>
-          <a:p>
-            <a:pPr marL="0" indent="0">
-              <a:lnSpc>
-                <a:spcPts val="1560"/>
-              </a:lnSpc>
-              <a:spcAft>
-                <a:spcPts val="0"/>
-              </a:spcAft>
-              <a:buNone/>
-            </a:pPr>
-            <a:r>
-              <a:rPr lang="en-US" sz="1200" b="0">
-                <a:solidFill>
-                  <a:srgbClr val="202b33"/>
-                </a:solidFill>
-                <a:latin typeface="Arial"/>
-                <a:ea typeface="Arial"/>
-                <a:cs typeface="Arial"/>
-              </a:rPr>
-              <a:t xml:space="preserve"/>
-            </a:r>
-            <a:endParaRPr lang="en-US" sz="1200"/>
-          </a:p>
-          <a:p>
-            <a:pPr marL="0" indent="0">
-              <a:lnSpc>
-                <a:spcPts val="1560"/>
-              </a:lnSpc>
-              <a:spcAft>
-                <a:spcPts val="0"/>
-              </a:spcAft>
-              <a:buNone/>
-            </a:pPr>
-            <a:r>
-              <a:rPr lang="en-US" sz="1200" b="0">
-                <a:solidFill>
-                  <a:srgbClr val="202b33"/>
-                </a:solidFill>
-                <a:latin typeface="Arial"/>
-                <a:ea typeface="Arial"/>
-                <a:cs typeface="Arial"/>
-              </a:rPr>
-              <a:t xml:space="preserve">A job where per-customer compute would have changed the pricing conversation.</a:t>
-            </a:r>
-            <a:endParaRPr lang="en-US" sz="1200"/>
-          </a:p>
-          <a:p>
-            <a:pPr marL="0" indent="0">
-              <a:lnSpc>
-                <a:spcPts val="1560"/>
-              </a:lnSpc>
-              <a:spcAft>
-                <a:spcPts val="0"/>
-              </a:spcAft>
-              <a:buNone/>
-            </a:pPr>
-            <a:r>
-              <a:rPr lang="en-US" sz="1200" b="0">
-                <a:solidFill>
-                  <a:srgbClr val="202b33"/>
-                </a:solidFill>
-                <a:latin typeface="Arial"/>
-                <a:ea typeface="Arial"/>
-                <a:cs typeface="Arial"/>
-              </a:rPr>
-              <a:t xml:space="preserve"/>
-            </a:r>
-            <a:endParaRPr lang="en-US" sz="1200"/>
-          </a:p>
-          <a:p>
-            <a:pPr marL="0" indent="0">
-              <a:lnSpc>
-                <a:spcPts val="1560"/>
-              </a:lnSpc>
-              <a:spcAft>
-                <a:spcPts val="0"/>
-              </a:spcAft>
-              <a:buNone/>
-            </a:pPr>
-            <a:r>
-              <a:rPr lang="en-US" sz="1200" b="0">
-                <a:solidFill>
-                  <a:srgbClr val="202b33"/>
-                </a:solidFill>
-                <a:latin typeface="Arial"/>
-                <a:ea typeface="Arial"/>
-                <a:cs typeface="Arial"/>
-              </a:rPr>
-              <a:t xml:space="preserve">Contrast one autoscaler threshold with one job request. Ask which one a customer could be billed for.</a:t>
-            </a:r>
-            <a:endParaRPr lang="en-US" sz="1200"/>
-          </a:p>
-          <a:p>
-            <a:pPr marL="0" indent="0">
-              <a:lnSpc>
-                <a:spcPts val="1560"/>
-              </a:lnSpc>
-              <a:spcAft>
-                <a:spcPts val="0"/>
-              </a:spcAft>
-              <a:buNone/>
-            </a:pPr>
-            <a:r>
-              <a:rPr lang="en-US" sz="1200" b="0">
-                <a:solidFill>
-                  <a:srgbClr val="202b33"/>
-                </a:solidFill>
-                <a:latin typeface="Arial"/>
-                <a:ea typeface="Arial"/>
-                <a:cs typeface="Arial"/>
-              </a:rPr>
-              <a:t xml:space="preserve"/>
-            </a:r>
-            <a:endParaRPr lang="en-US" sz="1200"/>
-          </a:p>
-          <a:p>
-            <a:pPr marL="0" indent="0">
-              <a:lnSpc>
-                <a:spcPts val="1560"/>
-              </a:lnSpc>
-              <a:spcAft>
-                <a:spcPts val="0"/>
-              </a:spcAft>
-              <a:buNone/>
-            </a:pPr>
-            <a:r>
-              <a:rPr lang="en-US" sz="1200" b="0">
-                <a:solidFill>
-                  <a:srgbClr val="202b33"/>
-                </a:solidFill>
-                <a:latin typeface="Arial"/>
-                <a:ea typeface="Arial"/>
-                <a:cs typeface="Arial"/>
-              </a:rPr>
-              <a:t xml:space="preserve">Bridge: whatever the app changed today, an engineer sees it in one report, and authority widens only from measured outcomes.</a:t>
+              <a:t xml:space="preserve">Source slide 13. 23:15 to 25:15</a:t>
+            </a:r>
+            <a:endParaRPr lang="en-US" sz="1200"/>
+          </a:p>
+          <a:p>
+            <a:pPr marL="0" indent="0">
+              <a:lnSpc>
+                <a:spcPts val="1560"/>
+              </a:lnSpc>
+              <a:spcAft>
+                <a:spcPts val="0"/>
+              </a:spcAft>
+              <a:buNone/>
+            </a:pPr>
+            <a:r>
+              <a:rPr lang="en-US" sz="1200" b="0">
+                <a:solidFill>
+                  <a:srgbClr val="202b33"/>
+                </a:solidFill>
+                <a:latin typeface="Arial"/>
+                <a:ea typeface="Arial"/>
+                <a:cs typeface="Arial"/>
+              </a:rPr>
+              <a:t xml:space="preserve"/>
+            </a:r>
+            <a:endParaRPr lang="en-US" sz="1200"/>
+          </a:p>
+          <a:p>
+            <a:pPr marL="0" indent="0">
+              <a:lnSpc>
+                <a:spcPts val="1560"/>
+              </a:lnSpc>
+              <a:spcAft>
+                <a:spcPts val="0"/>
+              </a:spcAft>
+              <a:buNone/>
+            </a:pPr>
+            <a:r>
+              <a:rPr lang="en-US" sz="1200" b="0">
+                <a:solidFill>
+                  <a:srgbClr val="202b33"/>
+                </a:solidFill>
+                <a:latin typeface="Arial"/>
+                <a:ea typeface="Arial"/>
+                <a:cs typeface="Arial"/>
+              </a:rPr>
+              <a:t xml:space="preserve">Shadow: propose, apply nothing</a:t>
+            </a:r>
+            <a:endParaRPr lang="en-US" sz="1200"/>
+          </a:p>
+          <a:p>
+            <a:pPr marL="0" indent="0">
+              <a:lnSpc>
+                <a:spcPts val="1560"/>
+              </a:lnSpc>
+              <a:spcAft>
+                <a:spcPts val="0"/>
+              </a:spcAft>
+              <a:buNone/>
+            </a:pPr>
+            <a:r>
+              <a:rPr lang="en-US" sz="1200" b="0">
+                <a:solidFill>
+                  <a:srgbClr val="202b33"/>
+                </a:solidFill>
+                <a:latin typeface="Arial"/>
+                <a:ea typeface="Arial"/>
+                <a:cs typeface="Arial"/>
+              </a:rPr>
+              <a:t xml:space="preserve"/>
+            </a:r>
+            <a:endParaRPr lang="en-US" sz="1200"/>
+          </a:p>
+          <a:p>
+            <a:pPr marL="0" indent="0">
+              <a:lnSpc>
+                <a:spcPts val="1560"/>
+              </a:lnSpc>
+              <a:spcAft>
+                <a:spcPts val="0"/>
+              </a:spcAft>
+              <a:buNone/>
+            </a:pPr>
+            <a:r>
+              <a:rPr lang="en-US" sz="1200" b="0">
+                <a:solidFill>
+                  <a:srgbClr val="202b33"/>
+                </a:solidFill>
+                <a:latin typeface="Arial"/>
+                <a:ea typeface="Arial"/>
+                <a:cs typeface="Arial"/>
+              </a:rPr>
+              <a:t xml:space="preserve">Canary: one reversible change class</a:t>
+            </a:r>
+            <a:endParaRPr lang="en-US" sz="1200"/>
+          </a:p>
+          <a:p>
+            <a:pPr marL="0" indent="0">
+              <a:lnSpc>
+                <a:spcPts val="1560"/>
+              </a:lnSpc>
+              <a:spcAft>
+                <a:spcPts val="0"/>
+              </a:spcAft>
+              <a:buNone/>
+            </a:pPr>
+            <a:r>
+              <a:rPr lang="en-US" sz="1200" b="0">
+                <a:solidFill>
+                  <a:srgbClr val="202b33"/>
+                </a:solidFill>
+                <a:latin typeface="Arial"/>
+                <a:ea typeface="Arial"/>
+                <a:cs typeface="Arial"/>
+              </a:rPr>
+              <a:t xml:space="preserve"/>
+            </a:r>
+            <a:endParaRPr lang="en-US" sz="1200"/>
+          </a:p>
+          <a:p>
+            <a:pPr marL="0" indent="0">
+              <a:lnSpc>
+                <a:spcPts val="1560"/>
+              </a:lnSpc>
+              <a:spcAft>
+                <a:spcPts val="0"/>
+              </a:spcAft>
+              <a:buNone/>
+            </a:pPr>
+            <a:r>
+              <a:rPr lang="en-US" sz="1200" b="0">
+                <a:solidFill>
+                  <a:srgbClr val="202b33"/>
+                </a:solidFill>
+                <a:latin typeface="Arial"/>
+                <a:ea typeface="Arial"/>
+                <a:cs typeface="Arial"/>
+              </a:rPr>
+              <a:t xml:space="preserve">Expand: from correct recoveries, false repairs, cost, interventions</a:t>
+            </a:r>
+            <a:endParaRPr lang="en-US" sz="1200"/>
+          </a:p>
+          <a:p>
+            <a:pPr marL="0" indent="0">
+              <a:lnSpc>
+                <a:spcPts val="1560"/>
+              </a:lnSpc>
+              <a:spcAft>
+                <a:spcPts val="0"/>
+              </a:spcAft>
+              <a:buNone/>
+            </a:pPr>
+            <a:r>
+              <a:rPr lang="en-US" sz="1200" b="0">
+                <a:solidFill>
+                  <a:srgbClr val="202b33"/>
+                </a:solidFill>
+                <a:latin typeface="Arial"/>
+                <a:ea typeface="Arial"/>
+                <a:cs typeface="Arial"/>
+              </a:rPr>
+              <a:t xml:space="preserve"/>
+            </a:r>
+            <a:endParaRPr lang="en-US" sz="1200"/>
+          </a:p>
+          <a:p>
+            <a:pPr marL="0" indent="0">
+              <a:lnSpc>
+                <a:spcPts val="1560"/>
+              </a:lnSpc>
+              <a:spcAft>
+                <a:spcPts val="0"/>
+              </a:spcAft>
+              <a:buNone/>
+            </a:pPr>
+            <a:r>
+              <a:rPr lang="en-US" sz="1200" b="0">
+                <a:solidFill>
+                  <a:srgbClr val="202b33"/>
+                </a:solidFill>
+                <a:latin typeface="Arial"/>
+                <a:ea typeface="Arial"/>
+                <a:cs typeface="Arial"/>
+              </a:rPr>
+              <a:t xml:space="preserve">Start in shadow mode: the conjured agents propose artifacts and apply none. Then permit one reversible change class. Widen authority per class, from evidence about that class. This is the same discipline for tools and for compute. It is also the loop that lets the system adjust its own fan-out and token burn from measured acceptance: acceptance up and false repairs flat, that job class gets more parallel attempts and a bigger budget; false repairs up, both come down.</a:t>
+            </a:r>
+            <a:endParaRPr lang="en-US" sz="1200"/>
+          </a:p>
+          <a:p>
+            <a:pPr marL="0" indent="0">
+              <a:lnSpc>
+                <a:spcPts val="1560"/>
+              </a:lnSpc>
+              <a:spcAft>
+                <a:spcPts val="0"/>
+              </a:spcAft>
+              <a:buNone/>
+            </a:pPr>
+            <a:r>
+              <a:rPr lang="en-US" sz="1200" b="0">
+                <a:solidFill>
+                  <a:srgbClr val="202b33"/>
+                </a:solidFill>
+                <a:latin typeface="Arial"/>
+                <a:ea typeface="Arial"/>
+                <a:cs typeface="Arial"/>
+              </a:rPr>
+              <a:t xml:space="preserve"/>
+            </a:r>
+            <a:endParaRPr lang="en-US" sz="1200"/>
+          </a:p>
+          <a:p>
+            <a:pPr marL="0" indent="0">
+              <a:lnSpc>
+                <a:spcPts val="1560"/>
+              </a:lnSpc>
+              <a:spcAft>
+                <a:spcPts val="0"/>
+              </a:spcAft>
+              <a:buNone/>
+            </a:pPr>
+            <a:r>
+              <a:rPr lang="en-US" sz="1200" b="0">
+                <a:solidFill>
+                  <a:srgbClr val="202b33"/>
+                </a:solidFill>
+                <a:latin typeface="Arial"/>
+                <a:ea typeface="Arial"/>
+                <a:cs typeface="Arial"/>
+              </a:rPr>
+              <a:t xml:space="preserve">Watch for the failure Diane Vaughan documented at NASA before Challenger and named normalization of deviance. Every widening is locally reasonable. Each one cites the last one as precedent. Nobody ever decides to be reckless. That is exactly why authority expands per class and from measured outcomes for that class, and never from how the last six went.</a:t>
+            </a:r>
+            <a:endParaRPr lang="en-US" sz="1200"/>
+          </a:p>
+          <a:p>
+            <a:pPr marL="0" indent="0">
+              <a:lnSpc>
+                <a:spcPts val="1560"/>
+              </a:lnSpc>
+              <a:spcAft>
+                <a:spcPts val="0"/>
+              </a:spcAft>
+              <a:buNone/>
+            </a:pPr>
+            <a:r>
+              <a:rPr lang="en-US" sz="1200" b="0">
+                <a:solidFill>
+                  <a:srgbClr val="202b33"/>
+                </a:solidFill>
+                <a:latin typeface="Arial"/>
+                <a:ea typeface="Arial"/>
+                <a:cs typeface="Arial"/>
+              </a:rPr>
+              <a:t xml:space="preserve"/>
+            </a:r>
+            <a:endParaRPr lang="en-US" sz="1200"/>
+          </a:p>
+          <a:p>
+            <a:pPr marL="0" indent="0">
+              <a:lnSpc>
+                <a:spcPts val="1560"/>
+              </a:lnSpc>
+              <a:spcAft>
+                <a:spcPts val="0"/>
+              </a:spcAft>
+              <a:buNone/>
+            </a:pPr>
+            <a:r>
+              <a:rPr lang="en-US" sz="1200" b="0">
+                <a:solidFill>
+                  <a:srgbClr val="202b33"/>
+                </a:solidFill>
+                <a:latin typeface="Arial"/>
+                <a:ea typeface="Arial"/>
+                <a:cs typeface="Arial"/>
+              </a:rPr>
+              <a:t xml:space="preserve">Vaughan (1996), The Challenger Launch Decision, University of Chicago Press, on normalization of deviance.</a:t>
+            </a:r>
+            <a:endParaRPr lang="en-US" sz="1200"/>
+          </a:p>
+          <a:p>
+            <a:pPr marL="0" indent="0">
+              <a:lnSpc>
+                <a:spcPts val="1560"/>
+              </a:lnSpc>
+              <a:spcAft>
+                <a:spcPts val="0"/>
+              </a:spcAft>
+              <a:buNone/>
+            </a:pPr>
+            <a:r>
+              <a:rPr lang="en-US" sz="1200" b="0">
+                <a:solidFill>
+                  <a:srgbClr val="202b33"/>
+                </a:solidFill>
+                <a:latin typeface="Arial"/>
+                <a:ea typeface="Arial"/>
+                <a:cs typeface="Arial"/>
+              </a:rPr>
+              <a:t xml:space="preserve"/>
+            </a:r>
+            <a:endParaRPr lang="en-US" sz="1200"/>
+          </a:p>
+          <a:p>
+            <a:pPr marL="0" indent="0">
+              <a:lnSpc>
+                <a:spcPts val="1560"/>
+              </a:lnSpc>
+              <a:spcAft>
+                <a:spcPts val="0"/>
+              </a:spcAft>
+              <a:buNone/>
+            </a:pPr>
+            <a:r>
+              <a:rPr lang="en-US" sz="1200" b="0">
+                <a:solidFill>
+                  <a:srgbClr val="202b33"/>
+                </a:solidFill>
+                <a:latin typeface="Arial"/>
+                <a:ea typeface="Arial"/>
+                <a:cs typeface="Arial"/>
+              </a:rPr>
+              <a:t xml:space="preserve"/>
+            </a:r>
+            <a:endParaRPr lang="en-US" sz="1200"/>
+          </a:p>
+          <a:p>
+            <a:pPr marL="0" indent="0">
+              <a:lnSpc>
+                <a:spcPts val="1560"/>
+              </a:lnSpc>
+              <a:spcAft>
+                <a:spcPts val="0"/>
+              </a:spcAft>
+              <a:buNone/>
+            </a:pPr>
+            <a:r>
+              <a:rPr lang="en-US" sz="1200" b="0">
+                <a:solidFill>
+                  <a:srgbClr val="202b33"/>
+                </a:solidFill>
+                <a:latin typeface="Arial"/>
+                <a:ea typeface="Arial"/>
+                <a:cs typeface="Arial"/>
+              </a:rPr>
+              <a:t xml:space="preserve"/>
+            </a:r>
+            <a:endParaRPr lang="en-US" sz="1200"/>
+          </a:p>
+          <a:p>
+            <a:pPr marL="0" indent="0">
+              <a:lnSpc>
+                <a:spcPts val="1560"/>
+              </a:lnSpc>
+              <a:spcAft>
+                <a:spcPts val="0"/>
+              </a:spcAft>
+              <a:buNone/>
+            </a:pPr>
+            <a:r>
+              <a:rPr lang="en-US" sz="1200" b="0">
+                <a:solidFill>
+                  <a:srgbClr val="202b33"/>
+                </a:solidFill>
+                <a:latin typeface="Arial"/>
+                <a:ea typeface="Arial"/>
+                <a:cs typeface="Arial"/>
+              </a:rPr>
+              <a:t xml:space="preserve">Thirty seconds on the recovery card in contracts.md. Take one answer and name the evidence needed to widen that authority.</a:t>
+            </a:r>
+            <a:endParaRPr lang="en-US" sz="1200"/>
+          </a:p>
+          <a:p>
+            <a:pPr marL="0" indent="0">
+              <a:lnSpc>
+                <a:spcPts val="1560"/>
+              </a:lnSpc>
+              <a:spcAft>
+                <a:spcPts val="0"/>
+              </a:spcAft>
+              <a:buNone/>
+            </a:pPr>
+            <a:r>
+              <a:rPr lang="en-US" sz="1200" b="0">
+                <a:solidFill>
+                  <a:srgbClr val="202b33"/>
+                </a:solidFill>
+                <a:latin typeface="Arial"/>
+                <a:ea typeface="Arial"/>
+                <a:cs typeface="Arial"/>
+              </a:rPr>
+              <a:t xml:space="preserve"/>
+            </a:r>
+            <a:endParaRPr lang="en-US" sz="1200"/>
+          </a:p>
+          <a:p>
+            <a:pPr marL="0" indent="0">
+              <a:lnSpc>
+                <a:spcPts val="1560"/>
+              </a:lnSpc>
+              <a:spcAft>
+                <a:spcPts val="0"/>
+              </a:spcAft>
+              <a:buNone/>
+            </a:pPr>
+            <a:r>
+              <a:rPr lang="en-US" sz="1200" b="0">
+                <a:solidFill>
+                  <a:srgbClr val="202b33"/>
+                </a:solidFill>
+                <a:latin typeface="Arial"/>
+                <a:ea typeface="Arial"/>
+                <a:cs typeface="Arial"/>
+              </a:rPr>
+              <a:t xml:space="preserve"/>
             </a:r>
             <a:endParaRPr lang="en-US" sz="1200"/>
           </a:p>
@@ -3387,467 +3339,421 @@
                 <a:ea typeface="Arial"/>
                 <a:cs typeface="Arial"/>
               </a:rPr>
-              <a:t xml:space="preserve">Source slide 13. 24:00 to 26:00</a:t>
-            </a:r>
-            <a:endParaRPr lang="en-US" sz="1200"/>
-          </a:p>
-          <a:p>
-            <a:pPr marL="0" indent="0">
-              <a:lnSpc>
-                <a:spcPts val="1560"/>
-              </a:lnSpc>
-              <a:spcAft>
-                <a:spcPts val="0"/>
-              </a:spcAft>
-              <a:buNone/>
-            </a:pPr>
-            <a:r>
-              <a:rPr lang="en-US" sz="1200" b="0">
-                <a:solidFill>
-                  <a:srgbClr val="202b33"/>
-                </a:solidFill>
-                <a:latin typeface="Arial"/>
-                <a:ea typeface="Arial"/>
-                <a:cs typeface="Arial"/>
-              </a:rPr>
-              <a:t xml:space="preserve"/>
-            </a:r>
-            <a:endParaRPr lang="en-US" sz="1200"/>
-          </a:p>
-          <a:p>
-            <a:pPr marL="0" indent="0">
-              <a:lnSpc>
-                <a:spcPts val="1560"/>
-              </a:lnSpc>
-              <a:spcAft>
-                <a:spcPts val="0"/>
-              </a:spcAft>
-              <a:buNone/>
-            </a:pPr>
-            <a:r>
-              <a:rPr lang="en-US" sz="1200" b="0">
-                <a:solidFill>
-                  <a:srgbClr val="202b33"/>
-                </a:solidFill>
-                <a:latin typeface="Arial"/>
-                <a:ea typeface="Arial"/>
-                <a:cs typeface="Arial"/>
-              </a:rPr>
-              <a:t xml:space="preserve">Shadow: propose, apply nothing</a:t>
-            </a:r>
-            <a:endParaRPr lang="en-US" sz="1200"/>
-          </a:p>
-          <a:p>
-            <a:pPr marL="0" indent="0">
-              <a:lnSpc>
-                <a:spcPts val="1560"/>
-              </a:lnSpc>
-              <a:spcAft>
-                <a:spcPts val="0"/>
-              </a:spcAft>
-              <a:buNone/>
-            </a:pPr>
-            <a:r>
-              <a:rPr lang="en-US" sz="1200" b="0">
-                <a:solidFill>
-                  <a:srgbClr val="202b33"/>
-                </a:solidFill>
-                <a:latin typeface="Arial"/>
-                <a:ea typeface="Arial"/>
-                <a:cs typeface="Arial"/>
-              </a:rPr>
-              <a:t xml:space="preserve"/>
-            </a:r>
-            <a:endParaRPr lang="en-US" sz="1200"/>
-          </a:p>
-          <a:p>
-            <a:pPr marL="0" indent="0">
-              <a:lnSpc>
-                <a:spcPts val="1560"/>
-              </a:lnSpc>
-              <a:spcAft>
-                <a:spcPts val="0"/>
-              </a:spcAft>
-              <a:buNone/>
-            </a:pPr>
-            <a:r>
-              <a:rPr lang="en-US" sz="1200" b="0">
-                <a:solidFill>
-                  <a:srgbClr val="202b33"/>
-                </a:solidFill>
-                <a:latin typeface="Arial"/>
-                <a:ea typeface="Arial"/>
-                <a:cs typeface="Arial"/>
-              </a:rPr>
-              <a:t xml:space="preserve">Canary: one reversible change class</a:t>
-            </a:r>
-            <a:endParaRPr lang="en-US" sz="1200"/>
-          </a:p>
-          <a:p>
-            <a:pPr marL="0" indent="0">
-              <a:lnSpc>
-                <a:spcPts val="1560"/>
-              </a:lnSpc>
-              <a:spcAft>
-                <a:spcPts val="0"/>
-              </a:spcAft>
-              <a:buNone/>
-            </a:pPr>
-            <a:r>
-              <a:rPr lang="en-US" sz="1200" b="0">
-                <a:solidFill>
-                  <a:srgbClr val="202b33"/>
-                </a:solidFill>
-                <a:latin typeface="Arial"/>
-                <a:ea typeface="Arial"/>
-                <a:cs typeface="Arial"/>
-              </a:rPr>
-              <a:t xml:space="preserve"/>
-            </a:r>
-            <a:endParaRPr lang="en-US" sz="1200"/>
-          </a:p>
-          <a:p>
-            <a:pPr marL="0" indent="0">
-              <a:lnSpc>
-                <a:spcPts val="1560"/>
-              </a:lnSpc>
-              <a:spcAft>
-                <a:spcPts val="0"/>
-              </a:spcAft>
-              <a:buNone/>
-            </a:pPr>
-            <a:r>
-              <a:rPr lang="en-US" sz="1200" b="0">
-                <a:solidFill>
-                  <a:srgbClr val="202b33"/>
-                </a:solidFill>
-                <a:latin typeface="Arial"/>
-                <a:ea typeface="Arial"/>
-                <a:cs typeface="Arial"/>
-              </a:rPr>
-              <a:t xml:space="preserve">Expand: from correct recoveries, false repairs, cost, interventions</a:t>
-            </a:r>
-            <a:endParaRPr lang="en-US" sz="1200"/>
-          </a:p>
-          <a:p>
-            <a:pPr marL="0" indent="0">
-              <a:lnSpc>
-                <a:spcPts val="1560"/>
-              </a:lnSpc>
-              <a:spcAft>
-                <a:spcPts val="0"/>
-              </a:spcAft>
-              <a:buNone/>
-            </a:pPr>
-            <a:r>
-              <a:rPr lang="en-US" sz="1200" b="0">
-                <a:solidFill>
-                  <a:srgbClr val="202b33"/>
-                </a:solidFill>
-                <a:latin typeface="Arial"/>
-                <a:ea typeface="Arial"/>
-                <a:cs typeface="Arial"/>
-              </a:rPr>
-              <a:t xml:space="preserve"/>
-            </a:r>
-            <a:endParaRPr lang="en-US" sz="1200"/>
-          </a:p>
-          <a:p>
-            <a:pPr marL="0" indent="0">
-              <a:lnSpc>
-                <a:spcPts val="1560"/>
-              </a:lnSpc>
-              <a:spcAft>
-                <a:spcPts val="0"/>
-              </a:spcAft>
-              <a:buNone/>
-            </a:pPr>
-            <a:r>
-              <a:rPr lang="en-US" sz="1200" b="0">
-                <a:solidFill>
-                  <a:srgbClr val="202b33"/>
-                </a:solidFill>
-                <a:latin typeface="Arial"/>
-                <a:ea typeface="Arial"/>
-                <a:cs typeface="Arial"/>
-              </a:rPr>
-              <a:t xml:space="preserve">Compare the design with the static mapping and the pager on the same recorded incidents. Count recoveries, but also false repairs, dropped records, cost, elapsed time and human corrections. Include the incidents where the right answer was to stop. A model saying ninety percent confident settles nothing.</a:t>
-            </a:r>
-            <a:endParaRPr lang="en-US" sz="1200"/>
-          </a:p>
-          <a:p>
-            <a:pPr marL="0" indent="0">
-              <a:lnSpc>
-                <a:spcPts val="1560"/>
-              </a:lnSpc>
-              <a:spcAft>
-                <a:spcPts val="0"/>
-              </a:spcAft>
-              <a:buNone/>
-            </a:pPr>
-            <a:r>
-              <a:rPr lang="en-US" sz="1200" b="0">
-                <a:solidFill>
-                  <a:srgbClr val="202b33"/>
-                </a:solidFill>
-                <a:latin typeface="Arial"/>
-                <a:ea typeface="Arial"/>
-                <a:cs typeface="Arial"/>
-              </a:rPr>
-              <a:t xml:space="preserve"/>
-            </a:r>
-            <a:endParaRPr lang="en-US" sz="1200"/>
-          </a:p>
-          <a:p>
-            <a:pPr marL="0" indent="0">
-              <a:lnSpc>
-                <a:spcPts val="1560"/>
-              </a:lnSpc>
-              <a:spcAft>
-                <a:spcPts val="0"/>
-              </a:spcAft>
-              <a:buNone/>
-            </a:pPr>
-            <a:r>
-              <a:rPr lang="en-US" sz="1200" b="0">
-                <a:solidFill>
-                  <a:srgbClr val="202b33"/>
-                </a:solidFill>
-                <a:latin typeface="Arial"/>
-                <a:ea typeface="Arial"/>
-                <a:cs typeface="Arial"/>
-              </a:rPr>
-              <a:t xml:space="preserve">Start in shadow mode: the conjured agents propose artifacts and apply none. Then permit one reversible change class. Widen authority per class, from evidence about that class. This is the same discipline for tools and for compute. It is also the loop that lets the system adjust its own fan-out and token burn from measured acceptance: acceptance up and false repairs flat, that job class gets more parallel attempts and a bigger budget; false repairs up, both come down.</a:t>
-            </a:r>
-            <a:endParaRPr lang="en-US" sz="1200"/>
-          </a:p>
-          <a:p>
-            <a:pPr marL="0" indent="0">
-              <a:lnSpc>
-                <a:spcPts val="1560"/>
-              </a:lnSpc>
-              <a:spcAft>
-                <a:spcPts val="0"/>
-              </a:spcAft>
-              <a:buNone/>
-            </a:pPr>
-            <a:r>
-              <a:rPr lang="en-US" sz="1200" b="0">
-                <a:solidFill>
-                  <a:srgbClr val="202b33"/>
-                </a:solidFill>
-                <a:latin typeface="Arial"/>
-                <a:ea typeface="Arial"/>
-                <a:cs typeface="Arial"/>
-              </a:rPr>
-              <a:t xml:space="preserve"/>
-            </a:r>
-            <a:endParaRPr lang="en-US" sz="1200"/>
-          </a:p>
-          <a:p>
-            <a:pPr marL="0" indent="0">
-              <a:lnSpc>
-                <a:spcPts val="1560"/>
-              </a:lnSpc>
-              <a:spcAft>
-                <a:spcPts val="0"/>
-              </a:spcAft>
-              <a:buNone/>
-            </a:pPr>
-            <a:r>
-              <a:rPr lang="en-US" sz="1200" b="0">
-                <a:solidFill>
-                  <a:srgbClr val="202b33"/>
-                </a:solidFill>
-                <a:latin typeface="Arial"/>
-                <a:ea typeface="Arial"/>
-                <a:cs typeface="Arial"/>
-              </a:rPr>
-              <a:t xml:space="preserve">Watch for the failure Diane Vaughan documented at NASA before Challenger and named normalization of deviance. Every widening is locally reasonable. Each one cites the last one as precedent. Nobody ever decides to be reckless. That is exactly why authority expands per class and from measured outcomes for that class, and never from how the last six went.</a:t>
-            </a:r>
-            <a:endParaRPr lang="en-US" sz="1200"/>
-          </a:p>
-          <a:p>
-            <a:pPr marL="0" indent="0">
-              <a:lnSpc>
-                <a:spcPts val="1560"/>
-              </a:lnSpc>
-              <a:spcAft>
-                <a:spcPts val="0"/>
-              </a:spcAft>
-              <a:buNone/>
-            </a:pPr>
-            <a:r>
-              <a:rPr lang="en-US" sz="1200" b="0">
-                <a:solidFill>
-                  <a:srgbClr val="202b33"/>
-                </a:solidFill>
-                <a:latin typeface="Arial"/>
-                <a:ea typeface="Arial"/>
-                <a:cs typeface="Arial"/>
-              </a:rPr>
-              <a:t xml:space="preserve"/>
-            </a:r>
-            <a:endParaRPr lang="en-US" sz="1200"/>
-          </a:p>
-          <a:p>
-            <a:pPr marL="0" indent="0">
-              <a:lnSpc>
-                <a:spcPts val="1560"/>
-              </a:lnSpc>
-              <a:spcAft>
-                <a:spcPts val="0"/>
-              </a:spcAft>
-              <a:buNone/>
-            </a:pPr>
-            <a:r>
-              <a:rPr lang="en-US" sz="1200" b="0">
-                <a:solidFill>
-                  <a:srgbClr val="202b33"/>
-                </a:solidFill>
-                <a:latin typeface="Arial"/>
-                <a:ea typeface="Arial"/>
-                <a:cs typeface="Arial"/>
-              </a:rPr>
-              <a:t xml:space="preserve">Vaughan (1996), The Challenger Launch Decision, University of Chicago Press, on normalization of deviance.</a:t>
-            </a:r>
-            <a:endParaRPr lang="en-US" sz="1200"/>
-          </a:p>
-          <a:p>
-            <a:pPr marL="0" indent="0">
-              <a:lnSpc>
-                <a:spcPts val="1560"/>
-              </a:lnSpc>
-              <a:spcAft>
-                <a:spcPts val="0"/>
-              </a:spcAft>
-              <a:buNone/>
-            </a:pPr>
-            <a:r>
-              <a:rPr lang="en-US" sz="1200" b="0">
-                <a:solidFill>
-                  <a:srgbClr val="202b33"/>
-                </a:solidFill>
-                <a:latin typeface="Arial"/>
-                <a:ea typeface="Arial"/>
-                <a:cs typeface="Arial"/>
-              </a:rPr>
-              <a:t xml:space="preserve"/>
-            </a:r>
-            <a:endParaRPr lang="en-US" sz="1200"/>
-          </a:p>
-          <a:p>
-            <a:pPr marL="0" indent="0">
-              <a:lnSpc>
-                <a:spcPts val="1560"/>
-              </a:lnSpc>
-              <a:spcAft>
-                <a:spcPts val="0"/>
-              </a:spcAft>
-              <a:buNone/>
-            </a:pPr>
-            <a:r>
-              <a:rPr lang="en-US" sz="1200" b="0">
-                <a:solidFill>
-                  <a:srgbClr val="202b33"/>
-                </a:solidFill>
-                <a:latin typeface="Arial"/>
-                <a:ea typeface="Arial"/>
-                <a:cs typeface="Arial"/>
-              </a:rPr>
-              <a:t xml:space="preserve"/>
-            </a:r>
-            <a:endParaRPr lang="en-US" sz="1200"/>
-          </a:p>
-          <a:p>
-            <a:pPr marL="0" indent="0">
-              <a:lnSpc>
-                <a:spcPts val="1560"/>
-              </a:lnSpc>
-              <a:spcAft>
-                <a:spcPts val="0"/>
-              </a:spcAft>
-              <a:buNone/>
-            </a:pPr>
-            <a:r>
-              <a:rPr lang="en-US" sz="1200" b="0">
-                <a:solidFill>
-                  <a:srgbClr val="202b33"/>
-                </a:solidFill>
-                <a:latin typeface="Arial"/>
-                <a:ea typeface="Arial"/>
-                <a:cs typeface="Arial"/>
-              </a:rPr>
-              <a:t xml:space="preserve"/>
-            </a:r>
-            <a:endParaRPr lang="en-US" sz="1200"/>
-          </a:p>
-          <a:p>
-            <a:pPr marL="0" indent="0">
-              <a:lnSpc>
-                <a:spcPts val="1560"/>
-              </a:lnSpc>
-              <a:spcAft>
-                <a:spcPts val="0"/>
-              </a:spcAft>
-              <a:buNone/>
-            </a:pPr>
-            <a:r>
-              <a:rPr lang="en-US" sz="1200" b="0">
-                <a:solidFill>
-                  <a:srgbClr val="202b33"/>
-                </a:solidFill>
-                <a:latin typeface="Arial"/>
-                <a:ea typeface="Arial"/>
-                <a:cs typeface="Arial"/>
-              </a:rPr>
-              <a:t xml:space="preserve">Thirty seconds on the recovery card in contracts.md. Take one answer and name the evidence needed to widen that authority.</a:t>
-            </a:r>
-            <a:endParaRPr lang="en-US" sz="1200"/>
-          </a:p>
-          <a:p>
-            <a:pPr marL="0" indent="0">
-              <a:lnSpc>
-                <a:spcPts val="1560"/>
-              </a:lnSpc>
-              <a:spcAft>
-                <a:spcPts val="0"/>
-              </a:spcAft>
-              <a:buNone/>
-            </a:pPr>
-            <a:r>
-              <a:rPr lang="en-US" sz="1200" b="0">
-                <a:solidFill>
-                  <a:srgbClr val="202b33"/>
-                </a:solidFill>
-                <a:latin typeface="Arial"/>
-                <a:ea typeface="Arial"/>
-                <a:cs typeface="Arial"/>
-              </a:rPr>
-              <a:t xml:space="preserve"/>
-            </a:r>
-            <a:endParaRPr lang="en-US" sz="1200"/>
-          </a:p>
-          <a:p>
-            <a:pPr marL="0" indent="0">
-              <a:lnSpc>
-                <a:spcPts val="1560"/>
-              </a:lnSpc>
-              <a:spcAft>
-                <a:spcPts val="0"/>
-              </a:spcAft>
-              <a:buNone/>
-            </a:pPr>
-            <a:r>
-              <a:rPr lang="en-US" sz="1200" b="0">
-                <a:solidFill>
-                  <a:srgbClr val="202b33"/>
-                </a:solidFill>
-                <a:latin typeface="Arial"/>
-                <a:ea typeface="Arial"/>
-                <a:cs typeface="Arial"/>
-              </a:rPr>
-              <a:t xml:space="preserve"/>
+              <a:t xml:space="preserve">Source slide 14. 25:15 to 27:30</a:t>
+            </a:r>
+            <a:endParaRPr lang="en-US" sz="1200"/>
+          </a:p>
+          <a:p>
+            <a:pPr marL="0" indent="0">
+              <a:lnSpc>
+                <a:spcPts val="1560"/>
+              </a:lnSpc>
+              <a:spcAft>
+                <a:spcPts val="0"/>
+              </a:spcAft>
+              <a:buNone/>
+            </a:pPr>
+            <a:r>
+              <a:rPr lang="en-US" sz="1200" b="0">
+                <a:solidFill>
+                  <a:srgbClr val="202b33"/>
+                </a:solidFill>
+                <a:latin typeface="Arial"/>
+                <a:ea typeface="Arial"/>
+                <a:cs typeface="Arial"/>
+              </a:rPr>
+              <a:t xml:space="preserve"/>
+            </a:r>
+            <a:endParaRPr lang="en-US" sz="1200"/>
+          </a:p>
+          <a:p>
+            <a:pPr marL="0" indent="0">
+              <a:lnSpc>
+                <a:spcPts val="1560"/>
+              </a:lnSpc>
+              <a:spcAft>
+                <a:spcPts val="0"/>
+              </a:spcAft>
+              <a:buNone/>
+            </a:pPr>
+            <a:r>
+              <a:rPr lang="en-US" sz="1200" b="0">
+                <a:solidFill>
+                  <a:srgbClr val="202b33"/>
+                </a:solidFill>
+                <a:latin typeface="Arial"/>
+                <a:ea typeface="Arial"/>
+                <a:cs typeface="Arial"/>
+              </a:rPr>
+              <a:t xml:space="preserve">Before returning: check relevant memory and correct known mistakes</a:t>
+            </a:r>
+            <a:endParaRPr lang="en-US" sz="1200"/>
+          </a:p>
+          <a:p>
+            <a:pPr marL="0" indent="0">
+              <a:lnSpc>
+                <a:spcPts val="1560"/>
+              </a:lnSpc>
+              <a:spcAft>
+                <a:spcPts val="0"/>
+              </a:spcAft>
+              <a:buNone/>
+            </a:pPr>
+            <a:r>
+              <a:rPr lang="en-US" sz="1200" b="0">
+                <a:solidFill>
+                  <a:srgbClr val="202b33"/>
+                </a:solidFill>
+                <a:latin typeface="Arial"/>
+                <a:ea typeface="Arial"/>
+                <a:cs typeface="Arial"/>
+              </a:rPr>
+              <a:t xml:space="preserve"/>
+            </a:r>
+            <a:endParaRPr lang="en-US" sz="1200"/>
+          </a:p>
+          <a:p>
+            <a:pPr marL="0" indent="0">
+              <a:lnSpc>
+                <a:spcPts val="1560"/>
+              </a:lnSpc>
+              <a:spcAft>
+                <a:spcPts val="0"/>
+              </a:spcAft>
+              <a:buNone/>
+            </a:pPr>
+            <a:r>
+              <a:rPr lang="en-US" sz="1200" b="0">
+                <a:solidFill>
+                  <a:srgbClr val="202b33"/>
+                </a:solidFill>
+                <a:latin typeface="Arial"/>
+                <a:ea typeface="Arial"/>
+                <a:cs typeface="Arial"/>
+              </a:rPr>
+              <a:t xml:space="preserve">After execution: record checks, outcome, correction and frequency</a:t>
+            </a:r>
+            <a:endParaRPr lang="en-US" sz="1200"/>
+          </a:p>
+          <a:p>
+            <a:pPr marL="0" indent="0">
+              <a:lnSpc>
+                <a:spcPts val="1560"/>
+              </a:lnSpc>
+              <a:spcAft>
+                <a:spcPts val="0"/>
+              </a:spcAft>
+              <a:buNone/>
+            </a:pPr>
+            <a:r>
+              <a:rPr lang="en-US" sz="1200" b="0">
+                <a:solidFill>
+                  <a:srgbClr val="202b33"/>
+                </a:solidFill>
+                <a:latin typeface="Arial"/>
+                <a:ea typeface="Arial"/>
+                <a:cs typeface="Arial"/>
+              </a:rPr>
+              <a:t xml:space="preserve"/>
+            </a:r>
+            <a:endParaRPr lang="en-US" sz="1200"/>
+          </a:p>
+          <a:p>
+            <a:pPr marL="0" indent="0">
+              <a:lnSpc>
+                <a:spcPts val="1560"/>
+              </a:lnSpc>
+              <a:spcAft>
+                <a:spcPts val="0"/>
+              </a:spcAft>
+              <a:buNone/>
+            </a:pPr>
+            <a:r>
+              <a:rPr lang="en-US" sz="1200" b="0">
+                <a:solidFill>
+                  <a:srgbClr val="202b33"/>
+                </a:solidFill>
+                <a:latin typeface="Arial"/>
+                <a:ea typeface="Arial"/>
+                <a:cs typeface="Arial"/>
+              </a:rPr>
+              <a:t xml:space="preserve">Generated, executed and verified are different states</a:t>
+            </a:r>
+            <a:endParaRPr lang="en-US" sz="1200"/>
+          </a:p>
+          <a:p>
+            <a:pPr marL="0" indent="0">
+              <a:lnSpc>
+                <a:spcPts val="1560"/>
+              </a:lnSpc>
+              <a:spcAft>
+                <a:spcPts val="0"/>
+              </a:spcAft>
+              <a:buNone/>
+            </a:pPr>
+            <a:r>
+              <a:rPr lang="en-US" sz="1200" b="0">
+                <a:solidFill>
+                  <a:srgbClr val="202b33"/>
+                </a:solidFill>
+                <a:latin typeface="Arial"/>
+                <a:ea typeface="Arial"/>
+                <a:cs typeface="Arial"/>
+              </a:rPr>
+              <a:t xml:space="preserve"/>
+            </a:r>
+            <a:endParaRPr lang="en-US" sz="1200"/>
+          </a:p>
+          <a:p>
+            <a:pPr marL="0" indent="0">
+              <a:lnSpc>
+                <a:spcPts val="1560"/>
+              </a:lnSpc>
+              <a:spcAft>
+                <a:spcPts val="0"/>
+              </a:spcAft>
+              <a:buNone/>
+            </a:pPr>
+            <a:r>
+              <a:rPr lang="en-US" sz="1200" b="0">
+                <a:solidFill>
+                  <a:srgbClr val="202b33"/>
+                </a:solidFill>
+                <a:latin typeface="Arial"/>
+                <a:ea typeface="Arial"/>
+                <a:cs typeface="Arial"/>
+              </a:rPr>
+              <a:t xml:space="preserve">Memory is evidence, never permission</a:t>
+            </a:r>
+            <a:endParaRPr lang="en-US" sz="1200"/>
+          </a:p>
+          <a:p>
+            <a:pPr marL="0" indent="0">
+              <a:lnSpc>
+                <a:spcPts val="1560"/>
+              </a:lnSpc>
+              <a:spcAft>
+                <a:spcPts val="0"/>
+              </a:spcAft>
+              <a:buNone/>
+            </a:pPr>
+            <a:r>
+              <a:rPr lang="en-US" sz="1200" b="0">
+                <a:solidFill>
+                  <a:srgbClr val="202b33"/>
+                </a:solidFill>
+                <a:latin typeface="Arial"/>
+                <a:ea typeface="Arial"/>
+                <a:cs typeface="Arial"/>
+              </a:rPr>
+              <a:t xml:space="preserve"/>
+            </a:r>
+            <a:endParaRPr lang="en-US" sz="1200"/>
+          </a:p>
+          <a:p>
+            <a:pPr marL="0" indent="0">
+              <a:lnSpc>
+                <a:spcPts val="1560"/>
+              </a:lnSpc>
+              <a:spcAft>
+                <a:spcPts val="0"/>
+              </a:spcAft>
+              <a:buNone/>
+            </a:pPr>
+            <a:r>
+              <a:rPr lang="en-US" sz="1200" b="0">
+                <a:solidFill>
+                  <a:srgbClr val="202b33"/>
+                </a:solidFill>
+                <a:latin typeface="Arial"/>
+                <a:ea typeface="Arial"/>
+                <a:cs typeface="Arial"/>
+              </a:rPr>
+              <a:t xml:space="preserve">You do not need the whole agent factory to start. Take one agent that writes SQL, builds reports, runs shell commands or generates scripted API actions. Give it working memory for this job: the goal, constraints, draft and unresolved checks. Give it observational memory across jobs: what it generated, what actually ran, what failed, and what the checks established. Now ask it to consult that history before it hands you the next answer.</a:t>
+            </a:r>
+            <a:endParaRPr lang="en-US" sz="1200"/>
+          </a:p>
+          <a:p>
+            <a:pPr marL="0" indent="0">
+              <a:lnSpc>
+                <a:spcPts val="1560"/>
+              </a:lnSpc>
+              <a:spcAft>
+                <a:spcPts val="0"/>
+              </a:spcAft>
+              <a:buNone/>
+            </a:pPr>
+            <a:r>
+              <a:rPr lang="en-US" sz="1200" b="0">
+                <a:solidFill>
+                  <a:srgbClr val="202b33"/>
+                </a:solidFill>
+                <a:latin typeface="Arial"/>
+                <a:ea typeface="Arial"/>
+                <a:cs typeface="Arial"/>
+              </a:rPr>
+              <a:t xml:space="preserve"/>
+            </a:r>
+            <a:endParaRPr lang="en-US" sz="1200"/>
+          </a:p>
+          <a:p>
+            <a:pPr marL="0" indent="0">
+              <a:lnSpc>
+                <a:spcPts val="1560"/>
+              </a:lnSpc>
+              <a:spcAft>
+                <a:spcPts val="0"/>
+              </a:spcAft>
+              <a:buNone/>
+            </a:pPr>
+            <a:r>
+              <a:rPr lang="en-US" sz="1200" b="0">
+                <a:solidFill>
+                  <a:srgbClr val="202b33"/>
+                </a:solidFill>
+                <a:latin typeface="Arial"/>
+                <a:ea typeface="Arial"/>
+                <a:cs typeface="Arial"/>
+              </a:rPr>
+              <a:t xml:space="preserve">Suppose a reporting query keeps forgetting the tenant filter. It runs perfectly well; it reports the wrong population. An independent preflight check rejects it before dispatch. Record the draft, the failed check, the correction and the eventual result. Next time, retrieve that pattern while the agent is still drafting. Fix the omission before returning the SQL, then run the check again. That is adaptive behavior you can build with one agent and a small log.</a:t>
+            </a:r>
+            <a:endParaRPr lang="en-US" sz="1200"/>
+          </a:p>
+          <a:p>
+            <a:pPr marL="0" indent="0">
+              <a:lnSpc>
+                <a:spcPts val="1560"/>
+              </a:lnSpc>
+              <a:spcAft>
+                <a:spcPts val="0"/>
+              </a:spcAft>
+              <a:buNone/>
+            </a:pPr>
+            <a:r>
+              <a:rPr lang="en-US" sz="1200" b="0">
+                <a:solidFill>
+                  <a:srgbClr val="202b33"/>
+                </a:solidFill>
+                <a:latin typeface="Arial"/>
+                <a:ea typeface="Arial"/>
+                <a:cs typeface="Arial"/>
+              </a:rPr>
+              <a:t xml:space="preserve"/>
+            </a:r>
+            <a:endParaRPr lang="en-US" sz="1200"/>
+          </a:p>
+          <a:p>
+            <a:pPr marL="0" indent="0">
+              <a:lnSpc>
+                <a:spcPts val="1560"/>
+              </a:lnSpc>
+              <a:spcAft>
+                <a:spcPts val="0"/>
+              </a:spcAft>
+              <a:buNone/>
+            </a:pPr>
+            <a:r>
+              <a:rPr lang="en-US" sz="1200" b="0">
+                <a:solidFill>
+                  <a:srgbClr val="202b33"/>
+                </a:solidFill>
+                <a:latin typeface="Arial"/>
+                <a:ea typeface="Arial"/>
+                <a:cs typeface="Arial"/>
+              </a:rPr>
+              <a:t xml:space="preserve"/>
+            </a:r>
+            <a:endParaRPr lang="en-US" sz="1200"/>
+          </a:p>
+          <a:p>
+            <a:pPr marL="0" indent="0">
+              <a:lnSpc>
+                <a:spcPts val="1560"/>
+              </a:lnSpc>
+              <a:spcAft>
+                <a:spcPts val="0"/>
+              </a:spcAft>
+              <a:buNone/>
+            </a:pPr>
+            <a:r>
+              <a:rPr lang="en-US" sz="1200" b="0">
+                <a:solidFill>
+                  <a:srgbClr val="202b33"/>
+                </a:solidFill>
+                <a:latin typeface="Arial"/>
+                <a:ea typeface="Arial"/>
+                <a:cs typeface="Arial"/>
+              </a:rPr>
+              <a:t xml:space="preserve"/>
+            </a:r>
+            <a:endParaRPr lang="en-US" sz="1200"/>
+          </a:p>
+          <a:p>
+            <a:pPr marL="0" indent="0">
+              <a:lnSpc>
+                <a:spcPts val="1560"/>
+              </a:lnSpc>
+              <a:spcAft>
+                <a:spcPts val="0"/>
+              </a:spcAft>
+              <a:buNone/>
+            </a:pPr>
+            <a:r>
+              <a:rPr lang="en-US" sz="1200" b="0">
+                <a:solidFill>
+                  <a:srgbClr val="202b33"/>
+                </a:solidFill>
+                <a:latin typeface="Arial"/>
+                <a:ea typeface="Arial"/>
+                <a:cs typeface="Arial"/>
+              </a:rPr>
+              <a:t xml:space="preserve">Show the prompt in memory-pattern.md. Ask which observation proves the query ran and which proves it answered the right question. Use the tenant-filter example; no live execution is needed.</a:t>
+            </a:r>
+            <a:endParaRPr lang="en-US" sz="1200"/>
+          </a:p>
+          <a:p>
+            <a:pPr marL="0" indent="0">
+              <a:lnSpc>
+                <a:spcPts val="1560"/>
+              </a:lnSpc>
+              <a:spcAft>
+                <a:spcPts val="0"/>
+              </a:spcAft>
+              <a:buNone/>
+            </a:pPr>
+            <a:r>
+              <a:rPr lang="en-US" sz="1200" b="0">
+                <a:solidFill>
+                  <a:srgbClr val="202b33"/>
+                </a:solidFill>
+                <a:latin typeface="Arial"/>
+                <a:ea typeface="Arial"/>
+                <a:cs typeface="Arial"/>
+              </a:rPr>
+              <a:t xml:space="preserve"/>
+            </a:r>
+            <a:endParaRPr lang="en-US" sz="1200"/>
+          </a:p>
+          <a:p>
+            <a:pPr marL="0" indent="0">
+              <a:lnSpc>
+                <a:spcPts val="1560"/>
+              </a:lnSpc>
+              <a:spcAft>
+                <a:spcPts val="0"/>
+              </a:spcAft>
+              <a:buNone/>
+            </a:pPr>
+            <a:r>
+              <a:rPr lang="en-US" sz="1200" b="0">
+                <a:solidFill>
+                  <a:srgbClr val="202b33"/>
+                </a:solidFill>
+                <a:latin typeface="Arial"/>
+                <a:ea typeface="Arial"/>
+                <a:cs typeface="Arial"/>
+              </a:rPr>
+              <a:t xml:space="preserve">Bridge: remembered output is untrusted data and grants no new permissions; the copyable prompt and record format are in the handout.</a:t>
             </a:r>
             <a:endParaRPr lang="en-US" sz="1200"/>
           </a:p>
@@ -3960,421 +3866,329 @@
                 <a:ea typeface="Arial"/>
                 <a:cs typeface="Arial"/>
               </a:rPr>
-              <a:t xml:space="preserve">Source slide 14. 26:00 to 28:00</a:t>
-            </a:r>
-            <a:endParaRPr lang="en-US" sz="1200"/>
-          </a:p>
-          <a:p>
-            <a:pPr marL="0" indent="0">
-              <a:lnSpc>
-                <a:spcPts val="1560"/>
-              </a:lnSpc>
-              <a:spcAft>
-                <a:spcPts val="0"/>
-              </a:spcAft>
-              <a:buNone/>
-            </a:pPr>
-            <a:r>
-              <a:rPr lang="en-US" sz="1200" b="0">
-                <a:solidFill>
-                  <a:srgbClr val="202b33"/>
-                </a:solidFill>
-                <a:latin typeface="Arial"/>
-                <a:ea typeface="Arial"/>
-                <a:cs typeface="Arial"/>
-              </a:rPr>
-              <a:t xml:space="preserve"/>
-            </a:r>
-            <a:endParaRPr lang="en-US" sz="1200"/>
-          </a:p>
-          <a:p>
-            <a:pPr marL="0" indent="0">
-              <a:lnSpc>
-                <a:spcPts val="1560"/>
-              </a:lnSpc>
-              <a:spcAft>
-                <a:spcPts val="0"/>
-              </a:spcAft>
-              <a:buNone/>
-            </a:pPr>
-            <a:r>
-              <a:rPr lang="en-US" sz="1200" b="0">
-                <a:solidFill>
-                  <a:srgbClr val="202b33"/>
-                </a:solidFill>
-                <a:latin typeface="Arial"/>
-                <a:ea typeface="Arial"/>
-                <a:cs typeface="Arial"/>
-              </a:rPr>
-              <a:t xml:space="preserve">Before returning: check relevant memory and correct known mistakes</a:t>
-            </a:r>
-            <a:endParaRPr lang="en-US" sz="1200"/>
-          </a:p>
-          <a:p>
-            <a:pPr marL="0" indent="0">
-              <a:lnSpc>
-                <a:spcPts val="1560"/>
-              </a:lnSpc>
-              <a:spcAft>
-                <a:spcPts val="0"/>
-              </a:spcAft>
-              <a:buNone/>
-            </a:pPr>
-            <a:r>
-              <a:rPr lang="en-US" sz="1200" b="0">
-                <a:solidFill>
-                  <a:srgbClr val="202b33"/>
-                </a:solidFill>
-                <a:latin typeface="Arial"/>
-                <a:ea typeface="Arial"/>
-                <a:cs typeface="Arial"/>
-              </a:rPr>
-              <a:t xml:space="preserve"/>
-            </a:r>
-            <a:endParaRPr lang="en-US" sz="1200"/>
-          </a:p>
-          <a:p>
-            <a:pPr marL="0" indent="0">
-              <a:lnSpc>
-                <a:spcPts val="1560"/>
-              </a:lnSpc>
-              <a:spcAft>
-                <a:spcPts val="0"/>
-              </a:spcAft>
-              <a:buNone/>
-            </a:pPr>
-            <a:r>
-              <a:rPr lang="en-US" sz="1200" b="0">
-                <a:solidFill>
-                  <a:srgbClr val="202b33"/>
-                </a:solidFill>
-                <a:latin typeface="Arial"/>
-                <a:ea typeface="Arial"/>
-                <a:cs typeface="Arial"/>
-              </a:rPr>
-              <a:t xml:space="preserve">After execution: record checks, outcome, correction and frequency</a:t>
-            </a:r>
-            <a:endParaRPr lang="en-US" sz="1200"/>
-          </a:p>
-          <a:p>
-            <a:pPr marL="0" indent="0">
-              <a:lnSpc>
-                <a:spcPts val="1560"/>
-              </a:lnSpc>
-              <a:spcAft>
-                <a:spcPts val="0"/>
-              </a:spcAft>
-              <a:buNone/>
-            </a:pPr>
-            <a:r>
-              <a:rPr lang="en-US" sz="1200" b="0">
-                <a:solidFill>
-                  <a:srgbClr val="202b33"/>
-                </a:solidFill>
-                <a:latin typeface="Arial"/>
-                <a:ea typeface="Arial"/>
-                <a:cs typeface="Arial"/>
-              </a:rPr>
-              <a:t xml:space="preserve"/>
-            </a:r>
-            <a:endParaRPr lang="en-US" sz="1200"/>
-          </a:p>
-          <a:p>
-            <a:pPr marL="0" indent="0">
-              <a:lnSpc>
-                <a:spcPts val="1560"/>
-              </a:lnSpc>
-              <a:spcAft>
-                <a:spcPts val="0"/>
-              </a:spcAft>
-              <a:buNone/>
-            </a:pPr>
-            <a:r>
-              <a:rPr lang="en-US" sz="1200" b="0">
-                <a:solidFill>
-                  <a:srgbClr val="202b33"/>
-                </a:solidFill>
-                <a:latin typeface="Arial"/>
-                <a:ea typeface="Arial"/>
-                <a:cs typeface="Arial"/>
-              </a:rPr>
-              <a:t xml:space="preserve">Generated, executed and verified are different states</a:t>
-            </a:r>
-            <a:endParaRPr lang="en-US" sz="1200"/>
-          </a:p>
-          <a:p>
-            <a:pPr marL="0" indent="0">
-              <a:lnSpc>
-                <a:spcPts val="1560"/>
-              </a:lnSpc>
-              <a:spcAft>
-                <a:spcPts val="0"/>
-              </a:spcAft>
-              <a:buNone/>
-            </a:pPr>
-            <a:r>
-              <a:rPr lang="en-US" sz="1200" b="0">
-                <a:solidFill>
-                  <a:srgbClr val="202b33"/>
-                </a:solidFill>
-                <a:latin typeface="Arial"/>
-                <a:ea typeface="Arial"/>
-                <a:cs typeface="Arial"/>
-              </a:rPr>
-              <a:t xml:space="preserve"/>
-            </a:r>
-            <a:endParaRPr lang="en-US" sz="1200"/>
-          </a:p>
-          <a:p>
-            <a:pPr marL="0" indent="0">
-              <a:lnSpc>
-                <a:spcPts val="1560"/>
-              </a:lnSpc>
-              <a:spcAft>
-                <a:spcPts val="0"/>
-              </a:spcAft>
-              <a:buNone/>
-            </a:pPr>
-            <a:r>
-              <a:rPr lang="en-US" sz="1200" b="0">
-                <a:solidFill>
-                  <a:srgbClr val="202b33"/>
-                </a:solidFill>
-                <a:latin typeface="Arial"/>
-                <a:ea typeface="Arial"/>
-                <a:cs typeface="Arial"/>
-              </a:rPr>
-              <a:t xml:space="preserve">Memory is evidence, never permission</a:t>
-            </a:r>
-            <a:endParaRPr lang="en-US" sz="1200"/>
-          </a:p>
-          <a:p>
-            <a:pPr marL="0" indent="0">
-              <a:lnSpc>
-                <a:spcPts val="1560"/>
-              </a:lnSpc>
-              <a:spcAft>
-                <a:spcPts val="0"/>
-              </a:spcAft>
-              <a:buNone/>
-            </a:pPr>
-            <a:r>
-              <a:rPr lang="en-US" sz="1200" b="0">
-                <a:solidFill>
-                  <a:srgbClr val="202b33"/>
-                </a:solidFill>
-                <a:latin typeface="Arial"/>
-                <a:ea typeface="Arial"/>
-                <a:cs typeface="Arial"/>
-              </a:rPr>
-              <a:t xml:space="preserve"/>
-            </a:r>
-            <a:endParaRPr lang="en-US" sz="1200"/>
-          </a:p>
-          <a:p>
-            <a:pPr marL="0" indent="0">
-              <a:lnSpc>
-                <a:spcPts val="1560"/>
-              </a:lnSpc>
-              <a:spcAft>
-                <a:spcPts val="0"/>
-              </a:spcAft>
-              <a:buNone/>
-            </a:pPr>
-            <a:r>
-              <a:rPr lang="en-US" sz="1200" b="0">
-                <a:solidFill>
-                  <a:srgbClr val="202b33"/>
-                </a:solidFill>
-                <a:latin typeface="Arial"/>
-                <a:ea typeface="Arial"/>
-                <a:cs typeface="Arial"/>
-              </a:rPr>
-              <a:t xml:space="preserve">You do not need the whole agent factory to start. Take one agent that writes SQL, builds reports, runs shell commands or generates scripted API actions. Give it working memory for this job: the goal, constraints, draft and unresolved checks. Give it observational memory across jobs: what it generated, what actually ran, what failed, and what the checks established. Now ask it to consult that history before it hands you the next answer.</a:t>
-            </a:r>
-            <a:endParaRPr lang="en-US" sz="1200"/>
-          </a:p>
-          <a:p>
-            <a:pPr marL="0" indent="0">
-              <a:lnSpc>
-                <a:spcPts val="1560"/>
-              </a:lnSpc>
-              <a:spcAft>
-                <a:spcPts val="0"/>
-              </a:spcAft>
-              <a:buNone/>
-            </a:pPr>
-            <a:r>
-              <a:rPr lang="en-US" sz="1200" b="0">
-                <a:solidFill>
-                  <a:srgbClr val="202b33"/>
-                </a:solidFill>
-                <a:latin typeface="Arial"/>
-                <a:ea typeface="Arial"/>
-                <a:cs typeface="Arial"/>
-              </a:rPr>
-              <a:t xml:space="preserve"/>
-            </a:r>
-            <a:endParaRPr lang="en-US" sz="1200"/>
-          </a:p>
-          <a:p>
-            <a:pPr marL="0" indent="0">
-              <a:lnSpc>
-                <a:spcPts val="1560"/>
-              </a:lnSpc>
-              <a:spcAft>
-                <a:spcPts val="0"/>
-              </a:spcAft>
-              <a:buNone/>
-            </a:pPr>
-            <a:r>
-              <a:rPr lang="en-US" sz="1200" b="0">
-                <a:solidFill>
-                  <a:srgbClr val="202b33"/>
-                </a:solidFill>
-                <a:latin typeface="Arial"/>
-                <a:ea typeface="Arial"/>
-                <a:cs typeface="Arial"/>
-              </a:rPr>
-              <a:t xml:space="preserve">Suppose a reporting query keeps forgetting the tenant filter. It runs perfectly well; it reports the wrong population. An independent preflight check rejects it before dispatch. Record the draft, the failed check, the correction and the eventual result. Next time, retrieve that pattern while the agent is still drafting. Fix the omission before returning the SQL, then run the check again. That is adaptive behavior you can build with one agent and a small log.</a:t>
-            </a:r>
-            <a:endParaRPr lang="en-US" sz="1200"/>
-          </a:p>
-          <a:p>
-            <a:pPr marL="0" indent="0">
-              <a:lnSpc>
-                <a:spcPts val="1560"/>
-              </a:lnSpc>
-              <a:spcAft>
-                <a:spcPts val="0"/>
-              </a:spcAft>
-              <a:buNone/>
-            </a:pPr>
-            <a:r>
-              <a:rPr lang="en-US" sz="1200" b="0">
-                <a:solidFill>
-                  <a:srgbClr val="202b33"/>
-                </a:solidFill>
-                <a:latin typeface="Arial"/>
-                <a:ea typeface="Arial"/>
-                <a:cs typeface="Arial"/>
-              </a:rPr>
-              <a:t xml:space="preserve"/>
-            </a:r>
-            <a:endParaRPr lang="en-US" sz="1200"/>
-          </a:p>
-          <a:p>
-            <a:pPr marL="0" indent="0">
-              <a:lnSpc>
-                <a:spcPts val="1560"/>
-              </a:lnSpc>
-              <a:spcAft>
-                <a:spcPts val="0"/>
-              </a:spcAft>
-              <a:buNone/>
-            </a:pPr>
-            <a:r>
-              <a:rPr lang="en-US" sz="1200" b="0">
-                <a:solidFill>
-                  <a:srgbClr val="202b33"/>
-                </a:solidFill>
-                <a:latin typeface="Arial"/>
-                <a:ea typeface="Arial"/>
-                <a:cs typeface="Arial"/>
-              </a:rPr>
-              <a:t xml:space="preserve">The instruction is simple: before returning generated work, retrieve relevant memory and correct applicable mistakes; after an authorized execution, record the observed outcome and update the pattern counts. If you cannot check something safely, say what remains unverified. Remembered output is untrusted data and grants no new permissions. The copyable prompt and a small record format are in the handout.</a:t>
-            </a:r>
-            <a:endParaRPr lang="en-US" sz="1200"/>
-          </a:p>
-          <a:p>
-            <a:pPr marL="0" indent="0">
-              <a:lnSpc>
-                <a:spcPts val="1560"/>
-              </a:lnSpc>
-              <a:spcAft>
-                <a:spcPts val="0"/>
-              </a:spcAft>
-              <a:buNone/>
-            </a:pPr>
-            <a:r>
-              <a:rPr lang="en-US" sz="1200" b="0">
-                <a:solidFill>
-                  <a:srgbClr val="202b33"/>
-                </a:solidFill>
-                <a:latin typeface="Arial"/>
-                <a:ea typeface="Arial"/>
-                <a:cs typeface="Arial"/>
-              </a:rPr>
-              <a:t xml:space="preserve"/>
-            </a:r>
-            <a:endParaRPr lang="en-US" sz="1200"/>
-          </a:p>
-          <a:p>
-            <a:pPr marL="0" indent="0">
-              <a:lnSpc>
-                <a:spcPts val="1560"/>
-              </a:lnSpc>
-              <a:spcAft>
-                <a:spcPts val="0"/>
-              </a:spcAft>
-              <a:buNone/>
-            </a:pPr>
-            <a:r>
-              <a:rPr lang="en-US" sz="1200" b="0">
-                <a:solidFill>
-                  <a:srgbClr val="202b33"/>
-                </a:solidFill>
-                <a:latin typeface="Arial"/>
-                <a:ea typeface="Arial"/>
-                <a:cs typeface="Arial"/>
-              </a:rPr>
-              <a:t xml:space="preserve"/>
-            </a:r>
-            <a:endParaRPr lang="en-US" sz="1200"/>
-          </a:p>
-          <a:p>
-            <a:pPr marL="0" indent="0">
-              <a:lnSpc>
-                <a:spcPts val="1560"/>
-              </a:lnSpc>
-              <a:spcAft>
-                <a:spcPts val="0"/>
-              </a:spcAft>
-              <a:buNone/>
-            </a:pPr>
-            <a:r>
-              <a:rPr lang="en-US" sz="1200" b="0">
-                <a:solidFill>
-                  <a:srgbClr val="202b33"/>
-                </a:solidFill>
-                <a:latin typeface="Arial"/>
-                <a:ea typeface="Arial"/>
-                <a:cs typeface="Arial"/>
-              </a:rPr>
-              <a:t xml:space="preserve"/>
-            </a:r>
-            <a:endParaRPr lang="en-US" sz="1200"/>
-          </a:p>
-          <a:p>
-            <a:pPr marL="0" indent="0">
-              <a:lnSpc>
-                <a:spcPts val="1560"/>
-              </a:lnSpc>
-              <a:spcAft>
-                <a:spcPts val="0"/>
-              </a:spcAft>
-              <a:buNone/>
-            </a:pPr>
-            <a:r>
-              <a:rPr lang="en-US" sz="1200" b="0">
-                <a:solidFill>
-                  <a:srgbClr val="202b33"/>
-                </a:solidFill>
-                <a:latin typeface="Arial"/>
-                <a:ea typeface="Arial"/>
-                <a:cs typeface="Arial"/>
-              </a:rPr>
-              <a:t xml:space="preserve">Show the prompt in memory-pattern.md. Ask which observation proves the query ran and which proves it answered the right question. Use the tenant-filter example; no live execution is needed.</a:t>
+              <a:t xml:space="preserve">Source slide 15. 27:30 to 30:00</a:t>
+            </a:r>
+            <a:endParaRPr lang="en-US" sz="1200"/>
+          </a:p>
+          <a:p>
+            <a:pPr marL="0" indent="0">
+              <a:lnSpc>
+                <a:spcPts val="1560"/>
+              </a:lnSpc>
+              <a:spcAft>
+                <a:spcPts val="0"/>
+              </a:spcAft>
+              <a:buNone/>
+            </a:pPr>
+            <a:r>
+              <a:rPr lang="en-US" sz="1200" b="0">
+                <a:solidFill>
+                  <a:srgbClr val="202b33"/>
+                </a:solidFill>
+                <a:latin typeface="Arial"/>
+                <a:ea typeface="Arial"/>
+                <a:cs typeface="Arial"/>
+              </a:rPr>
+              <a:t xml:space="preserve"/>
+            </a:r>
+            <a:endParaRPr lang="en-US" sz="1200"/>
+          </a:p>
+          <a:p>
+            <a:pPr marL="0" indent="0">
+              <a:lnSpc>
+                <a:spcPts val="1560"/>
+              </a:lnSpc>
+              <a:spcAft>
+                <a:spcPts val="0"/>
+              </a:spcAft>
+              <a:buNone/>
+            </a:pPr>
+            <a:r>
+              <a:rPr lang="en-US" sz="1200" b="0">
+                <a:solidFill>
+                  <a:srgbClr val="202b33"/>
+                </a:solidFill>
+                <a:latin typeface="Arial"/>
+                <a:ea typeface="Arial"/>
+                <a:cs typeface="Arial"/>
+              </a:rPr>
+              <a:t xml:space="preserve">Conjure exactly enough</a:t>
+            </a:r>
+            <a:endParaRPr lang="en-US" sz="1200"/>
+          </a:p>
+          <a:p>
+            <a:pPr marL="0" indent="0">
+              <a:lnSpc>
+                <a:spcPts val="1560"/>
+              </a:lnSpc>
+              <a:spcAft>
+                <a:spcPts val="0"/>
+              </a:spcAft>
+              <a:buNone/>
+            </a:pPr>
+            <a:r>
+              <a:rPr lang="en-US" sz="1200" b="0">
+                <a:solidFill>
+                  <a:srgbClr val="202b33"/>
+                </a:solidFill>
+                <a:latin typeface="Arial"/>
+                <a:ea typeface="Arial"/>
+                <a:cs typeface="Arial"/>
+              </a:rPr>
+              <a:t xml:space="preserve"/>
+            </a:r>
+            <a:endParaRPr lang="en-US" sz="1200"/>
+          </a:p>
+          <a:p>
+            <a:pPr marL="0" indent="0">
+              <a:lnSpc>
+                <a:spcPts val="1560"/>
+              </a:lnSpc>
+              <a:spcAft>
+                <a:spcPts val="0"/>
+              </a:spcAft>
+              <a:buNone/>
+            </a:pPr>
+            <a:r>
+              <a:rPr lang="en-US" sz="1200" b="0">
+                <a:solidFill>
+                  <a:srgbClr val="202b33"/>
+                </a:solidFill>
+                <a:latin typeface="Arial"/>
+                <a:ea typeface="Arial"/>
+                <a:cs typeface="Arial"/>
+              </a:rPr>
+              <a:t xml:space="preserve">Prove the repair</a:t>
+            </a:r>
+            <a:endParaRPr lang="en-US" sz="1200"/>
+          </a:p>
+          <a:p>
+            <a:pPr marL="0" indent="0">
+              <a:lnSpc>
+                <a:spcPts val="1560"/>
+              </a:lnSpc>
+              <a:spcAft>
+                <a:spcPts val="0"/>
+              </a:spcAft>
+              <a:buNone/>
+            </a:pPr>
+            <a:r>
+              <a:rPr lang="en-US" sz="1200" b="0">
+                <a:solidFill>
+                  <a:srgbClr val="202b33"/>
+                </a:solidFill>
+                <a:latin typeface="Arial"/>
+                <a:ea typeface="Arial"/>
+                <a:cs typeface="Arial"/>
+              </a:rPr>
+              <a:t xml:space="preserve"/>
+            </a:r>
+            <a:endParaRPr lang="en-US" sz="1200"/>
+          </a:p>
+          <a:p>
+            <a:pPr marL="0" indent="0">
+              <a:lnSpc>
+                <a:spcPts val="1560"/>
+              </a:lnSpc>
+              <a:spcAft>
+                <a:spcPts val="0"/>
+              </a:spcAft>
+              <a:buNone/>
+            </a:pPr>
+            <a:r>
+              <a:rPr lang="en-US" sz="1200" b="0">
+                <a:solidFill>
+                  <a:srgbClr val="202b33"/>
+                </a:solidFill>
+                <a:latin typeface="Arial"/>
+                <a:ea typeface="Arial"/>
+                <a:cs typeface="Arial"/>
+              </a:rPr>
+              <a:t xml:space="preserve">Remember the known case</a:t>
+            </a:r>
+            <a:endParaRPr lang="en-US" sz="1200"/>
+          </a:p>
+          <a:p>
+            <a:pPr marL="0" indent="0">
+              <a:lnSpc>
+                <a:spcPts val="1560"/>
+              </a:lnSpc>
+              <a:spcAft>
+                <a:spcPts val="0"/>
+              </a:spcAft>
+              <a:buNone/>
+            </a:pPr>
+            <a:r>
+              <a:rPr lang="en-US" sz="1200" b="0">
+                <a:solidFill>
+                  <a:srgbClr val="202b33"/>
+                </a:solidFill>
+                <a:latin typeface="Arial"/>
+                <a:ea typeface="Arial"/>
+                <a:cs typeface="Arial"/>
+              </a:rPr>
+              <a:t xml:space="preserve"/>
+            </a:r>
+            <a:endParaRPr lang="en-US" sz="1200"/>
+          </a:p>
+          <a:p>
+            <a:pPr marL="0" indent="0">
+              <a:lnSpc>
+                <a:spcPts val="1560"/>
+              </a:lnSpc>
+              <a:spcAft>
+                <a:spcPts val="0"/>
+              </a:spcAft>
+              <a:buNone/>
+            </a:pPr>
+            <a:r>
+              <a:rPr lang="en-US" sz="1200" b="0">
+                <a:solidFill>
+                  <a:srgbClr val="202b33"/>
+                </a:solidFill>
+                <a:latin typeface="Arial"/>
+                <a:ea typeface="Arial"/>
+                <a:cs typeface="Arial"/>
+              </a:rPr>
+              <a:t xml:space="preserve">And return to the assistant with everything. It is still coming; nothing on these slides stops it, and I would not want to. What changed is how many of its pathways are live at once. Each job gets a small agent with a tailored prompt, a short tool list, a hard budget, and a log of every time it asked for more. That is the strategy I believe in for the next few years: not one agent holding every combination, which nobody can check, but many small ones you can afford to.</a:t>
+            </a:r>
+            <a:endParaRPr lang="en-US" sz="1200"/>
+          </a:p>
+          <a:p>
+            <a:pPr marL="0" indent="0">
+              <a:lnSpc>
+                <a:spcPts val="1560"/>
+              </a:lnSpc>
+              <a:spcAft>
+                <a:spcPts val="0"/>
+              </a:spcAft>
+              <a:buNone/>
+            </a:pPr>
+            <a:r>
+              <a:rPr lang="en-US" sz="1200" b="0">
+                <a:solidFill>
+                  <a:srgbClr val="202b33"/>
+                </a:solidFill>
+                <a:latin typeface="Arial"/>
+                <a:ea typeface="Arial"/>
+                <a:cs typeface="Arial"/>
+              </a:rPr>
+              <a:t xml:space="preserve"/>
+            </a:r>
+            <a:endParaRPr lang="en-US" sz="1200"/>
+          </a:p>
+          <a:p>
+            <a:pPr marL="0" indent="0">
+              <a:lnSpc>
+                <a:spcPts val="1560"/>
+              </a:lnSpc>
+              <a:spcAft>
+                <a:spcPts val="0"/>
+              </a:spcAft>
+              <a:buNone/>
+            </a:pPr>
+            <a:r>
+              <a:rPr lang="en-US" sz="1200" b="0">
+                <a:solidFill>
+                  <a:srgbClr val="202b33"/>
+                </a:solidFill>
+                <a:latin typeface="Arial"/>
+                <a:ea typeface="Arial"/>
+                <a:cs typeface="Arial"/>
+              </a:rPr>
+              <a:t xml:space="preserve">Pick one integration that already costs your team mornings. Give it a conjured agent with a bounded way to investigate, a test it did not write, and a place to record what happened. Or start with one reporting agent: keep its execution observations, make it check them before returning work, and measure whether the same mistake comes back. That is enough to start.</a:t>
+            </a:r>
+            <a:endParaRPr lang="en-US" sz="1200"/>
+          </a:p>
+          <a:p>
+            <a:pPr marL="0" indent="0">
+              <a:lnSpc>
+                <a:spcPts val="1560"/>
+              </a:lnSpc>
+              <a:spcAft>
+                <a:spcPts val="0"/>
+              </a:spcAft>
+              <a:buNone/>
+            </a:pPr>
+            <a:r>
+              <a:rPr lang="en-US" sz="1200" b="0">
+                <a:solidFill>
+                  <a:srgbClr val="202b33"/>
+                </a:solidFill>
+                <a:latin typeface="Arial"/>
+                <a:ea typeface="Arial"/>
+                <a:cs typeface="Arial"/>
+              </a:rPr>
+              <a:t xml:space="preserve"/>
+            </a:r>
+            <a:endParaRPr lang="en-US" sz="1200"/>
+          </a:p>
+          <a:p>
+            <a:pPr marL="0" indent="0">
+              <a:lnSpc>
+                <a:spcPts val="1560"/>
+              </a:lnSpc>
+              <a:spcAft>
+                <a:spcPts val="0"/>
+              </a:spcAft>
+              <a:buNone/>
+            </a:pPr>
+            <a:r>
+              <a:rPr lang="en-US" sz="1200" b="0">
+                <a:solidFill>
+                  <a:srgbClr val="202b33"/>
+                </a:solidFill>
+                <a:latin typeface="Arial"/>
+                <a:ea typeface="Arial"/>
+                <a:cs typeface="Arial"/>
+              </a:rPr>
+              <a:t xml:space="preserve"/>
+            </a:r>
+            <a:endParaRPr lang="en-US" sz="1200"/>
+          </a:p>
+          <a:p>
+            <a:pPr marL="0" indent="0">
+              <a:lnSpc>
+                <a:spcPts val="1560"/>
+              </a:lnSpc>
+              <a:spcAft>
+                <a:spcPts val="0"/>
+              </a:spcAft>
+              <a:buNone/>
+            </a:pPr>
+            <a:r>
+              <a:rPr lang="en-US" sz="1200" b="0">
+                <a:solidFill>
+                  <a:srgbClr val="202b33"/>
+                </a:solidFill>
+                <a:latin typeface="Arial"/>
+                <a:ea typeface="Arial"/>
+                <a:cs typeface="Arial"/>
+              </a:rPr>
+              <a:t xml:space="preserve"/>
+            </a:r>
+            <a:endParaRPr lang="en-US" sz="1200"/>
+          </a:p>
+          <a:p>
+            <a:pPr marL="0" indent="0">
+              <a:lnSpc>
+                <a:spcPts val="1560"/>
+              </a:lnSpc>
+              <a:spcAft>
+                <a:spcPts val="0"/>
+              </a:spcAft>
+              <a:buNone/>
+            </a:pPr>
+            <a:r>
+              <a:rPr lang="en-US" sz="1200" b="0">
+                <a:solidFill>
+                  <a:srgbClr val="202b33"/>
+                </a:solidFill>
+                <a:latin typeface="Arial"/>
+                <a:ea typeface="Arial"/>
+                <a:cs typeface="Arial"/>
+              </a:rPr>
+              <a:t xml:space="preserve">Land on the third line. Stop talking.</a:t>
             </a:r>
             <a:endParaRPr lang="en-US" sz="1200"/>
           </a:p>
@@ -4487,1040 +4301,53 @@
                 <a:ea typeface="Arial"/>
                 <a:cs typeface="Arial"/>
               </a:rPr>
-              <a:t xml:space="preserve">Adaptive, agentic apps</a:t>
-            </a:r>
-            <a:endParaRPr lang="en-US" sz="1200"/>
-          </a:p>
-          <a:p>
-            <a:pPr marL="0" indent="0">
-              <a:lnSpc>
-                <a:spcPts val="1560"/>
-              </a:lnSpc>
-              <a:spcAft>
-                <a:spcPts val="0"/>
-              </a:spcAft>
-              <a:buNone/>
-            </a:pPr>
-            <a:r>
-              <a:rPr lang="en-US" sz="1200" b="0">
-                <a:solidFill>
-                  <a:srgbClr val="202b33"/>
-                </a:solidFill>
-                <a:latin typeface="Arial"/>
-                <a:ea typeface="Arial"/>
-                <a:cs typeface="Arial"/>
-              </a:rPr>
-              <a:t xml:space="preserve"/>
-            </a:r>
-            <a:endParaRPr lang="en-US" sz="1200"/>
-          </a:p>
-          <a:p>
-            <a:pPr marL="0" indent="0">
-              <a:lnSpc>
-                <a:spcPts val="1560"/>
-              </a:lnSpc>
-              <a:spcAft>
-                <a:spcPts val="0"/>
-              </a:spcAft>
-              <a:buNone/>
-            </a:pPr>
-            <a:r>
-              <a:rPr lang="en-US" sz="1200" b="0">
-                <a:solidFill>
-                  <a:srgbClr val="202b33"/>
-                </a:solidFill>
-                <a:latin typeface="Arial"/>
-                <a:ea typeface="Arial"/>
-                <a:cs typeface="Arial"/>
-              </a:rPr>
-              <a:t xml:space="preserve">Source slide 14. 26:00 to 28:00</a:t>
-            </a:r>
-            <a:endParaRPr lang="en-US" sz="1200"/>
-          </a:p>
-          <a:p>
-            <a:pPr marL="0" indent="0">
-              <a:lnSpc>
-                <a:spcPts val="1560"/>
-              </a:lnSpc>
-              <a:spcAft>
-                <a:spcPts val="0"/>
-              </a:spcAft>
-              <a:buNone/>
-            </a:pPr>
-            <a:r>
-              <a:rPr lang="en-US" sz="1200" b="0">
-                <a:solidFill>
-                  <a:srgbClr val="202b33"/>
-                </a:solidFill>
-                <a:latin typeface="Arial"/>
-                <a:ea typeface="Arial"/>
-                <a:cs typeface="Arial"/>
-              </a:rPr>
-              <a:t xml:space="preserve"/>
-            </a:r>
-            <a:endParaRPr lang="en-US" sz="1200"/>
-          </a:p>
-          <a:p>
-            <a:pPr marL="0" indent="0">
-              <a:lnSpc>
-                <a:spcPts val="1560"/>
-              </a:lnSpc>
-              <a:spcAft>
-                <a:spcPts val="0"/>
-              </a:spcAft>
-              <a:buNone/>
-            </a:pPr>
-            <a:r>
-              <a:rPr lang="en-US" sz="1200" b="0">
-                <a:solidFill>
-                  <a:srgbClr val="202b33"/>
-                </a:solidFill>
-                <a:latin typeface="Arial"/>
-                <a:ea typeface="Arial"/>
-                <a:cs typeface="Arial"/>
-              </a:rPr>
-              <a:t xml:space="preserve">Before returning: check relevant memory and correct known mistakes</a:t>
-            </a:r>
-            <a:endParaRPr lang="en-US" sz="1200"/>
-          </a:p>
-          <a:p>
-            <a:pPr marL="0" indent="0">
-              <a:lnSpc>
-                <a:spcPts val="1560"/>
-              </a:lnSpc>
-              <a:spcAft>
-                <a:spcPts val="0"/>
-              </a:spcAft>
-              <a:buNone/>
-            </a:pPr>
-            <a:r>
-              <a:rPr lang="en-US" sz="1200" b="0">
-                <a:solidFill>
-                  <a:srgbClr val="202b33"/>
-                </a:solidFill>
-                <a:latin typeface="Arial"/>
-                <a:ea typeface="Arial"/>
-                <a:cs typeface="Arial"/>
-              </a:rPr>
-              <a:t xml:space="preserve"/>
-            </a:r>
-            <a:endParaRPr lang="en-US" sz="1200"/>
-          </a:p>
-          <a:p>
-            <a:pPr marL="0" indent="0">
-              <a:lnSpc>
-                <a:spcPts val="1560"/>
-              </a:lnSpc>
-              <a:spcAft>
-                <a:spcPts val="0"/>
-              </a:spcAft>
-              <a:buNone/>
-            </a:pPr>
-            <a:r>
-              <a:rPr lang="en-US" sz="1200" b="0">
-                <a:solidFill>
-                  <a:srgbClr val="202b33"/>
-                </a:solidFill>
-                <a:latin typeface="Arial"/>
-                <a:ea typeface="Arial"/>
-                <a:cs typeface="Arial"/>
-              </a:rPr>
-              <a:t xml:space="preserve">After execution: record checks, outcome, correction and frequency</a:t>
-            </a:r>
-            <a:endParaRPr lang="en-US" sz="1200"/>
-          </a:p>
-          <a:p>
-            <a:pPr marL="0" indent="0">
-              <a:lnSpc>
-                <a:spcPts val="1560"/>
-              </a:lnSpc>
-              <a:spcAft>
-                <a:spcPts val="0"/>
-              </a:spcAft>
-              <a:buNone/>
-            </a:pPr>
-            <a:r>
-              <a:rPr lang="en-US" sz="1200" b="0">
-                <a:solidFill>
-                  <a:srgbClr val="202b33"/>
-                </a:solidFill>
-                <a:latin typeface="Arial"/>
-                <a:ea typeface="Arial"/>
-                <a:cs typeface="Arial"/>
-              </a:rPr>
-              <a:t xml:space="preserve"/>
-            </a:r>
-            <a:endParaRPr lang="en-US" sz="1200"/>
-          </a:p>
-          <a:p>
-            <a:pPr marL="0" indent="0">
-              <a:lnSpc>
-                <a:spcPts val="1560"/>
-              </a:lnSpc>
-              <a:spcAft>
-                <a:spcPts val="0"/>
-              </a:spcAft>
-              <a:buNone/>
-            </a:pPr>
-            <a:r>
-              <a:rPr lang="en-US" sz="1200" b="0">
-                <a:solidFill>
-                  <a:srgbClr val="202b33"/>
-                </a:solidFill>
-                <a:latin typeface="Arial"/>
-                <a:ea typeface="Arial"/>
-                <a:cs typeface="Arial"/>
-              </a:rPr>
-              <a:t xml:space="preserve">Generated, executed and verified are different states</a:t>
-            </a:r>
-            <a:endParaRPr lang="en-US" sz="1200"/>
-          </a:p>
-          <a:p>
-            <a:pPr marL="0" indent="0">
-              <a:lnSpc>
-                <a:spcPts val="1560"/>
-              </a:lnSpc>
-              <a:spcAft>
-                <a:spcPts val="0"/>
-              </a:spcAft>
-              <a:buNone/>
-            </a:pPr>
-            <a:r>
-              <a:rPr lang="en-US" sz="1200" b="0">
-                <a:solidFill>
-                  <a:srgbClr val="202b33"/>
-                </a:solidFill>
-                <a:latin typeface="Arial"/>
-                <a:ea typeface="Arial"/>
-                <a:cs typeface="Arial"/>
-              </a:rPr>
-              <a:t xml:space="preserve"/>
-            </a:r>
-            <a:endParaRPr lang="en-US" sz="1200"/>
-          </a:p>
-          <a:p>
-            <a:pPr marL="0" indent="0">
-              <a:lnSpc>
-                <a:spcPts val="1560"/>
-              </a:lnSpc>
-              <a:spcAft>
-                <a:spcPts val="0"/>
-              </a:spcAft>
-              <a:buNone/>
-            </a:pPr>
-            <a:r>
-              <a:rPr lang="en-US" sz="1200" b="0">
-                <a:solidFill>
-                  <a:srgbClr val="202b33"/>
-                </a:solidFill>
-                <a:latin typeface="Arial"/>
-                <a:ea typeface="Arial"/>
-                <a:cs typeface="Arial"/>
-              </a:rPr>
-              <a:t xml:space="preserve">Memory is evidence, never permission</a:t>
-            </a:r>
-            <a:endParaRPr lang="en-US" sz="1200"/>
-          </a:p>
-          <a:p>
-            <a:pPr marL="0" indent="0">
-              <a:lnSpc>
-                <a:spcPts val="1560"/>
-              </a:lnSpc>
-              <a:spcAft>
-                <a:spcPts val="0"/>
-              </a:spcAft>
-              <a:buNone/>
-            </a:pPr>
-            <a:r>
-              <a:rPr lang="en-US" sz="1200" b="0">
-                <a:solidFill>
-                  <a:srgbClr val="202b33"/>
-                </a:solidFill>
-                <a:latin typeface="Arial"/>
-                <a:ea typeface="Arial"/>
-                <a:cs typeface="Arial"/>
-              </a:rPr>
-              <a:t xml:space="preserve"/>
-            </a:r>
-            <a:endParaRPr lang="en-US" sz="1200"/>
-          </a:p>
-          <a:p>
-            <a:pPr marL="0" indent="0">
-              <a:lnSpc>
-                <a:spcPts val="1560"/>
-              </a:lnSpc>
-              <a:spcAft>
-                <a:spcPts val="0"/>
-              </a:spcAft>
-              <a:buNone/>
-            </a:pPr>
-            <a:r>
-              <a:rPr lang="en-US" sz="1200" b="0">
-                <a:solidFill>
-                  <a:srgbClr val="202b33"/>
-                </a:solidFill>
-                <a:latin typeface="Arial"/>
-                <a:ea typeface="Arial"/>
-                <a:cs typeface="Arial"/>
-              </a:rPr>
-              <a:t xml:space="preserve">You do not need the whole agent factory to start. Take one agent that writes SQL, builds reports, runs shell commands or generates scripted API actions. Give it working memory for this job: the goal, constraints, draft and unresolved checks. Give it observational memory across jobs: what it generated, what actually ran, what failed, and what the checks established. Now ask it to consult that history before it hands you the next answer.</a:t>
-            </a:r>
-            <a:endParaRPr lang="en-US" sz="1200"/>
-          </a:p>
-          <a:p>
-            <a:pPr marL="0" indent="0">
-              <a:lnSpc>
-                <a:spcPts val="1560"/>
-              </a:lnSpc>
-              <a:spcAft>
-                <a:spcPts val="0"/>
-              </a:spcAft>
-              <a:buNone/>
-            </a:pPr>
-            <a:r>
-              <a:rPr lang="en-US" sz="1200" b="0">
-                <a:solidFill>
-                  <a:srgbClr val="202b33"/>
-                </a:solidFill>
-                <a:latin typeface="Arial"/>
-                <a:ea typeface="Arial"/>
-                <a:cs typeface="Arial"/>
-              </a:rPr>
-              <a:t xml:space="preserve"/>
-            </a:r>
-            <a:endParaRPr lang="en-US" sz="1200"/>
-          </a:p>
-          <a:p>
-            <a:pPr marL="0" indent="0">
-              <a:lnSpc>
-                <a:spcPts val="1560"/>
-              </a:lnSpc>
-              <a:spcAft>
-                <a:spcPts val="0"/>
-              </a:spcAft>
-              <a:buNone/>
-            </a:pPr>
-            <a:r>
-              <a:rPr lang="en-US" sz="1200" b="0">
-                <a:solidFill>
-                  <a:srgbClr val="202b33"/>
-                </a:solidFill>
-                <a:latin typeface="Arial"/>
-                <a:ea typeface="Arial"/>
-                <a:cs typeface="Arial"/>
-              </a:rPr>
-              <a:t xml:space="preserve">Suppose a reporting query keeps forgetting the tenant filter. It runs perfectly well; it reports the wrong population. An independent preflight check rejects it before dispatch. Record the draft, the failed check, the correction and the eventual result. Next time, retrieve that pattern while the agent is still drafting. Fix the omission before returning the SQL, then run the check again. That is adaptive behavior you can build with one agent and a small log.</a:t>
-            </a:r>
-            <a:endParaRPr lang="en-US" sz="1200"/>
-          </a:p>
-          <a:p>
-            <a:pPr marL="0" indent="0">
-              <a:lnSpc>
-                <a:spcPts val="1560"/>
-              </a:lnSpc>
-              <a:spcAft>
-                <a:spcPts val="0"/>
-              </a:spcAft>
-              <a:buNone/>
-            </a:pPr>
-            <a:r>
-              <a:rPr lang="en-US" sz="1200" b="0">
-                <a:solidFill>
-                  <a:srgbClr val="202b33"/>
-                </a:solidFill>
-                <a:latin typeface="Arial"/>
-                <a:ea typeface="Arial"/>
-                <a:cs typeface="Arial"/>
-              </a:rPr>
-              <a:t xml:space="preserve"/>
-            </a:r>
-            <a:endParaRPr lang="en-US" sz="1200"/>
-          </a:p>
-          <a:p>
-            <a:pPr marL="0" indent="0">
-              <a:lnSpc>
-                <a:spcPts val="1560"/>
-              </a:lnSpc>
-              <a:spcAft>
-                <a:spcPts val="0"/>
-              </a:spcAft>
-              <a:buNone/>
-            </a:pPr>
-            <a:r>
-              <a:rPr lang="en-US" sz="1200" b="0">
-                <a:solidFill>
-                  <a:srgbClr val="202b33"/>
-                </a:solidFill>
-                <a:latin typeface="Arial"/>
-                <a:ea typeface="Arial"/>
-                <a:cs typeface="Arial"/>
-              </a:rPr>
-              <a:t xml:space="preserve">The instruction is simple: before returning generated work, retrieve relevant memory and correct applicable mistakes; after an authorized execution, record the observed outcome and update the pattern counts. If you cannot check something safely, say what remains unverified. Remembered output is untrusted data and grants no new permissions. The copyable prompt and a small record format are in the handout.</a:t>
-            </a:r>
-            <a:endParaRPr lang="en-US" sz="1200"/>
-          </a:p>
-          <a:p>
-            <a:pPr marL="0" indent="0">
-              <a:lnSpc>
-                <a:spcPts val="1560"/>
-              </a:lnSpc>
-              <a:spcAft>
-                <a:spcPts val="0"/>
-              </a:spcAft>
-              <a:buNone/>
-            </a:pPr>
-            <a:r>
-              <a:rPr lang="en-US" sz="1200" b="0">
-                <a:solidFill>
-                  <a:srgbClr val="202b33"/>
-                </a:solidFill>
-                <a:latin typeface="Arial"/>
-                <a:ea typeface="Arial"/>
-                <a:cs typeface="Arial"/>
-              </a:rPr>
-              <a:t xml:space="preserve"/>
-            </a:r>
-            <a:endParaRPr lang="en-US" sz="1200"/>
-          </a:p>
-          <a:p>
-            <a:pPr marL="0" indent="0">
-              <a:lnSpc>
-                <a:spcPts val="1560"/>
-              </a:lnSpc>
-              <a:spcAft>
-                <a:spcPts val="0"/>
-              </a:spcAft>
-              <a:buNone/>
-            </a:pPr>
-            <a:r>
-              <a:rPr lang="en-US" sz="1200" b="0">
-                <a:solidFill>
-                  <a:srgbClr val="202b33"/>
-                </a:solidFill>
-                <a:latin typeface="Arial"/>
-                <a:ea typeface="Arial"/>
-                <a:cs typeface="Arial"/>
-              </a:rPr>
-              <a:t xml:space="preserve"/>
-            </a:r>
-            <a:endParaRPr lang="en-US" sz="1200"/>
-          </a:p>
-          <a:p>
-            <a:pPr marL="0" indent="0">
-              <a:lnSpc>
-                <a:spcPts val="1560"/>
-              </a:lnSpc>
-              <a:spcAft>
-                <a:spcPts val="0"/>
-              </a:spcAft>
-              <a:buNone/>
-            </a:pPr>
-            <a:r>
-              <a:rPr lang="en-US" sz="1200" b="0">
-                <a:solidFill>
-                  <a:srgbClr val="202b33"/>
-                </a:solidFill>
-                <a:latin typeface="Arial"/>
-                <a:ea typeface="Arial"/>
-                <a:cs typeface="Arial"/>
-              </a:rPr>
-              <a:t xml:space="preserve"/>
-            </a:r>
-            <a:endParaRPr lang="en-US" sz="1200"/>
-          </a:p>
-          <a:p>
-            <a:pPr marL="0" indent="0">
-              <a:lnSpc>
-                <a:spcPts val="1560"/>
-              </a:lnSpc>
-              <a:spcAft>
-                <a:spcPts val="0"/>
-              </a:spcAft>
-              <a:buNone/>
-            </a:pPr>
-            <a:r>
-              <a:rPr lang="en-US" sz="1200" b="0">
-                <a:solidFill>
-                  <a:srgbClr val="202b33"/>
-                </a:solidFill>
-                <a:latin typeface="Arial"/>
-                <a:ea typeface="Arial"/>
-                <a:cs typeface="Arial"/>
-              </a:rPr>
-              <a:t xml:space="preserve">Show the prompt in memory-pattern.md. Ask which observation proves the query ran and which proves it answered the right question. Use the tenant-filter example; no live execution is needed.</a:t>
-            </a:r>
-            <a:endParaRPr lang="en-US" sz="1200"/>
-          </a:p>
-          <a:p>
-            <a:pPr marL="0" indent="0">
-              <a:lnSpc>
-                <a:spcPts val="1560"/>
-              </a:lnSpc>
-              <a:spcAft>
-                <a:spcPts val="0"/>
-              </a:spcAft>
-              <a:buNone/>
-            </a:pPr>
-            <a:r>
-              <a:rPr lang="en-US" sz="1200" b="0">
-                <a:solidFill>
-                  <a:srgbClr val="202b33"/>
-                </a:solidFill>
-                <a:latin typeface="Arial"/>
-                <a:ea typeface="Arial"/>
-                <a:cs typeface="Arial"/>
-              </a:rPr>
-              <a:t xml:space="preserve"/>
-            </a:r>
-            <a:endParaRPr lang="en-US" sz="1200"/>
-          </a:p>
-          <a:p>
-            <a:pPr marL="0" indent="0">
-              <a:lnSpc>
-                <a:spcPts val="1560"/>
-              </a:lnSpc>
-              <a:spcAft>
-                <a:spcPts val="0"/>
-              </a:spcAft>
-              <a:buNone/>
-            </a:pPr>
-            <a:r>
-              <a:rPr lang="en-US" sz="1200" b="0">
-                <a:solidFill>
-                  <a:srgbClr val="202b33"/>
-                </a:solidFill>
-                <a:latin typeface="Arial"/>
-                <a:ea typeface="Arial"/>
-                <a:cs typeface="Arial"/>
-              </a:rPr>
-              <a:t xml:space="preserve"/>
-            </a:r>
-            <a:endParaRPr lang="en-US" sz="1200"/>
-          </a:p>
-        </p:txBody>
-      </p:sp>
-    </p:spTree>
-  </p:cSld>
-  <p:clrMapOvr>
-    <a:masterClrMapping/>
-  </p:clrMapOvr>
-</p:notes>
-</file>
-
-<file path=ppt/notesSlides/notesSlide19.xml><?xml version="1.0" encoding="utf-8"?>
-<p:notes xmlns:a="http://schemas.openxmlformats.org/drawingml/2006/main" xmlns:r="http://schemas.openxmlformats.org/officeDocument/2006/relationships" xmlns:p="http://schemas.openxmlformats.org/presentationml/2006/main">
-  <p:cSld>
-    <p:spTree>
-      <p:nvGrpSpPr>
-        <p:cNvPr id="1" name=""/>
-        <p:cNvGrpSpPr/>
-        <p:nvPr/>
-      </p:nvGrpSpPr>
-      <p:grpSpPr>
-        <a:xfrm>
-          <a:off x="0" y="0"/>
-          <a:ext cx="0" cy="0"/>
-          <a:chOff x="0" y="0"/>
-          <a:chExt cx="0" cy="0"/>
-        </a:xfrm>
-      </p:grpSpPr>
-      <p:sp>
-        <p:nvSpPr>
-          <p:cNvPr id="2" name="Presenter notes"/>
-          <p:cNvSpPr txBox="1"/>
-          <p:nvPr>
-            <p:ph type="body" idx="1"/>
-          </p:nvPr>
-        </p:nvSpPr>
-        <p:spPr>
-          <a:xfrm>
-            <a:off x="457200" y="1428750"/>
-            <a:ext cx="5715000" cy="6667500"/>
-          </a:xfrm>
-        </p:spPr>
-        <p:txBody>
-          <a:bodyPr/>
-          <a:lstStyle/>
-          <a:p>
-            <a:pPr marL="0" indent="0">
-              <a:lnSpc>
-                <a:spcPts val="1560"/>
-              </a:lnSpc>
-              <a:spcAft>
-                <a:spcPts val="0"/>
-              </a:spcAft>
-              <a:buNone/>
-            </a:pPr>
-            <a:r>
-              <a:rPr lang="en-US" sz="1200" b="0">
-                <a:solidFill>
-                  <a:srgbClr val="202b33"/>
-                </a:solidFill>
-                <a:latin typeface="Arial"/>
-                <a:ea typeface="Arial"/>
-                <a:cs typeface="Arial"/>
-              </a:rPr>
-              <a:t xml:space="preserve">Adaptive, agentic apps</a:t>
-            </a:r>
-            <a:endParaRPr lang="en-US" sz="1200"/>
-          </a:p>
-          <a:p>
-            <a:pPr marL="0" indent="0">
-              <a:lnSpc>
-                <a:spcPts val="1560"/>
-              </a:lnSpc>
-              <a:spcAft>
-                <a:spcPts val="0"/>
-              </a:spcAft>
-              <a:buNone/>
-            </a:pPr>
-            <a:r>
-              <a:rPr lang="en-US" sz="1200" b="0">
-                <a:solidFill>
-                  <a:srgbClr val="202b33"/>
-                </a:solidFill>
-                <a:latin typeface="Arial"/>
-                <a:ea typeface="Arial"/>
-                <a:cs typeface="Arial"/>
-              </a:rPr>
-              <a:t xml:space="preserve"/>
-            </a:r>
-            <a:endParaRPr lang="en-US" sz="1200"/>
-          </a:p>
-          <a:p>
-            <a:pPr marL="0" indent="0">
-              <a:lnSpc>
-                <a:spcPts val="1560"/>
-              </a:lnSpc>
-              <a:spcAft>
-                <a:spcPts val="0"/>
-              </a:spcAft>
-              <a:buNone/>
-            </a:pPr>
-            <a:r>
-              <a:rPr lang="en-US" sz="1200" b="0">
-                <a:solidFill>
-                  <a:srgbClr val="202b33"/>
-                </a:solidFill>
-                <a:latin typeface="Arial"/>
-                <a:ea typeface="Arial"/>
-                <a:cs typeface="Arial"/>
-              </a:rPr>
-              <a:t xml:space="preserve">Source slide 15. 28:00 to 30:00</a:t>
-            </a:r>
-            <a:endParaRPr lang="en-US" sz="1200"/>
-          </a:p>
-          <a:p>
-            <a:pPr marL="0" indent="0">
-              <a:lnSpc>
-                <a:spcPts val="1560"/>
-              </a:lnSpc>
-              <a:spcAft>
-                <a:spcPts val="0"/>
-              </a:spcAft>
-              <a:buNone/>
-            </a:pPr>
-            <a:r>
-              <a:rPr lang="en-US" sz="1200" b="0">
-                <a:solidFill>
-                  <a:srgbClr val="202b33"/>
-                </a:solidFill>
-                <a:latin typeface="Arial"/>
-                <a:ea typeface="Arial"/>
-                <a:cs typeface="Arial"/>
-              </a:rPr>
-              <a:t xml:space="preserve"/>
-            </a:r>
-            <a:endParaRPr lang="en-US" sz="1200"/>
-          </a:p>
-          <a:p>
-            <a:pPr marL="0" indent="0">
-              <a:lnSpc>
-                <a:spcPts val="1560"/>
-              </a:lnSpc>
-              <a:spcAft>
-                <a:spcPts val="0"/>
-              </a:spcAft>
-              <a:buNone/>
-            </a:pPr>
-            <a:r>
-              <a:rPr lang="en-US" sz="1200" b="0">
-                <a:solidFill>
-                  <a:srgbClr val="202b33"/>
-                </a:solidFill>
-                <a:latin typeface="Arial"/>
-                <a:ea typeface="Arial"/>
-                <a:cs typeface="Arial"/>
-              </a:rPr>
-              <a:t xml:space="preserve">Conjure exactly enough</a:t>
-            </a:r>
-            <a:endParaRPr lang="en-US" sz="1200"/>
-          </a:p>
-          <a:p>
-            <a:pPr marL="0" indent="0">
-              <a:lnSpc>
-                <a:spcPts val="1560"/>
-              </a:lnSpc>
-              <a:spcAft>
-                <a:spcPts val="0"/>
-              </a:spcAft>
-              <a:buNone/>
-            </a:pPr>
-            <a:r>
-              <a:rPr lang="en-US" sz="1200" b="0">
-                <a:solidFill>
-                  <a:srgbClr val="202b33"/>
-                </a:solidFill>
-                <a:latin typeface="Arial"/>
-                <a:ea typeface="Arial"/>
-                <a:cs typeface="Arial"/>
-              </a:rPr>
-              <a:t xml:space="preserve"/>
-            </a:r>
-            <a:endParaRPr lang="en-US" sz="1200"/>
-          </a:p>
-          <a:p>
-            <a:pPr marL="0" indent="0">
-              <a:lnSpc>
-                <a:spcPts val="1560"/>
-              </a:lnSpc>
-              <a:spcAft>
-                <a:spcPts val="0"/>
-              </a:spcAft>
-              <a:buNone/>
-            </a:pPr>
-            <a:r>
-              <a:rPr lang="en-US" sz="1200" b="0">
-                <a:solidFill>
-                  <a:srgbClr val="202b33"/>
-                </a:solidFill>
-                <a:latin typeface="Arial"/>
-                <a:ea typeface="Arial"/>
-                <a:cs typeface="Arial"/>
-              </a:rPr>
-              <a:t xml:space="preserve">Prove the repair</a:t>
-            </a:r>
-            <a:endParaRPr lang="en-US" sz="1200"/>
-          </a:p>
-          <a:p>
-            <a:pPr marL="0" indent="0">
-              <a:lnSpc>
-                <a:spcPts val="1560"/>
-              </a:lnSpc>
-              <a:spcAft>
-                <a:spcPts val="0"/>
-              </a:spcAft>
-              <a:buNone/>
-            </a:pPr>
-            <a:r>
-              <a:rPr lang="en-US" sz="1200" b="0">
-                <a:solidFill>
-                  <a:srgbClr val="202b33"/>
-                </a:solidFill>
-                <a:latin typeface="Arial"/>
-                <a:ea typeface="Arial"/>
-                <a:cs typeface="Arial"/>
-              </a:rPr>
-              <a:t xml:space="preserve"/>
-            </a:r>
-            <a:endParaRPr lang="en-US" sz="1200"/>
-          </a:p>
-          <a:p>
-            <a:pPr marL="0" indent="0">
-              <a:lnSpc>
-                <a:spcPts val="1560"/>
-              </a:lnSpc>
-              <a:spcAft>
-                <a:spcPts val="0"/>
-              </a:spcAft>
-              <a:buNone/>
-            </a:pPr>
-            <a:r>
-              <a:rPr lang="en-US" sz="1200" b="0">
-                <a:solidFill>
-                  <a:srgbClr val="202b33"/>
-                </a:solidFill>
-                <a:latin typeface="Arial"/>
-                <a:ea typeface="Arial"/>
-                <a:cs typeface="Arial"/>
-              </a:rPr>
-              <a:t xml:space="preserve">Remember the known case</a:t>
-            </a:r>
-            <a:endParaRPr lang="en-US" sz="1200"/>
-          </a:p>
-          <a:p>
-            <a:pPr marL="0" indent="0">
-              <a:lnSpc>
-                <a:spcPts val="1560"/>
-              </a:lnSpc>
-              <a:spcAft>
-                <a:spcPts val="0"/>
-              </a:spcAft>
-              <a:buNone/>
-            </a:pPr>
-            <a:r>
-              <a:rPr lang="en-US" sz="1200" b="0">
-                <a:solidFill>
-                  <a:srgbClr val="202b33"/>
-                </a:solidFill>
-                <a:latin typeface="Arial"/>
-                <a:ea typeface="Arial"/>
-                <a:cs typeface="Arial"/>
-              </a:rPr>
-              <a:t xml:space="preserve"/>
-            </a:r>
-            <a:endParaRPr lang="en-US" sz="1200"/>
-          </a:p>
-          <a:p>
-            <a:pPr marL="0" indent="0">
-              <a:lnSpc>
-                <a:spcPts val="1560"/>
-              </a:lnSpc>
-              <a:spcAft>
-                <a:spcPts val="0"/>
-              </a:spcAft>
-              <a:buNone/>
-            </a:pPr>
-            <a:r>
-              <a:rPr lang="en-US" sz="1200" b="0">
-                <a:solidFill>
-                  <a:srgbClr val="202b33"/>
-                </a:solidFill>
-                <a:latin typeface="Arial"/>
-                <a:ea typeface="Arial"/>
-                <a:cs typeface="Arial"/>
-              </a:rPr>
-              <a:t xml:space="preserve">Return to the field that changed overnight. We did not predict its spelling. We did define what had to stay true, what evidence a repair needed, which tools this one job could have, and how far the app could go without us.</a:t>
-            </a:r>
-            <a:endParaRPr lang="en-US" sz="1200"/>
-          </a:p>
-          <a:p>
-            <a:pPr marL="0" indent="0">
-              <a:lnSpc>
-                <a:spcPts val="1560"/>
-              </a:lnSpc>
-              <a:spcAft>
-                <a:spcPts val="0"/>
-              </a:spcAft>
-              <a:buNone/>
-            </a:pPr>
-            <a:r>
-              <a:rPr lang="en-US" sz="1200" b="0">
-                <a:solidFill>
-                  <a:srgbClr val="202b33"/>
-                </a:solidFill>
-                <a:latin typeface="Arial"/>
-                <a:ea typeface="Arial"/>
-                <a:cs typeface="Arial"/>
-              </a:rPr>
-              <a:t xml:space="preserve"/>
-            </a:r>
-            <a:endParaRPr lang="en-US" sz="1200"/>
-          </a:p>
-          <a:p>
-            <a:pPr marL="0" indent="0">
-              <a:lnSpc>
-                <a:spcPts val="1560"/>
-              </a:lnSpc>
-              <a:spcAft>
-                <a:spcPts val="0"/>
-              </a:spcAft>
-              <a:buNone/>
-            </a:pPr>
-            <a:r>
-              <a:rPr lang="en-US" sz="1200" b="0">
-                <a:solidFill>
-                  <a:srgbClr val="202b33"/>
-                </a:solidFill>
-                <a:latin typeface="Arial"/>
-                <a:ea typeface="Arial"/>
-                <a:cs typeface="Arial"/>
-              </a:rPr>
-              <a:t xml:space="preserve">And return to the assistant with everything. It is still coming; nothing on these slides stops it, and I would not want to. What changed is how many of its pathways are live at once. Each job gets a small agent with a tailored prompt, a short tool list, a hard budget, and a log of every time it asked for more. That is the strategy I believe in for the next few years: not one agent holding every combination, which nobody can check, but many small ones you can afford to.</a:t>
-            </a:r>
-            <a:endParaRPr lang="en-US" sz="1200"/>
-          </a:p>
-          <a:p>
-            <a:pPr marL="0" indent="0">
-              <a:lnSpc>
-                <a:spcPts val="1560"/>
-              </a:lnSpc>
-              <a:spcAft>
-                <a:spcPts val="0"/>
-              </a:spcAft>
-              <a:buNone/>
-            </a:pPr>
-            <a:r>
-              <a:rPr lang="en-US" sz="1200" b="0">
-                <a:solidFill>
-                  <a:srgbClr val="202b33"/>
-                </a:solidFill>
-                <a:latin typeface="Arial"/>
-                <a:ea typeface="Arial"/>
-                <a:cs typeface="Arial"/>
-              </a:rPr>
-              <a:t xml:space="preserve"/>
-            </a:r>
-            <a:endParaRPr lang="en-US" sz="1200"/>
-          </a:p>
-          <a:p>
-            <a:pPr marL="0" indent="0">
-              <a:lnSpc>
-                <a:spcPts val="1560"/>
-              </a:lnSpc>
-              <a:spcAft>
-                <a:spcPts val="0"/>
-              </a:spcAft>
-              <a:buNone/>
-            </a:pPr>
-            <a:r>
-              <a:rPr lang="en-US" sz="1200" b="0">
-                <a:solidFill>
-                  <a:srgbClr val="202b33"/>
-                </a:solidFill>
-                <a:latin typeface="Arial"/>
-                <a:ea typeface="Arial"/>
-                <a:cs typeface="Arial"/>
-              </a:rPr>
-              <a:t xml:space="preserve">Pick one integration that already costs your team mornings. Give it a conjured agent with a bounded way to investigate, a test it did not write, and a place to record what happened. Or start with one reporting agent: keep its execution observations, make it check them before returning work, and measure whether the same mistake comes back. That is enough to start.</a:t>
-            </a:r>
-            <a:endParaRPr lang="en-US" sz="1200"/>
-          </a:p>
-          <a:p>
-            <a:pPr marL="0" indent="0">
-              <a:lnSpc>
-                <a:spcPts val="1560"/>
-              </a:lnSpc>
-              <a:spcAft>
-                <a:spcPts val="0"/>
-              </a:spcAft>
-              <a:buNone/>
-            </a:pPr>
-            <a:r>
-              <a:rPr lang="en-US" sz="1200" b="0">
-                <a:solidFill>
-                  <a:srgbClr val="202b33"/>
-                </a:solidFill>
-                <a:latin typeface="Arial"/>
-                <a:ea typeface="Arial"/>
-                <a:cs typeface="Arial"/>
-              </a:rPr>
-              <a:t xml:space="preserve"/>
-            </a:r>
-            <a:endParaRPr lang="en-US" sz="1200"/>
-          </a:p>
-          <a:p>
-            <a:pPr marL="0" indent="0">
-              <a:lnSpc>
-                <a:spcPts val="1560"/>
-              </a:lnSpc>
-              <a:spcAft>
-                <a:spcPts val="0"/>
-              </a:spcAft>
-              <a:buNone/>
-            </a:pPr>
-            <a:r>
-              <a:rPr lang="en-US" sz="1200" b="0">
-                <a:solidFill>
-                  <a:srgbClr val="202b33"/>
-                </a:solidFill>
-                <a:latin typeface="Arial"/>
-                <a:ea typeface="Arial"/>
-                <a:cs typeface="Arial"/>
-              </a:rPr>
-              <a:t xml:space="preserve"/>
-            </a:r>
-            <a:endParaRPr lang="en-US" sz="1200"/>
-          </a:p>
-          <a:p>
-            <a:pPr marL="0" indent="0">
-              <a:lnSpc>
-                <a:spcPts val="1560"/>
-              </a:lnSpc>
-              <a:spcAft>
-                <a:spcPts val="0"/>
-              </a:spcAft>
-              <a:buNone/>
-            </a:pPr>
-            <a:r>
-              <a:rPr lang="en-US" sz="1200" b="0">
-                <a:solidFill>
-                  <a:srgbClr val="202b33"/>
-                </a:solidFill>
-                <a:latin typeface="Arial"/>
-                <a:ea typeface="Arial"/>
-                <a:cs typeface="Arial"/>
-              </a:rPr>
-              <a:t xml:space="preserve"/>
-            </a:r>
-            <a:endParaRPr lang="en-US" sz="1200"/>
-          </a:p>
-          <a:p>
-            <a:pPr marL="0" indent="0">
-              <a:lnSpc>
-                <a:spcPts val="1560"/>
-              </a:lnSpc>
-              <a:spcAft>
-                <a:spcPts val="0"/>
-              </a:spcAft>
-              <a:buNone/>
-            </a:pPr>
-            <a:r>
-              <a:rPr lang="en-US" sz="1200" b="0">
-                <a:solidFill>
-                  <a:srgbClr val="202b33"/>
-                </a:solidFill>
-                <a:latin typeface="Arial"/>
-                <a:ea typeface="Arial"/>
-                <a:cs typeface="Arial"/>
-              </a:rPr>
-              <a:t xml:space="preserve">Land on the third line. Stop talking.</a:t>
-            </a:r>
-            <a:endParaRPr lang="en-US" sz="1200"/>
-          </a:p>
-          <a:p>
-            <a:pPr marL="0" indent="0">
-              <a:lnSpc>
-                <a:spcPts val="1560"/>
-              </a:lnSpc>
-              <a:spcAft>
-                <a:spcPts val="0"/>
-              </a:spcAft>
-              <a:buNone/>
-            </a:pPr>
-            <a:r>
-              <a:rPr lang="en-US" sz="1200" b="0">
-                <a:solidFill>
-                  <a:srgbClr val="202b33"/>
-                </a:solidFill>
-                <a:latin typeface="Arial"/>
-                <a:ea typeface="Arial"/>
-                <a:cs typeface="Arial"/>
-              </a:rPr>
-              <a:t xml:space="preserve"/>
-            </a:r>
-            <a:endParaRPr lang="en-US" sz="1200"/>
-          </a:p>
-          <a:p>
-            <a:pPr marL="0" indent="0">
-              <a:lnSpc>
-                <a:spcPts val="1560"/>
-              </a:lnSpc>
-              <a:spcAft>
-                <a:spcPts val="0"/>
-              </a:spcAft>
-              <a:buNone/>
-            </a:pPr>
-            <a:r>
-              <a:rPr lang="en-US" sz="1200" b="0">
-                <a:solidFill>
-                  <a:srgbClr val="202b33"/>
-                </a:solidFill>
-                <a:latin typeface="Arial"/>
-                <a:ea typeface="Arial"/>
-                <a:cs typeface="Arial"/>
-              </a:rPr>
-              <a:t xml:space="preserve"/>
+              <a:t xml:space="preserve">Saltzer and Schroeder (1975), [The Protection of Information in Computer Systems](https://doi.org/10.1109/PROC.1975.9939), Proceedings of the IEEE 63(9), 1278 to 1308. Least privilege is their principle (f).</a:t>
+            </a:r>
+            <a:endParaRPr lang="en-US" sz="1200"/>
+          </a:p>
+          <a:p>
+            <a:pPr marL="0" indent="0">
+              <a:lnSpc>
+                <a:spcPts val="1560"/>
+              </a:lnSpc>
+              <a:spcAft>
+                <a:spcPts val="0"/>
+              </a:spcAft>
+              <a:buNone/>
+            </a:pPr>
+            <a:r>
+              <a:rPr lang="en-US" sz="1200" b="0">
+                <a:solidFill>
+                  <a:srgbClr val="202b33"/>
+                </a:solidFill>
+                <a:latin typeface="Arial"/>
+                <a:ea typeface="Arial"/>
+                <a:cs typeface="Arial"/>
+              </a:rPr>
+              <a:t xml:space="preserve"/>
+            </a:r>
+            <a:endParaRPr lang="en-US" sz="1200"/>
+          </a:p>
+          <a:p>
+            <a:pPr marL="0" indent="0">
+              <a:lnSpc>
+                <a:spcPts val="1560"/>
+              </a:lnSpc>
+              <a:spcAft>
+                <a:spcPts val="0"/>
+              </a:spcAft>
+              <a:buNone/>
+            </a:pPr>
+            <a:r>
+              <a:rPr lang="en-US" sz="1200" b="0">
+                <a:solidFill>
+                  <a:srgbClr val="202b33"/>
+                </a:solidFill>
+                <a:latin typeface="Arial"/>
+                <a:ea typeface="Arial"/>
+                <a:cs typeface="Arial"/>
+              </a:rPr>
+              <a:t xml:space="preserve">Vaughan (1996), The Challenger Launch Decision, University of Chicago Press, on normalization of deviance.</a:t>
             </a:r>
             <a:endParaRPr lang="en-US" sz="1200"/>
           </a:p>
@@ -5633,7 +4460,7 @@
                 <a:ea typeface="Arial"/>
                 <a:cs typeface="Arial"/>
               </a:rPr>
-              <a:t xml:space="preserve">Source slide 1. 00:00 to 01:30</a:t>
+              <a:t xml:space="preserve">Source slide 1. 00:00 to 02:00</a:t>
             </a:r>
             <a:endParaRPr lang="en-US" sz="1200"/>
           </a:p>
@@ -6048,119 +4875,6 @@
                 <a:cs typeface="Arial"/>
               </a:rPr>
               <a:t xml:space="preserve"/>
-            </a:r>
-            <a:endParaRPr lang="en-US" sz="1200"/>
-          </a:p>
-        </p:txBody>
-      </p:sp>
-    </p:spTree>
-  </p:cSld>
-  <p:clrMapOvr>
-    <a:masterClrMapping/>
-  </p:clrMapOvr>
-</p:notes>
-</file>
-
-<file path=ppt/notesSlides/notesSlide20.xml><?xml version="1.0" encoding="utf-8"?>
-<p:notes xmlns:a="http://schemas.openxmlformats.org/drawingml/2006/main" xmlns:r="http://schemas.openxmlformats.org/officeDocument/2006/relationships" xmlns:p="http://schemas.openxmlformats.org/presentationml/2006/main">
-  <p:cSld>
-    <p:spTree>
-      <p:nvGrpSpPr>
-        <p:cNvPr id="1" name=""/>
-        <p:cNvGrpSpPr/>
-        <p:nvPr/>
-      </p:nvGrpSpPr>
-      <p:grpSpPr>
-        <a:xfrm>
-          <a:off x="0" y="0"/>
-          <a:ext cx="0" cy="0"/>
-          <a:chOff x="0" y="0"/>
-          <a:chExt cx="0" cy="0"/>
-        </a:xfrm>
-      </p:grpSpPr>
-      <p:sp>
-        <p:nvSpPr>
-          <p:cNvPr id="2" name="Presenter notes"/>
-          <p:cNvSpPr txBox="1"/>
-          <p:nvPr>
-            <p:ph type="body" idx="1"/>
-          </p:nvPr>
-        </p:nvSpPr>
-        <p:spPr>
-          <a:xfrm>
-            <a:off x="457200" y="1428750"/>
-            <a:ext cx="5715000" cy="6667500"/>
-          </a:xfrm>
-        </p:spPr>
-        <p:txBody>
-          <a:bodyPr/>
-          <a:lstStyle/>
-          <a:p>
-            <a:pPr marL="0" indent="0">
-              <a:lnSpc>
-                <a:spcPts val="1560"/>
-              </a:lnSpc>
-              <a:spcAft>
-                <a:spcPts val="0"/>
-              </a:spcAft>
-              <a:buNone/>
-            </a:pPr>
-            <a:r>
-              <a:rPr lang="en-US" sz="1200" b="0">
-                <a:solidFill>
-                  <a:srgbClr val="202b33"/>
-                </a:solidFill>
-                <a:latin typeface="Arial"/>
-                <a:ea typeface="Arial"/>
-                <a:cs typeface="Arial"/>
-              </a:rPr>
-              <a:t xml:space="preserve">Saltzer and Schroeder (1975), [The Protection of Information in Computer Systems](https://doi.org/10.1109/PROC.1975.9939), Proceedings of the IEEE 63(9), 1278 to 1308. Least privilege is their principle (f).</a:t>
-            </a:r>
-            <a:endParaRPr lang="en-US" sz="1200"/>
-          </a:p>
-          <a:p>
-            <a:pPr marL="0" indent="0">
-              <a:lnSpc>
-                <a:spcPts val="1560"/>
-              </a:lnSpc>
-              <a:spcAft>
-                <a:spcPts val="0"/>
-              </a:spcAft>
-              <a:buNone/>
-            </a:pPr>
-            <a:r>
-              <a:rPr lang="en-US" sz="1200" b="0">
-                <a:solidFill>
-                  <a:srgbClr val="202b33"/>
-                </a:solidFill>
-                <a:latin typeface="Arial"/>
-                <a:ea typeface="Arial"/>
-                <a:cs typeface="Arial"/>
-              </a:rPr>
-              <a:t xml:space="preserve"/>
-            </a:r>
-            <a:endParaRPr lang="en-US" sz="1200"/>
-          </a:p>
-          <a:p>
-            <a:pPr marL="0" indent="0">
-              <a:lnSpc>
-                <a:spcPts val="1560"/>
-              </a:lnSpc>
-              <a:spcAft>
-                <a:spcPts val="0"/>
-              </a:spcAft>
-              <a:buNone/>
-            </a:pPr>
-            <a:r>
-              <a:rPr lang="en-US" sz="1200" b="0">
-                <a:solidFill>
-                  <a:srgbClr val="202b33"/>
-                </a:solidFill>
-                <a:latin typeface="Arial"/>
-                <a:ea typeface="Arial"/>
-                <a:cs typeface="Arial"/>
-              </a:rPr>
-              <a:t xml:space="preserve">Vaughan (1996), The Challenger Launch Decision, University of Chicago Press, on normalization of deviance.</a:t>
             </a:r>
             <a:endParaRPr lang="en-US" sz="1200"/>
           </a:p>
@@ -6273,7 +4987,7 @@
                 <a:ea typeface="Arial"/>
                 <a:cs typeface="Arial"/>
               </a:rPr>
-              <a:t xml:space="preserve">Source slide 2. 01:30 to 03:00</a:t>
+              <a:t xml:space="preserve">Source slide 2. 02:00 to 03:30</a:t>
             </a:r>
             <a:endParaRPr lang="en-US" sz="1200"/>
           </a:p>
@@ -6504,52 +5218,6 @@
                 <a:cs typeface="Arial"/>
               </a:rPr>
               <a:t xml:space="preserve">The agent has to beat that. Not on vibes. On time to recover, on records kept moving, and on a number the baseline gets for free: false repairs. Alert-and-wait never turns a rename into plausible wrong data. If the adaptive version does, even once, it has made operations worse.</a:t>
-            </a:r>
-            <a:endParaRPr lang="en-US" sz="1200"/>
-          </a:p>
-          <a:p>
-            <a:pPr marL="0" indent="0">
-              <a:lnSpc>
-                <a:spcPts val="1560"/>
-              </a:lnSpc>
-              <a:spcAft>
-                <a:spcPts val="0"/>
-              </a:spcAft>
-              <a:buNone/>
-            </a:pPr>
-            <a:r>
-              <a:rPr lang="en-US" sz="1200" b="0">
-                <a:solidFill>
-                  <a:srgbClr val="202b33"/>
-                </a:solidFill>
-                <a:latin typeface="Arial"/>
-                <a:ea typeface="Arial"/>
-                <a:cs typeface="Arial"/>
-              </a:rPr>
-              <a:t xml:space="preserve"/>
-            </a:r>
-            <a:endParaRPr lang="en-US" sz="1200"/>
-          </a:p>
-          <a:p>
-            <a:pPr marL="0" indent="0">
-              <a:lnSpc>
-                <a:spcPts val="1560"/>
-              </a:lnSpc>
-              <a:spcAft>
-                <a:spcPts val="0"/>
-              </a:spcAft>
-              <a:buNone/>
-            </a:pPr>
-            <a:r>
-              <a:rPr lang="en-US" sz="1200" b="0">
-                <a:solidFill>
-                  <a:srgbClr val="202b33"/>
-                </a:solidFill>
-                <a:latin typeface="Arial"/>
-                <a:ea typeface="Arial"/>
-                <a:cs typeface="Arial"/>
-              </a:rPr>
-              <a:t xml:space="preserve">So every slide from here is about buying recovery speed without buying corruption. Keep that trade in your head; it is the whole talk.</a:t>
             </a:r>
             <a:endParaRPr lang="en-US" sz="1200"/>
           </a:p>
@@ -6800,7 +5468,7 @@
                 <a:ea typeface="Arial"/>
                 <a:cs typeface="Arial"/>
               </a:rPr>
-              <a:t xml:space="preserve">Source slide 3. 03:00 to 05:30</a:t>
+              <a:t xml:space="preserve">Source slide 3. 03:30 to 07:15</a:t>
             </a:r>
             <a:endParaRPr lang="en-US" sz="1200"/>
           </a:p>
@@ -6984,7 +5652,7 @@
                 <a:ea typeface="Arial"/>
                 <a:cs typeface="Arial"/>
               </a:rPr>
-              <a:t xml:space="preserve">Zoom out from the ingest job. The assistant with every customer's data and a toolbox that can send email, issue refunds, delete records and ship code is not a design we get to decline. It is arriving one integration at a time, and not only in our products. Browsers now ship a chat that drives the page. WebMCP lets an agent act on any site that opts in, and the list of sites that opt in only goes one direction. The next generation of CLIs will take natural language by default, and you will pass `--no-agent` to get the old behavior back. The intermediary intelligence layer is going to wrap everything, and I know who to blame: the kids. Actually, the kids hate AI. It will be their kids who demand an agent safety blanket on everything. I will be in a rocking chair explaining that the internet was better on vinyl.</a:t>
+              <a:t xml:space="preserve">Zoom out from the ingest job. The assistant with every customer's data and a toolbox that can send email, issue refunds, delete records and ship code is not a design we get to decline. It is arriving one integration at a time, and not only in our products.</a:t>
             </a:r>
             <a:endParaRPr lang="en-US" sz="1200"/>
           </a:p>
@@ -7076,52 +5744,6 @@
                 <a:ea typeface="Arial"/>
                 <a:cs typeface="Arial"/>
               </a:rPr>
-              <a:t xml:space="preserve">Most of the damage will be accidents: a confident mapping, a helpful cleanup, a tool called with the wrong ID. Then there are the people who mean it. That renamed field could carry a sentence aimed at the model, and a vendor payload is untrusted input that now gets read by something that can act.</a:t>
-            </a:r>
-            <a:endParaRPr lang="en-US" sz="1200"/>
-          </a:p>
-          <a:p>
-            <a:pPr marL="0" indent="0">
-              <a:lnSpc>
-                <a:spcPts val="1560"/>
-              </a:lnSpc>
-              <a:spcAft>
-                <a:spcPts val="0"/>
-              </a:spcAft>
-              <a:buNone/>
-            </a:pPr>
-            <a:r>
-              <a:rPr lang="en-US" sz="1200" b="0">
-                <a:solidFill>
-                  <a:srgbClr val="202b33"/>
-                </a:solidFill>
-                <a:latin typeface="Arial"/>
-                <a:ea typeface="Arial"/>
-                <a:cs typeface="Arial"/>
-              </a:rPr>
-              <a:t xml:space="preserve"/>
-            </a:r>
-            <a:endParaRPr lang="en-US" sz="1200"/>
-          </a:p>
-          <a:p>
-            <a:pPr marL="0" indent="0">
-              <a:lnSpc>
-                <a:spcPts val="1560"/>
-              </a:lnSpc>
-              <a:spcAft>
-                <a:spcPts val="0"/>
-              </a:spcAft>
-              <a:buNone/>
-            </a:pPr>
-            <a:r>
-              <a:rPr lang="en-US" sz="1200" b="0">
-                <a:solidFill>
-                  <a:srgbClr val="202b33"/>
-                </a:solidFill>
-                <a:latin typeface="Arial"/>
-                <a:ea typeface="Arial"/>
-                <a:cs typeface="Arial"/>
-              </a:rPr>
               <a:t xml:space="preserve">So the question is not whether to give the assistant access. It is how to keep the number of live pathways small enough to reason about, one job at a time. That is what the rest of this talk builds. The big assistant still exists. It just never has all of its hands full at once: it conjures a small agent per job, with exactly enough.</a:t>
             </a:r>
             <a:endParaRPr lang="en-US" sz="1200"/>
@@ -7260,7 +5882,7 @@
                 <a:ea typeface="Arial"/>
                 <a:cs typeface="Arial"/>
               </a:rPr>
-              <a:t xml:space="preserve"/>
+              <a:t xml:space="preserve">Bridge: most of the damage will be accidents — a confident mapping, a helpful cleanup, a tool called with the wrong ID — and a renamed field is untrusted input read by something that can act.</a:t>
             </a:r>
             <a:endParaRPr lang="en-US" sz="1200"/>
           </a:p>
@@ -7373,7 +5995,7 @@
                 <a:ea typeface="Arial"/>
                 <a:cs typeface="Arial"/>
               </a:rPr>
-              <a:t xml:space="preserve">Source slide 3. 03:00 to 05:30</a:t>
+              <a:t xml:space="preserve">Source slide 3. 03:30 to 07:15</a:t>
             </a:r>
             <a:endParaRPr lang="en-US" sz="1200"/>
           </a:p>
@@ -7557,7 +6179,7 @@
                 <a:ea typeface="Arial"/>
                 <a:cs typeface="Arial"/>
               </a:rPr>
-              <a:t xml:space="preserve">Zoom out from the ingest job. The assistant with every customer's data and a toolbox that can send email, issue refunds, delete records and ship code is not a design we get to decline. It is arriving one integration at a time, and not only in our products. Browsers now ship a chat that drives the page. WebMCP lets an agent act on any site that opts in, and the list of sites that opt in only goes one direction. The next generation of CLIs will take natural language by default, and you will pass `--no-agent` to get the old behavior back. The intermediary intelligence layer is going to wrap everything, and I know who to blame: the kids. Actually, the kids hate AI. It will be their kids who demand an agent safety blanket on everything. I will be in a rocking chair explaining that the internet was better on vinyl.</a:t>
+              <a:t xml:space="preserve">Zoom out from the ingest job. The assistant with every customer's data and a toolbox that can send email, issue refunds, delete records and ship code is not a design we get to decline. It is arriving one integration at a time, and not only in our products.</a:t>
             </a:r>
             <a:endParaRPr lang="en-US" sz="1200"/>
           </a:p>
@@ -7649,52 +6271,6 @@
                 <a:ea typeface="Arial"/>
                 <a:cs typeface="Arial"/>
               </a:rPr>
-              <a:t xml:space="preserve">Most of the damage will be accidents: a confident mapping, a helpful cleanup, a tool called with the wrong ID. Then there are the people who mean it. That renamed field could carry a sentence aimed at the model, and a vendor payload is untrusted input that now gets read by something that can act.</a:t>
-            </a:r>
-            <a:endParaRPr lang="en-US" sz="1200"/>
-          </a:p>
-          <a:p>
-            <a:pPr marL="0" indent="0">
-              <a:lnSpc>
-                <a:spcPts val="1560"/>
-              </a:lnSpc>
-              <a:spcAft>
-                <a:spcPts val="0"/>
-              </a:spcAft>
-              <a:buNone/>
-            </a:pPr>
-            <a:r>
-              <a:rPr lang="en-US" sz="1200" b="0">
-                <a:solidFill>
-                  <a:srgbClr val="202b33"/>
-                </a:solidFill>
-                <a:latin typeface="Arial"/>
-                <a:ea typeface="Arial"/>
-                <a:cs typeface="Arial"/>
-              </a:rPr>
-              <a:t xml:space="preserve"/>
-            </a:r>
-            <a:endParaRPr lang="en-US" sz="1200"/>
-          </a:p>
-          <a:p>
-            <a:pPr marL="0" indent="0">
-              <a:lnSpc>
-                <a:spcPts val="1560"/>
-              </a:lnSpc>
-              <a:spcAft>
-                <a:spcPts val="0"/>
-              </a:spcAft>
-              <a:buNone/>
-            </a:pPr>
-            <a:r>
-              <a:rPr lang="en-US" sz="1200" b="0">
-                <a:solidFill>
-                  <a:srgbClr val="202b33"/>
-                </a:solidFill>
-                <a:latin typeface="Arial"/>
-                <a:ea typeface="Arial"/>
-                <a:cs typeface="Arial"/>
-              </a:rPr>
               <a:t xml:space="preserve">So the question is not whether to give the assistant access. It is how to keep the number of live pathways small enough to reason about, one job at a time. That is what the rest of this talk builds. The big assistant still exists. It just never has all of its hands full at once: it conjures a small agent per job, with exactly enough.</a:t>
             </a:r>
             <a:endParaRPr lang="en-US" sz="1200"/>
@@ -7833,7 +6409,7 @@
                 <a:ea typeface="Arial"/>
                 <a:cs typeface="Arial"/>
               </a:rPr>
-              <a:t xml:space="preserve"/>
+              <a:t xml:space="preserve">Bridge: most of the damage will be accidents — a confident mapping, a helpful cleanup, a tool called with the wrong ID — and a renamed field is untrusted input read by something that can act.</a:t>
             </a:r>
             <a:endParaRPr lang="en-US" sz="1200"/>
           </a:p>
@@ -7946,7 +6522,7 @@
                 <a:ea typeface="Arial"/>
                 <a:cs typeface="Arial"/>
               </a:rPr>
-              <a:t xml:space="preserve">Source slide 4. 05:30 to 09:00</a:t>
+              <a:t xml:space="preserve">Source slide 4. 07:15 to 10:45</a:t>
             </a:r>
             <a:endParaRPr lang="en-US" sz="1200"/>
           </a:p>
@@ -8519,7 +7095,7 @@
                 <a:ea typeface="Arial"/>
                 <a:cs typeface="Arial"/>
               </a:rPr>
-              <a:t xml:space="preserve">Source slide 4. 05:30 to 09:00</a:t>
+              <a:t xml:space="preserve">Source slide 4. 07:15 to 10:45</a:t>
             </a:r>
             <a:endParaRPr lang="en-US" sz="1200"/>
           </a:p>
@@ -9092,7 +7668,7 @@
                 <a:ea typeface="Arial"/>
                 <a:cs typeface="Arial"/>
               </a:rPr>
-              <a:t xml:space="preserve">Source slide 5. 09:00 to 11:30</a:t>
+              <a:t xml:space="preserve">Source slide 5. 10:45 to 13:15</a:t>
             </a:r>
             <a:endParaRPr lang="en-US" sz="1200"/>
           </a:p>
@@ -9414,52 +7990,6 @@
                 <a:ea typeface="Arial"/>
                 <a:cs typeface="Arial"/>
               </a:rPr>
-              <a:t xml:space="preserve">For sensitive processing, the planner gets an opaque job reference. A trusted dispatcher grants a local worker scoped access; the worker touches the data; only an allowlisted status comes back. A signed download URL is a bearer credential. Handing it to a model while asking the model not to use it is not isolation, it is hope.</a:t>
-            </a:r>
-            <a:endParaRPr lang="en-US" sz="1200"/>
-          </a:p>
-          <a:p>
-            <a:pPr marL="0" indent="0">
-              <a:lnSpc>
-                <a:spcPts val="1560"/>
-              </a:lnSpc>
-              <a:spcAft>
-                <a:spcPts val="0"/>
-              </a:spcAft>
-              <a:buNone/>
-            </a:pPr>
-            <a:r>
-              <a:rPr lang="en-US" sz="1200" b="0">
-                <a:solidFill>
-                  <a:srgbClr val="202b33"/>
-                </a:solidFill>
-                <a:latin typeface="Arial"/>
-                <a:ea typeface="Arial"/>
-                <a:cs typeface="Arial"/>
-              </a:rPr>
-              <a:t xml:space="preserve"/>
-            </a:r>
-            <a:endParaRPr lang="en-US" sz="1200"/>
-          </a:p>
-          <a:p>
-            <a:pPr marL="0" indent="0">
-              <a:lnSpc>
-                <a:spcPts val="1560"/>
-              </a:lnSpc>
-              <a:spcAft>
-                <a:spcPts val="0"/>
-              </a:spcAft>
-              <a:buNone/>
-            </a:pPr>
-            <a:r>
-              <a:rPr lang="en-US" sz="1200" b="0">
-                <a:solidFill>
-                  <a:srgbClr val="202b33"/>
-                </a:solidFill>
-                <a:latin typeface="Arial"/>
-                <a:ea typeface="Arial"/>
-                <a:cs typeface="Arial"/>
-              </a:rPr>
               <a:t xml:space="preserve">Saltzer and Schroeder (1975), [The Protection of Information in Computer Systems](https://doi.org/10.1109/PROC.1975.9939), Proceedings of the IEEE 63(9), 1278 to 1308. Least privilege is their principle (f).</a:t>
             </a:r>
             <a:endParaRPr lang="en-US" sz="1200"/>
@@ -9598,7 +8128,7 @@
                 <a:ea typeface="Arial"/>
                 <a:cs typeface="Arial"/>
               </a:rPr>
-              <a:t xml:space="preserve"/>
+              <a:t xml:space="preserve">Bridge: a signed download URL is a bearer credential; handing it to a model while asking the model not to use it is hope, not isolation.</a:t>
             </a:r>
             <a:endParaRPr lang="en-US" sz="1200"/>
           </a:p>
@@ -9711,7 +8241,7 @@
                 <a:ea typeface="Arial"/>
                 <a:cs typeface="Arial"/>
               </a:rPr>
-              <a:t xml:space="preserve">Source slide 5. 09:00 to 11:30</a:t>
+              <a:t xml:space="preserve">Source slide 5. 10:45 to 13:15</a:t>
             </a:r>
             <a:endParaRPr lang="en-US" sz="1200"/>
           </a:p>
@@ -10033,52 +8563,6 @@
                 <a:ea typeface="Arial"/>
                 <a:cs typeface="Arial"/>
               </a:rPr>
-              <a:t xml:space="preserve">For sensitive processing, the planner gets an opaque job reference. A trusted dispatcher grants a local worker scoped access; the worker touches the data; only an allowlisted status comes back. A signed download URL is a bearer credential. Handing it to a model while asking the model not to use it is not isolation, it is hope.</a:t>
-            </a:r>
-            <a:endParaRPr lang="en-US" sz="1200"/>
-          </a:p>
-          <a:p>
-            <a:pPr marL="0" indent="0">
-              <a:lnSpc>
-                <a:spcPts val="1560"/>
-              </a:lnSpc>
-              <a:spcAft>
-                <a:spcPts val="0"/>
-              </a:spcAft>
-              <a:buNone/>
-            </a:pPr>
-            <a:r>
-              <a:rPr lang="en-US" sz="1200" b="0">
-                <a:solidFill>
-                  <a:srgbClr val="202b33"/>
-                </a:solidFill>
-                <a:latin typeface="Arial"/>
-                <a:ea typeface="Arial"/>
-                <a:cs typeface="Arial"/>
-              </a:rPr>
-              <a:t xml:space="preserve"/>
-            </a:r>
-            <a:endParaRPr lang="en-US" sz="1200"/>
-          </a:p>
-          <a:p>
-            <a:pPr marL="0" indent="0">
-              <a:lnSpc>
-                <a:spcPts val="1560"/>
-              </a:lnSpc>
-              <a:spcAft>
-                <a:spcPts val="0"/>
-              </a:spcAft>
-              <a:buNone/>
-            </a:pPr>
-            <a:r>
-              <a:rPr lang="en-US" sz="1200" b="0">
-                <a:solidFill>
-                  <a:srgbClr val="202b33"/>
-                </a:solidFill>
-                <a:latin typeface="Arial"/>
-                <a:ea typeface="Arial"/>
-                <a:cs typeface="Arial"/>
-              </a:rPr>
               <a:t xml:space="preserve">Saltzer and Schroeder (1975), [The Protection of Information in Computer Systems](https://doi.org/10.1109/PROC.1975.9939), Proceedings of the IEEE 63(9), 1278 to 1308. Least privilege is their principle (f).</a:t>
             </a:r>
             <a:endParaRPr lang="en-US" sz="1200"/>
@@ -10217,7 +8701,7 @@
                 <a:ea typeface="Arial"/>
                 <a:cs typeface="Arial"/>
               </a:rPr>
-              <a:t xml:space="preserve"/>
+              <a:t xml:space="preserve">Bridge: a signed download URL is a bearer credential; handing it to a model while asking the model not to use it is hope, not isolation.</a:t>
             </a:r>
             <a:endParaRPr lang="en-US" sz="1200"/>
           </a:p>
@@ -14754,7 +13238,7 @@
                 <a:ea typeface="Arial"/>
                 <a:cs typeface="Arial"/>
               </a:rPr>
-              <a:t xml:space="preserve">10 / 13    SOURCE SLIDE 11</a:t>
+              <a:t xml:space="preserve">11 / 13    SOURCE SLIDE 13</a:t>
             </a:r>
             <a:endParaRPr lang="en-US" sz="1050"/>
           </a:p>
@@ -14803,7 +13287,7 @@
                 <a:ea typeface="Arial"/>
                 <a:cs typeface="Arial"/>
               </a:rPr>
-              <a:t xml:space="preserve">Compute Is a Tool Too (continued)</a:t>
+              <a:t xml:space="preserve">Widen Per Class, Never Per Streak</a:t>
             </a:r>
             <a:endParaRPr lang="en-US" sz="2550"/>
           </a:p>
@@ -14852,7 +13336,7 @@
                 <a:ea typeface="Arial"/>
                 <a:cs typeface="Arial"/>
               </a:rPr>
-              <a:t xml:space="preserve">The guard is the same one we used for</a:t>
+              <a:t xml:space="preserve">Shadow: propose, apply nothing</a:t>
             </a:r>
             <a:endParaRPr lang="en-US" sz="1500"/>
           </a:p>
@@ -14875,7 +13359,7 @@
                 <a:ea typeface="Arial"/>
                 <a:cs typeface="Arial"/>
               </a:rPr>
-              <a:t xml:space="preserve">tools. The agent chooses from a catalog of</a:t>
+              <a:t xml:space="preserve"/>
             </a:r>
             <a:endParaRPr lang="en-US" sz="1500"/>
           </a:p>
@@ -14898,7 +13382,7 @@
                 <a:ea typeface="Arial"/>
                 <a:cs typeface="Arial"/>
               </a:rPr>
-              <a:t xml:space="preserve">approved instance classes; the scheduler</a:t>
+              <a:t xml:space="preserve">Canary: one reversible change class</a:t>
             </a:r>
             <a:endParaRPr lang="en-US" sz="1500"/>
           </a:p>
@@ -14921,7 +13405,260 @@
                 <a:ea typeface="Arial"/>
                 <a:cs typeface="Arial"/>
               </a:rPr>
-              <a:t xml:space="preserve">enforces leases and teardown; an unapproved</a:t>
+              <a:t xml:space="preserve"/>
+            </a:r>
+            <a:endParaRPr lang="en-US" sz="1500"/>
+          </a:p>
+          <a:p>
+            <a:pPr marL="0" indent="0">
+              <a:lnSpc>
+                <a:spcPts val="1950"/>
+              </a:lnSpc>
+              <a:spcAft>
+                <a:spcPts val="0"/>
+              </a:spcAft>
+              <a:buNone/>
+            </a:pPr>
+            <a:r>
+              <a:rPr lang="en-US" sz="1500" b="0">
+                <a:solidFill>
+                  <a:srgbClr val="202B33"/>
+                </a:solidFill>
+                <a:latin typeface="Arial"/>
+                <a:ea typeface="Arial"/>
+                <a:cs typeface="Arial"/>
+              </a:rPr>
+              <a:t xml:space="preserve">Expand: from correct recoveries, false</a:t>
+            </a:r>
+            <a:endParaRPr lang="en-US" sz="1500"/>
+          </a:p>
+          <a:p>
+            <a:pPr marL="0" indent="0">
+              <a:lnSpc>
+                <a:spcPts val="1950"/>
+              </a:lnSpc>
+              <a:spcAft>
+                <a:spcPts val="0"/>
+              </a:spcAft>
+              <a:buNone/>
+            </a:pPr>
+            <a:r>
+              <a:rPr lang="en-US" sz="1500" b="0">
+                <a:solidFill>
+                  <a:srgbClr val="202B33"/>
+                </a:solidFill>
+                <a:latin typeface="Arial"/>
+                <a:ea typeface="Arial"/>
+                <a:cs typeface="Arial"/>
+              </a:rPr>
+              <a:t xml:space="preserve">repairs, cost, interventions</a:t>
+            </a:r>
+            <a:endParaRPr lang="en-US" sz="1500"/>
+          </a:p>
+          <a:p>
+            <a:pPr marL="0" indent="0">
+              <a:lnSpc>
+                <a:spcPts val="1950"/>
+              </a:lnSpc>
+              <a:spcAft>
+                <a:spcPts val="0"/>
+              </a:spcAft>
+              <a:buNone/>
+            </a:pPr>
+            <a:r>
+              <a:rPr lang="en-US" sz="1500" b="0">
+                <a:solidFill>
+                  <a:srgbClr val="202B33"/>
+                </a:solidFill>
+                <a:latin typeface="Arial"/>
+                <a:ea typeface="Arial"/>
+                <a:cs typeface="Arial"/>
+              </a:rPr>
+              <a:t xml:space="preserve"/>
+            </a:r>
+            <a:endParaRPr lang="en-US" sz="1500"/>
+          </a:p>
+          <a:p>
+            <a:pPr marL="0" indent="0">
+              <a:lnSpc>
+                <a:spcPts val="1950"/>
+              </a:lnSpc>
+              <a:spcAft>
+                <a:spcPts val="0"/>
+              </a:spcAft>
+              <a:buNone/>
+            </a:pPr>
+            <a:r>
+              <a:rPr lang="en-US" sz="1500" b="0">
+                <a:solidFill>
+                  <a:srgbClr val="202B33"/>
+                </a:solidFill>
+                <a:latin typeface="Arial"/>
+                <a:ea typeface="Arial"/>
+                <a:cs typeface="Arial"/>
+              </a:rPr>
+              <a:t xml:space="preserve">Start in shadow mode: the conjured agents</a:t>
+            </a:r>
+            <a:endParaRPr lang="en-US" sz="1500"/>
+          </a:p>
+          <a:p>
+            <a:pPr marL="0" indent="0">
+              <a:lnSpc>
+                <a:spcPts val="1950"/>
+              </a:lnSpc>
+              <a:spcAft>
+                <a:spcPts val="0"/>
+              </a:spcAft>
+              <a:buNone/>
+            </a:pPr>
+            <a:r>
+              <a:rPr lang="en-US" sz="1500" b="0">
+                <a:solidFill>
+                  <a:srgbClr val="202B33"/>
+                </a:solidFill>
+                <a:latin typeface="Arial"/>
+                <a:ea typeface="Arial"/>
+                <a:cs typeface="Arial"/>
+              </a:rPr>
+              <a:t xml:space="preserve">propose artifacts and apply none. Then</a:t>
+            </a:r>
+            <a:endParaRPr lang="en-US" sz="1500"/>
+          </a:p>
+          <a:p>
+            <a:pPr marL="0" indent="0">
+              <a:lnSpc>
+                <a:spcPts val="1950"/>
+              </a:lnSpc>
+              <a:spcAft>
+                <a:spcPts val="0"/>
+              </a:spcAft>
+              <a:buNone/>
+            </a:pPr>
+            <a:r>
+              <a:rPr lang="en-US" sz="1500" b="0">
+                <a:solidFill>
+                  <a:srgbClr val="202B33"/>
+                </a:solidFill>
+                <a:latin typeface="Arial"/>
+                <a:ea typeface="Arial"/>
+                <a:cs typeface="Arial"/>
+              </a:rPr>
+              <a:t xml:space="preserve">permit one reversible change class. Widen</a:t>
+            </a:r>
+            <a:endParaRPr lang="en-US" sz="1500"/>
+          </a:p>
+          <a:p>
+            <a:pPr marL="0" indent="0">
+              <a:lnSpc>
+                <a:spcPts val="1950"/>
+              </a:lnSpc>
+              <a:spcAft>
+                <a:spcPts val="0"/>
+              </a:spcAft>
+              <a:buNone/>
+            </a:pPr>
+            <a:r>
+              <a:rPr lang="en-US" sz="1500" b="0">
+                <a:solidFill>
+                  <a:srgbClr val="202B33"/>
+                </a:solidFill>
+                <a:latin typeface="Arial"/>
+                <a:ea typeface="Arial"/>
+                <a:cs typeface="Arial"/>
+              </a:rPr>
+              <a:t xml:space="preserve">authority per class, from evidence about</a:t>
+            </a:r>
+            <a:endParaRPr lang="en-US" sz="1500"/>
+          </a:p>
+          <a:p>
+            <a:pPr marL="0" indent="0">
+              <a:lnSpc>
+                <a:spcPts val="1950"/>
+              </a:lnSpc>
+              <a:spcAft>
+                <a:spcPts val="0"/>
+              </a:spcAft>
+              <a:buNone/>
+            </a:pPr>
+            <a:r>
+              <a:rPr lang="en-US" sz="1500" b="0">
+                <a:solidFill>
+                  <a:srgbClr val="202B33"/>
+                </a:solidFill>
+                <a:latin typeface="Arial"/>
+                <a:ea typeface="Arial"/>
+                <a:cs typeface="Arial"/>
+              </a:rPr>
+              <a:t xml:space="preserve">that class. This is the same discipline for</a:t>
+            </a:r>
+            <a:endParaRPr lang="en-US" sz="1500"/>
+          </a:p>
+          <a:p>
+            <a:pPr marL="0" indent="0">
+              <a:lnSpc>
+                <a:spcPts val="1950"/>
+              </a:lnSpc>
+              <a:spcAft>
+                <a:spcPts val="0"/>
+              </a:spcAft>
+              <a:buNone/>
+            </a:pPr>
+            <a:r>
+              <a:rPr lang="en-US" sz="1500" b="0">
+                <a:solidFill>
+                  <a:srgbClr val="202B33"/>
+                </a:solidFill>
+                <a:latin typeface="Arial"/>
+                <a:ea typeface="Arial"/>
+                <a:cs typeface="Arial"/>
+              </a:rPr>
+              <a:t xml:space="preserve">tools and for compute. It is also the loop</a:t>
+            </a:r>
+            <a:endParaRPr lang="en-US" sz="1500"/>
+          </a:p>
+          <a:p>
+            <a:pPr marL="0" indent="0">
+              <a:lnSpc>
+                <a:spcPts val="1950"/>
+              </a:lnSpc>
+              <a:spcAft>
+                <a:spcPts val="0"/>
+              </a:spcAft>
+              <a:buNone/>
+            </a:pPr>
+            <a:r>
+              <a:rPr lang="en-US" sz="1500" b="0">
+                <a:solidFill>
+                  <a:srgbClr val="202B33"/>
+                </a:solidFill>
+                <a:latin typeface="Arial"/>
+                <a:ea typeface="Arial"/>
+                <a:cs typeface="Arial"/>
+              </a:rPr>
+              <a:t xml:space="preserve">that lets the system adjust its own fan-out</a:t>
+            </a:r>
+            <a:endParaRPr lang="en-US" sz="1500"/>
+          </a:p>
+          <a:p>
+            <a:pPr marL="0" indent="0">
+              <a:lnSpc>
+                <a:spcPts val="1950"/>
+              </a:lnSpc>
+              <a:spcAft>
+                <a:spcPts val="0"/>
+              </a:spcAft>
+              <a:buNone/>
+            </a:pPr>
+            <a:r>
+              <a:rPr lang="en-US" sz="1500" b="0">
+                <a:solidFill>
+                  <a:srgbClr val="202B33"/>
+                </a:solidFill>
+                <a:latin typeface="Arial"/>
+                <a:ea typeface="Arial"/>
+                <a:cs typeface="Arial"/>
+              </a:rPr>
+              <a:t xml:space="preserve">and token burn from measured acceptance:</a:t>
             </a:r>
             <a:endParaRPr lang="en-US" sz="1500"/>
           </a:p>
@@ -14970,7 +13707,7 @@
                 <a:ea typeface="Arial"/>
                 <a:cs typeface="Arial"/>
               </a:rPr>
-              <a:t xml:space="preserve">faster region is not a candidate no matter</a:t>
+              <a:t xml:space="preserve">acceptance up and false repairs flat, that</a:t>
             </a:r>
             <a:endParaRPr lang="en-US" sz="1500"/>
           </a:p>
@@ -14993,7 +13730,7 @@
                 <a:ea typeface="Arial"/>
                 <a:cs typeface="Arial"/>
               </a:rPr>
-              <a:t xml:space="preserve">how good the latency looks. The mechanics</a:t>
+              <a:t xml:space="preserve">job class gets more parallel attempts and a</a:t>
             </a:r>
             <a:endParaRPr lang="en-US" sz="1500"/>
           </a:p>
@@ -15016,7 +13753,260 @@
                 <a:ea typeface="Arial"/>
                 <a:cs typeface="Arial"/>
               </a:rPr>
-              <a:t xml:space="preserve">and the ecosystem are a companion talk.</a:t>
+              <a:t xml:space="preserve">bigger budget; false repairs up, both come</a:t>
+            </a:r>
+            <a:endParaRPr lang="en-US" sz="1500"/>
+          </a:p>
+          <a:p>
+            <a:pPr marL="0" indent="0">
+              <a:lnSpc>
+                <a:spcPts val="1950"/>
+              </a:lnSpc>
+              <a:spcAft>
+                <a:spcPts val="0"/>
+              </a:spcAft>
+              <a:buNone/>
+            </a:pPr>
+            <a:r>
+              <a:rPr lang="en-US" sz="1500" b="0">
+                <a:solidFill>
+                  <a:srgbClr val="202B33"/>
+                </a:solidFill>
+                <a:latin typeface="Arial"/>
+                <a:ea typeface="Arial"/>
+                <a:cs typeface="Arial"/>
+              </a:rPr>
+              <a:t xml:space="preserve">down.</a:t>
+            </a:r>
+            <a:endParaRPr lang="en-US" sz="1500"/>
+          </a:p>
+          <a:p>
+            <a:pPr marL="0" indent="0">
+              <a:lnSpc>
+                <a:spcPts val="1950"/>
+              </a:lnSpc>
+              <a:spcAft>
+                <a:spcPts val="0"/>
+              </a:spcAft>
+              <a:buNone/>
+            </a:pPr>
+            <a:r>
+              <a:rPr lang="en-US" sz="1500" b="0">
+                <a:solidFill>
+                  <a:srgbClr val="202B33"/>
+                </a:solidFill>
+                <a:latin typeface="Arial"/>
+                <a:ea typeface="Arial"/>
+                <a:cs typeface="Arial"/>
+              </a:rPr>
+              <a:t xml:space="preserve"/>
+            </a:r>
+            <a:endParaRPr lang="en-US" sz="1500"/>
+          </a:p>
+          <a:p>
+            <a:pPr marL="0" indent="0">
+              <a:lnSpc>
+                <a:spcPts val="1950"/>
+              </a:lnSpc>
+              <a:spcAft>
+                <a:spcPts val="0"/>
+              </a:spcAft>
+              <a:buNone/>
+            </a:pPr>
+            <a:r>
+              <a:rPr lang="en-US" sz="1500" b="0">
+                <a:solidFill>
+                  <a:srgbClr val="202B33"/>
+                </a:solidFill>
+                <a:latin typeface="Arial"/>
+                <a:ea typeface="Arial"/>
+                <a:cs typeface="Arial"/>
+              </a:rPr>
+              <a:t xml:space="preserve">Watch for the failure Diane Vaughan</a:t>
+            </a:r>
+            <a:endParaRPr lang="en-US" sz="1500"/>
+          </a:p>
+          <a:p>
+            <a:pPr marL="0" indent="0">
+              <a:lnSpc>
+                <a:spcPts val="1950"/>
+              </a:lnSpc>
+              <a:spcAft>
+                <a:spcPts val="0"/>
+              </a:spcAft>
+              <a:buNone/>
+            </a:pPr>
+            <a:r>
+              <a:rPr lang="en-US" sz="1500" b="0">
+                <a:solidFill>
+                  <a:srgbClr val="202B33"/>
+                </a:solidFill>
+                <a:latin typeface="Arial"/>
+                <a:ea typeface="Arial"/>
+                <a:cs typeface="Arial"/>
+              </a:rPr>
+              <a:t xml:space="preserve">documented at NASA before Challenger and</a:t>
+            </a:r>
+            <a:endParaRPr lang="en-US" sz="1500"/>
+          </a:p>
+          <a:p>
+            <a:pPr marL="0" indent="0">
+              <a:lnSpc>
+                <a:spcPts val="1950"/>
+              </a:lnSpc>
+              <a:spcAft>
+                <a:spcPts val="0"/>
+              </a:spcAft>
+              <a:buNone/>
+            </a:pPr>
+            <a:r>
+              <a:rPr lang="en-US" sz="1500" b="0">
+                <a:solidFill>
+                  <a:srgbClr val="202B33"/>
+                </a:solidFill>
+                <a:latin typeface="Arial"/>
+                <a:ea typeface="Arial"/>
+                <a:cs typeface="Arial"/>
+              </a:rPr>
+              <a:t xml:space="preserve">named normalization of deviance. Every</a:t>
+            </a:r>
+            <a:endParaRPr lang="en-US" sz="1500"/>
+          </a:p>
+          <a:p>
+            <a:pPr marL="0" indent="0">
+              <a:lnSpc>
+                <a:spcPts val="1950"/>
+              </a:lnSpc>
+              <a:spcAft>
+                <a:spcPts val="0"/>
+              </a:spcAft>
+              <a:buNone/>
+            </a:pPr>
+            <a:r>
+              <a:rPr lang="en-US" sz="1500" b="0">
+                <a:solidFill>
+                  <a:srgbClr val="202B33"/>
+                </a:solidFill>
+                <a:latin typeface="Arial"/>
+                <a:ea typeface="Arial"/>
+                <a:cs typeface="Arial"/>
+              </a:rPr>
+              <a:t xml:space="preserve">widening is locally reasonable. Each one</a:t>
+            </a:r>
+            <a:endParaRPr lang="en-US" sz="1500"/>
+          </a:p>
+          <a:p>
+            <a:pPr marL="0" indent="0">
+              <a:lnSpc>
+                <a:spcPts val="1950"/>
+              </a:lnSpc>
+              <a:spcAft>
+                <a:spcPts val="0"/>
+              </a:spcAft>
+              <a:buNone/>
+            </a:pPr>
+            <a:r>
+              <a:rPr lang="en-US" sz="1500" b="0">
+                <a:solidFill>
+                  <a:srgbClr val="202B33"/>
+                </a:solidFill>
+                <a:latin typeface="Arial"/>
+                <a:ea typeface="Arial"/>
+                <a:cs typeface="Arial"/>
+              </a:rPr>
+              <a:t xml:space="preserve">cites the last one as precedent. Nobody</a:t>
+            </a:r>
+            <a:endParaRPr lang="en-US" sz="1500"/>
+          </a:p>
+          <a:p>
+            <a:pPr marL="0" indent="0">
+              <a:lnSpc>
+                <a:spcPts val="1950"/>
+              </a:lnSpc>
+              <a:spcAft>
+                <a:spcPts val="0"/>
+              </a:spcAft>
+              <a:buNone/>
+            </a:pPr>
+            <a:r>
+              <a:rPr lang="en-US" sz="1500" b="0">
+                <a:solidFill>
+                  <a:srgbClr val="202B33"/>
+                </a:solidFill>
+                <a:latin typeface="Arial"/>
+                <a:ea typeface="Arial"/>
+                <a:cs typeface="Arial"/>
+              </a:rPr>
+              <a:t xml:space="preserve">ever decides to be reckless. That is</a:t>
+            </a:r>
+            <a:endParaRPr lang="en-US" sz="1500"/>
+          </a:p>
+          <a:p>
+            <a:pPr marL="0" indent="0">
+              <a:lnSpc>
+                <a:spcPts val="1950"/>
+              </a:lnSpc>
+              <a:spcAft>
+                <a:spcPts val="0"/>
+              </a:spcAft>
+              <a:buNone/>
+            </a:pPr>
+            <a:r>
+              <a:rPr lang="en-US" sz="1500" b="0">
+                <a:solidFill>
+                  <a:srgbClr val="202B33"/>
+                </a:solidFill>
+                <a:latin typeface="Arial"/>
+                <a:ea typeface="Arial"/>
+                <a:cs typeface="Arial"/>
+              </a:rPr>
+              <a:t xml:space="preserve">exactly why authority expands per class and</a:t>
+            </a:r>
+            <a:endParaRPr lang="en-US" sz="1500"/>
+          </a:p>
+          <a:p>
+            <a:pPr marL="0" indent="0">
+              <a:lnSpc>
+                <a:spcPts val="1950"/>
+              </a:lnSpc>
+              <a:spcAft>
+                <a:spcPts val="0"/>
+              </a:spcAft>
+              <a:buNone/>
+            </a:pPr>
+            <a:r>
+              <a:rPr lang="en-US" sz="1500" b="0">
+                <a:solidFill>
+                  <a:srgbClr val="202B33"/>
+                </a:solidFill>
+                <a:latin typeface="Arial"/>
+                <a:ea typeface="Arial"/>
+                <a:cs typeface="Arial"/>
+              </a:rPr>
+              <a:t xml:space="preserve">from measured outcomes for that class, and</a:t>
+            </a:r>
+            <a:endParaRPr lang="en-US" sz="1500"/>
+          </a:p>
+          <a:p>
+            <a:pPr marL="0" indent="0">
+              <a:lnSpc>
+                <a:spcPts val="1950"/>
+              </a:lnSpc>
+              <a:spcAft>
+                <a:spcPts val="0"/>
+              </a:spcAft>
+              <a:buNone/>
+            </a:pPr>
+            <a:r>
+              <a:rPr lang="en-US" sz="1500" b="0">
+                <a:solidFill>
+                  <a:srgbClr val="202B33"/>
+                </a:solidFill>
+                <a:latin typeface="Arial"/>
+                <a:ea typeface="Arial"/>
+                <a:cs typeface="Arial"/>
+              </a:rPr>
+              <a:t xml:space="preserve">never from how the last six went.</a:t>
             </a:r>
             <a:endParaRPr lang="en-US" sz="1500"/>
           </a:p>
@@ -15196,7 +14186,7 @@
                 <a:ea typeface="Arial"/>
                 <a:cs typeface="Arial"/>
               </a:rPr>
-              <a:t xml:space="preserve">11 / 13    SOURCE SLIDE 13</a:t>
+              <a:t xml:space="preserve">12 / 13    SOURCE SLIDE 14</a:t>
             </a:r>
             <a:endParaRPr lang="en-US" sz="1050"/>
           </a:p>
@@ -15245,7 +14235,7 @@
                 <a:ea typeface="Arial"/>
                 <a:cs typeface="Arial"/>
               </a:rPr>
-              <a:t xml:space="preserve">Widen Per Class, Never Per Streak</a:t>
+              <a:t xml:space="preserve">Start smaller: remember what happened</a:t>
             </a:r>
             <a:endParaRPr lang="en-US" sz="2550"/>
           </a:p>
@@ -15294,7 +14284,7 @@
                 <a:ea typeface="Arial"/>
                 <a:cs typeface="Arial"/>
               </a:rPr>
-              <a:t xml:space="preserve">Shadow: propose, apply nothing</a:t>
+              <a:t xml:space="preserve">Before returning: check relevant memory and</a:t>
             </a:r>
             <a:endParaRPr lang="en-US" sz="1500"/>
           </a:p>
@@ -15317,7 +14307,7 @@
                 <a:ea typeface="Arial"/>
                 <a:cs typeface="Arial"/>
               </a:rPr>
-              <a:t xml:space="preserve"/>
+              <a:t xml:space="preserve">correct known mistakes</a:t>
             </a:r>
             <a:endParaRPr lang="en-US" sz="1500"/>
           </a:p>
@@ -15340,7 +14330,7 @@
                 <a:ea typeface="Arial"/>
                 <a:cs typeface="Arial"/>
               </a:rPr>
-              <a:t xml:space="preserve">Canary: one reversible change class</a:t>
+              <a:t xml:space="preserve"/>
             </a:r>
             <a:endParaRPr lang="en-US" sz="1500"/>
           </a:p>
@@ -15363,7 +14353,7 @@
                 <a:ea typeface="Arial"/>
                 <a:cs typeface="Arial"/>
               </a:rPr>
-              <a:t xml:space="preserve"/>
+              <a:t xml:space="preserve">After execution: record checks, outcome,</a:t>
             </a:r>
             <a:endParaRPr lang="en-US" sz="1500"/>
           </a:p>
@@ -15386,7 +14376,7 @@
                 <a:ea typeface="Arial"/>
                 <a:cs typeface="Arial"/>
               </a:rPr>
-              <a:t xml:space="preserve">Expand: from correct recoveries, false</a:t>
+              <a:t xml:space="preserve">correction and frequency</a:t>
             </a:r>
             <a:endParaRPr lang="en-US" sz="1500"/>
           </a:p>
@@ -15409,7 +14399,7 @@
                 <a:ea typeface="Arial"/>
                 <a:cs typeface="Arial"/>
               </a:rPr>
-              <a:t xml:space="preserve">repairs, cost, interventions</a:t>
+              <a:t xml:space="preserve"/>
             </a:r>
             <a:endParaRPr lang="en-US" sz="1500"/>
           </a:p>
@@ -15432,7 +14422,7 @@
                 <a:ea typeface="Arial"/>
                 <a:cs typeface="Arial"/>
               </a:rPr>
-              <a:t xml:space="preserve"/>
+              <a:t xml:space="preserve">Generated, executed and verified are</a:t>
             </a:r>
             <a:endParaRPr lang="en-US" sz="1500"/>
           </a:p>
@@ -15455,7 +14445,7 @@
                 <a:ea typeface="Arial"/>
                 <a:cs typeface="Arial"/>
               </a:rPr>
-              <a:t xml:space="preserve">Compare the design with the static mapping</a:t>
+              <a:t xml:space="preserve">different states</a:t>
             </a:r>
             <a:endParaRPr lang="en-US" sz="1500"/>
           </a:p>
@@ -15478,7 +14468,7 @@
                 <a:ea typeface="Arial"/>
                 <a:cs typeface="Arial"/>
               </a:rPr>
-              <a:t xml:space="preserve">and the pager on the same recorded</a:t>
+              <a:t xml:space="preserve"/>
             </a:r>
             <a:endParaRPr lang="en-US" sz="1500"/>
           </a:p>
@@ -15501,7 +14491,7 @@
                 <a:ea typeface="Arial"/>
                 <a:cs typeface="Arial"/>
               </a:rPr>
-              <a:t xml:space="preserve">incidents. Count recoveries, but also false</a:t>
+              <a:t xml:space="preserve">Memory is evidence, never permission</a:t>
             </a:r>
             <a:endParaRPr lang="en-US" sz="1500"/>
           </a:p>
@@ -15524,7 +14514,7 @@
                 <a:ea typeface="Arial"/>
                 <a:cs typeface="Arial"/>
               </a:rPr>
-              <a:t xml:space="preserve">repairs, dropped records, cost, elapsed</a:t>
+              <a:t xml:space="preserve"/>
             </a:r>
             <a:endParaRPr lang="en-US" sz="1500"/>
           </a:p>
@@ -15547,7 +14537,7 @@
                 <a:ea typeface="Arial"/>
                 <a:cs typeface="Arial"/>
               </a:rPr>
-              <a:t xml:space="preserve">time and human corrections. Include the</a:t>
+              <a:t xml:space="preserve">You do not need the whole agent factory to</a:t>
             </a:r>
             <a:endParaRPr lang="en-US" sz="1500"/>
           </a:p>
@@ -15570,7 +14560,7 @@
                 <a:ea typeface="Arial"/>
                 <a:cs typeface="Arial"/>
               </a:rPr>
-              <a:t xml:space="preserve">incidents where the right answer was to</a:t>
+              <a:t xml:space="preserve">start. Take one agent that writes SQL,</a:t>
             </a:r>
             <a:endParaRPr lang="en-US" sz="1500"/>
           </a:p>
@@ -15593,7 +14583,7 @@
                 <a:ea typeface="Arial"/>
                 <a:cs typeface="Arial"/>
               </a:rPr>
-              <a:t xml:space="preserve">stop. A model saying ninety percent</a:t>
+              <a:t xml:space="preserve">builds reports, runs shell commands or</a:t>
             </a:r>
             <a:endParaRPr lang="en-US" sz="1500"/>
           </a:p>
@@ -15616,7 +14606,7 @@
                 <a:ea typeface="Arial"/>
                 <a:cs typeface="Arial"/>
               </a:rPr>
-              <a:t xml:space="preserve">confident settles nothing.</a:t>
+              <a:t xml:space="preserve">generates scripted API actions. Give it</a:t>
             </a:r>
             <a:endParaRPr lang="en-US" sz="1500"/>
           </a:p>
@@ -15639,7 +14629,7 @@
                 <a:ea typeface="Arial"/>
                 <a:cs typeface="Arial"/>
               </a:rPr>
-              <a:t xml:space="preserve"/>
+              <a:t xml:space="preserve">working memory for this job: the goal,</a:t>
             </a:r>
             <a:endParaRPr lang="en-US" sz="1500"/>
           </a:p>
@@ -15662,7 +14652,7 @@
                 <a:ea typeface="Arial"/>
                 <a:cs typeface="Arial"/>
               </a:rPr>
-              <a:t xml:space="preserve">Start in shadow mode: the conjured agents</a:t>
+              <a:t xml:space="preserve">constraints, draft and unresolved checks.</a:t>
             </a:r>
             <a:endParaRPr lang="en-US" sz="1500"/>
           </a:p>
@@ -15685,30 +14675,7 @@
                 <a:ea typeface="Arial"/>
                 <a:cs typeface="Arial"/>
               </a:rPr>
-              <a:t xml:space="preserve">propose artifacts and apply none. Then</a:t>
-            </a:r>
-            <a:endParaRPr lang="en-US" sz="1500"/>
-          </a:p>
-          <a:p>
-            <a:pPr marL="0" indent="0">
-              <a:lnSpc>
-                <a:spcPts val="1950"/>
-              </a:lnSpc>
-              <a:spcAft>
-                <a:spcPts val="0"/>
-              </a:spcAft>
-              <a:buNone/>
-            </a:pPr>
-            <a:r>
-              <a:rPr lang="en-US" sz="1500" b="0">
-                <a:solidFill>
-                  <a:srgbClr val="202B33"/>
-                </a:solidFill>
-                <a:latin typeface="Arial"/>
-                <a:ea typeface="Arial"/>
-                <a:cs typeface="Arial"/>
-              </a:rPr>
-              <a:t xml:space="preserve">permit one reversible change class. Widen</a:t>
+              <a:t xml:space="preserve">Give it observational memory across jobs:</a:t>
             </a:r>
             <a:endParaRPr lang="en-US" sz="1500"/>
           </a:p>
@@ -15757,7 +14724,7 @@
                 <a:ea typeface="Arial"/>
                 <a:cs typeface="Arial"/>
               </a:rPr>
-              <a:t xml:space="preserve">authority per class, from evidence about</a:t>
+              <a:t xml:space="preserve">what it generated, what actually ran, what</a:t>
             </a:r>
             <a:endParaRPr lang="en-US" sz="1500"/>
           </a:p>
@@ -15780,7 +14747,7 @@
                 <a:ea typeface="Arial"/>
                 <a:cs typeface="Arial"/>
               </a:rPr>
-              <a:t xml:space="preserve">that class. This is the same discipline for</a:t>
+              <a:t xml:space="preserve">failed, and what the checks established.</a:t>
             </a:r>
             <a:endParaRPr lang="en-US" sz="1500"/>
           </a:p>
@@ -15803,7 +14770,7 @@
                 <a:ea typeface="Arial"/>
                 <a:cs typeface="Arial"/>
               </a:rPr>
-              <a:t xml:space="preserve">tools and for compute. It is also the loop</a:t>
+              <a:t xml:space="preserve">Now ask it to consult that history before</a:t>
             </a:r>
             <a:endParaRPr lang="en-US" sz="1500"/>
           </a:p>
@@ -15826,7 +14793,7 @@
                 <a:ea typeface="Arial"/>
                 <a:cs typeface="Arial"/>
               </a:rPr>
-              <a:t xml:space="preserve">that lets the system adjust its own fan-out</a:t>
+              <a:t xml:space="preserve">it hands you the next answer.</a:t>
             </a:r>
             <a:endParaRPr lang="en-US" sz="1500"/>
           </a:p>
@@ -15849,7 +14816,7 @@
                 <a:ea typeface="Arial"/>
                 <a:cs typeface="Arial"/>
               </a:rPr>
-              <a:t xml:space="preserve">and token burn from measured acceptance:</a:t>
+              <a:t xml:space="preserve"/>
             </a:r>
             <a:endParaRPr lang="en-US" sz="1500"/>
           </a:p>
@@ -15872,7 +14839,7 @@
                 <a:ea typeface="Arial"/>
                 <a:cs typeface="Arial"/>
               </a:rPr>
-              <a:t xml:space="preserve">acceptance up and false repairs flat, that</a:t>
+              <a:t xml:space="preserve">Suppose a reporting query keeps forgetting</a:t>
             </a:r>
             <a:endParaRPr lang="en-US" sz="1500"/>
           </a:p>
@@ -15895,7 +14862,7 @@
                 <a:ea typeface="Arial"/>
                 <a:cs typeface="Arial"/>
               </a:rPr>
-              <a:t xml:space="preserve">job class gets more parallel attempts and a</a:t>
+              <a:t xml:space="preserve">the tenant filter. It runs perfectly well;</a:t>
             </a:r>
             <a:endParaRPr lang="en-US" sz="1500"/>
           </a:p>
@@ -15918,7 +14885,7 @@
                 <a:ea typeface="Arial"/>
                 <a:cs typeface="Arial"/>
               </a:rPr>
-              <a:t xml:space="preserve">bigger budget; false repairs up, both come</a:t>
+              <a:t xml:space="preserve">it reports the wrong population. An</a:t>
             </a:r>
             <a:endParaRPr lang="en-US" sz="1500"/>
           </a:p>
@@ -15941,7 +14908,7 @@
                 <a:ea typeface="Arial"/>
                 <a:cs typeface="Arial"/>
               </a:rPr>
-              <a:t xml:space="preserve">down.</a:t>
+              <a:t xml:space="preserve">independent preflight check rejects it</a:t>
             </a:r>
             <a:endParaRPr lang="en-US" sz="1500"/>
           </a:p>
@@ -15964,7 +14931,7 @@
                 <a:ea typeface="Arial"/>
                 <a:cs typeface="Arial"/>
               </a:rPr>
-              <a:t xml:space="preserve"/>
+              <a:t xml:space="preserve">before dispatch. Record the draft, the</a:t>
             </a:r>
             <a:endParaRPr lang="en-US" sz="1500"/>
           </a:p>
@@ -15987,7 +14954,7 @@
                 <a:ea typeface="Arial"/>
                 <a:cs typeface="Arial"/>
               </a:rPr>
-              <a:t xml:space="preserve">Watch for the failure Diane Vaughan</a:t>
+              <a:t xml:space="preserve">failed check, the correction and the</a:t>
             </a:r>
             <a:endParaRPr lang="en-US" sz="1500"/>
           </a:p>
@@ -16010,7 +14977,7 @@
                 <a:ea typeface="Arial"/>
                 <a:cs typeface="Arial"/>
               </a:rPr>
-              <a:t xml:space="preserve">documented at NASA before Challenger and</a:t>
+              <a:t xml:space="preserve">eventual result. Next time, retrieve that</a:t>
             </a:r>
             <a:endParaRPr lang="en-US" sz="1500"/>
           </a:p>
@@ -16033,7 +15000,7 @@
                 <a:ea typeface="Arial"/>
                 <a:cs typeface="Arial"/>
               </a:rPr>
-              <a:t xml:space="preserve">named normalization of deviance. Every</a:t>
+              <a:t xml:space="preserve">pattern while the agent is still drafting.</a:t>
             </a:r>
             <a:endParaRPr lang="en-US" sz="1500"/>
           </a:p>
@@ -16056,7 +15023,7 @@
                 <a:ea typeface="Arial"/>
                 <a:cs typeface="Arial"/>
               </a:rPr>
-              <a:t xml:space="preserve">widening is locally reasonable. Each one</a:t>
+              <a:t xml:space="preserve">Fix the omission before returning the SQL,</a:t>
             </a:r>
             <a:endParaRPr lang="en-US" sz="1500"/>
           </a:p>
@@ -16079,7 +15046,7 @@
                 <a:ea typeface="Arial"/>
                 <a:cs typeface="Arial"/>
               </a:rPr>
-              <a:t xml:space="preserve">cites the last one as precedent. Nobody</a:t>
+              <a:t xml:space="preserve">then run the check again. That is adaptive</a:t>
             </a:r>
             <a:endParaRPr lang="en-US" sz="1500"/>
           </a:p>
@@ -16102,7 +15069,7 @@
                 <a:ea typeface="Arial"/>
                 <a:cs typeface="Arial"/>
               </a:rPr>
-              <a:t xml:space="preserve">ever decides to be reckless. That is</a:t>
+              <a:t xml:space="preserve">behavior you can build with one agent and a</a:t>
             </a:r>
             <a:endParaRPr lang="en-US" sz="1500"/>
           </a:p>
@@ -16125,53 +15092,7 @@
                 <a:ea typeface="Arial"/>
                 <a:cs typeface="Arial"/>
               </a:rPr>
-              <a:t xml:space="preserve">exactly why authority expands per class and</a:t>
-            </a:r>
-            <a:endParaRPr lang="en-US" sz="1500"/>
-          </a:p>
-          <a:p>
-            <a:pPr marL="0" indent="0">
-              <a:lnSpc>
-                <a:spcPts val="1950"/>
-              </a:lnSpc>
-              <a:spcAft>
-                <a:spcPts val="0"/>
-              </a:spcAft>
-              <a:buNone/>
-            </a:pPr>
-            <a:r>
-              <a:rPr lang="en-US" sz="1500" b="0">
-                <a:solidFill>
-                  <a:srgbClr val="202B33"/>
-                </a:solidFill>
-                <a:latin typeface="Arial"/>
-                <a:ea typeface="Arial"/>
-                <a:cs typeface="Arial"/>
-              </a:rPr>
-              <a:t xml:space="preserve">from measured outcomes for that class, and</a:t>
-            </a:r>
-            <a:endParaRPr lang="en-US" sz="1500"/>
-          </a:p>
-          <a:p>
-            <a:pPr marL="0" indent="0">
-              <a:lnSpc>
-                <a:spcPts val="1950"/>
-              </a:lnSpc>
-              <a:spcAft>
-                <a:spcPts val="0"/>
-              </a:spcAft>
-              <a:buNone/>
-            </a:pPr>
-            <a:r>
-              <a:rPr lang="en-US" sz="1500" b="0">
-                <a:solidFill>
-                  <a:srgbClr val="202B33"/>
-                </a:solidFill>
-                <a:latin typeface="Arial"/>
-                <a:ea typeface="Arial"/>
-                <a:cs typeface="Arial"/>
-              </a:rPr>
-              <a:t xml:space="preserve">never from how the last six went.</a:t>
+              <a:t xml:space="preserve">small log.</a:t>
             </a:r>
             <a:endParaRPr lang="en-US" sz="1500"/>
           </a:p>
@@ -16351,7 +15272,7 @@
                 <a:ea typeface="Arial"/>
                 <a:cs typeface="Arial"/>
               </a:rPr>
-              <a:t xml:space="preserve">12 / 13    SOURCE SLIDE 14</a:t>
+              <a:t xml:space="preserve">13 / 13    SOURCE SLIDE 15</a:t>
             </a:r>
             <a:endParaRPr lang="en-US" sz="1050"/>
           </a:p>
@@ -16400,7 +15321,7 @@
                 <a:ea typeface="Arial"/>
                 <a:cs typeface="Arial"/>
               </a:rPr>
-              <a:t xml:space="preserve">Start smaller: remember what happened</a:t>
+              <a:t xml:space="preserve">The next surprise should cost less</a:t>
             </a:r>
             <a:endParaRPr lang="en-US" sz="2550"/>
           </a:p>
@@ -16449,7 +15370,7 @@
                 <a:ea typeface="Arial"/>
                 <a:cs typeface="Arial"/>
               </a:rPr>
-              <a:t xml:space="preserve">Before returning: check relevant memory and</a:t>
+              <a:t xml:space="preserve">Conjure exactly enough</a:t>
             </a:r>
             <a:endParaRPr lang="en-US" sz="1500"/>
           </a:p>
@@ -16472,7 +15393,7 @@
                 <a:ea typeface="Arial"/>
                 <a:cs typeface="Arial"/>
               </a:rPr>
-              <a:t xml:space="preserve">correct known mistakes</a:t>
+              <a:t xml:space="preserve"/>
             </a:r>
             <a:endParaRPr lang="en-US" sz="1500"/>
           </a:p>
@@ -16495,7 +15416,7 @@
                 <a:ea typeface="Arial"/>
                 <a:cs typeface="Arial"/>
               </a:rPr>
-              <a:t xml:space="preserve"/>
+              <a:t xml:space="preserve">Prove the repair</a:t>
             </a:r>
             <a:endParaRPr lang="en-US" sz="1500"/>
           </a:p>
@@ -16518,7 +15439,7 @@
                 <a:ea typeface="Arial"/>
                 <a:cs typeface="Arial"/>
               </a:rPr>
-              <a:t xml:space="preserve">After execution: record checks, outcome,</a:t>
+              <a:t xml:space="preserve"/>
             </a:r>
             <a:endParaRPr lang="en-US" sz="1500"/>
           </a:p>
@@ -16541,7 +15462,7 @@
                 <a:ea typeface="Arial"/>
                 <a:cs typeface="Arial"/>
               </a:rPr>
-              <a:t xml:space="preserve">correction and frequency</a:t>
+              <a:t xml:space="preserve">Remember the known case</a:t>
             </a:r>
             <a:endParaRPr lang="en-US" sz="1500"/>
           </a:p>
@@ -16587,7 +15508,7 @@
                 <a:ea typeface="Arial"/>
                 <a:cs typeface="Arial"/>
               </a:rPr>
-              <a:t xml:space="preserve">Generated, executed and verified are</a:t>
+              <a:t xml:space="preserve">And return to the assistant with</a:t>
             </a:r>
             <a:endParaRPr lang="en-US" sz="1500"/>
           </a:p>
@@ -16610,7 +15531,7 @@
                 <a:ea typeface="Arial"/>
                 <a:cs typeface="Arial"/>
               </a:rPr>
-              <a:t xml:space="preserve">different states</a:t>
+              <a:t xml:space="preserve">everything. It is still coming; nothing on</a:t>
             </a:r>
             <a:endParaRPr lang="en-US" sz="1500"/>
           </a:p>
@@ -16633,7 +15554,7 @@
                 <a:ea typeface="Arial"/>
                 <a:cs typeface="Arial"/>
               </a:rPr>
-              <a:t xml:space="preserve"/>
+              <a:t xml:space="preserve">these slides stops it, and I would not want</a:t>
             </a:r>
             <a:endParaRPr lang="en-US" sz="1500"/>
           </a:p>
@@ -16656,7 +15577,7 @@
                 <a:ea typeface="Arial"/>
                 <a:cs typeface="Arial"/>
               </a:rPr>
-              <a:t xml:space="preserve">Memory is evidence, never permission</a:t>
+              <a:t xml:space="preserve">to. What changed is how many of its</a:t>
             </a:r>
             <a:endParaRPr lang="en-US" sz="1500"/>
           </a:p>
@@ -16679,7 +15600,7 @@
                 <a:ea typeface="Arial"/>
                 <a:cs typeface="Arial"/>
               </a:rPr>
-              <a:t xml:space="preserve"/>
+              <a:t xml:space="preserve">pathways are live at once. Each job gets a</a:t>
             </a:r>
             <a:endParaRPr lang="en-US" sz="1500"/>
           </a:p>
@@ -16702,7 +15623,7 @@
                 <a:ea typeface="Arial"/>
                 <a:cs typeface="Arial"/>
               </a:rPr>
-              <a:t xml:space="preserve">You do not need the whole agent factory to</a:t>
+              <a:t xml:space="preserve">small agent with a tailored prompt, a short</a:t>
             </a:r>
             <a:endParaRPr lang="en-US" sz="1500"/>
           </a:p>
@@ -16725,7 +15646,7 @@
                 <a:ea typeface="Arial"/>
                 <a:cs typeface="Arial"/>
               </a:rPr>
-              <a:t xml:space="preserve">start. Take one agent that writes SQL,</a:t>
+              <a:t xml:space="preserve">tool list, a hard budget, and a log of</a:t>
             </a:r>
             <a:endParaRPr lang="en-US" sz="1500"/>
           </a:p>
@@ -16748,7 +15669,7 @@
                 <a:ea typeface="Arial"/>
                 <a:cs typeface="Arial"/>
               </a:rPr>
-              <a:t xml:space="preserve">builds reports, runs shell commands or</a:t>
+              <a:t xml:space="preserve">every time it asked for more. That is the</a:t>
             </a:r>
             <a:endParaRPr lang="en-US" sz="1500"/>
           </a:p>
@@ -16771,76 +15692,7 @@
                 <a:ea typeface="Arial"/>
                 <a:cs typeface="Arial"/>
               </a:rPr>
-              <a:t xml:space="preserve">generates scripted API actions. Give it</a:t>
-            </a:r>
-            <a:endParaRPr lang="en-US" sz="1500"/>
-          </a:p>
-          <a:p>
-            <a:pPr marL="0" indent="0">
-              <a:lnSpc>
-                <a:spcPts val="1950"/>
-              </a:lnSpc>
-              <a:spcAft>
-                <a:spcPts val="0"/>
-              </a:spcAft>
-              <a:buNone/>
-            </a:pPr>
-            <a:r>
-              <a:rPr lang="en-US" sz="1500" b="0">
-                <a:solidFill>
-                  <a:srgbClr val="202B33"/>
-                </a:solidFill>
-                <a:latin typeface="Arial"/>
-                <a:ea typeface="Arial"/>
-                <a:cs typeface="Arial"/>
-              </a:rPr>
-              <a:t xml:space="preserve">working memory for this job: the goal,</a:t>
-            </a:r>
-            <a:endParaRPr lang="en-US" sz="1500"/>
-          </a:p>
-          <a:p>
-            <a:pPr marL="0" indent="0">
-              <a:lnSpc>
-                <a:spcPts val="1950"/>
-              </a:lnSpc>
-              <a:spcAft>
-                <a:spcPts val="0"/>
-              </a:spcAft>
-              <a:buNone/>
-            </a:pPr>
-            <a:r>
-              <a:rPr lang="en-US" sz="1500" b="0">
-                <a:solidFill>
-                  <a:srgbClr val="202B33"/>
-                </a:solidFill>
-                <a:latin typeface="Arial"/>
-                <a:ea typeface="Arial"/>
-                <a:cs typeface="Arial"/>
-              </a:rPr>
-              <a:t xml:space="preserve">constraints, draft and unresolved checks.</a:t>
-            </a:r>
-            <a:endParaRPr lang="en-US" sz="1500"/>
-          </a:p>
-          <a:p>
-            <a:pPr marL="0" indent="0">
-              <a:lnSpc>
-                <a:spcPts val="1950"/>
-              </a:lnSpc>
-              <a:spcAft>
-                <a:spcPts val="0"/>
-              </a:spcAft>
-              <a:buNone/>
-            </a:pPr>
-            <a:r>
-              <a:rPr lang="en-US" sz="1500" b="0">
-                <a:solidFill>
-                  <a:srgbClr val="202B33"/>
-                </a:solidFill>
-                <a:latin typeface="Arial"/>
-                <a:ea typeface="Arial"/>
-                <a:cs typeface="Arial"/>
-              </a:rPr>
-              <a:t xml:space="preserve">Give it observational memory across jobs:</a:t>
+              <a:t xml:space="preserve">strategy I believe in for the next few</a:t>
             </a:r>
             <a:endParaRPr lang="en-US" sz="1500"/>
           </a:p>
@@ -16889,7 +15741,7 @@
                 <a:ea typeface="Arial"/>
                 <a:cs typeface="Arial"/>
               </a:rPr>
-              <a:t xml:space="preserve">what it generated, what actually ran, what</a:t>
+              <a:t xml:space="preserve">years: not one agent holding every</a:t>
             </a:r>
             <a:endParaRPr lang="en-US" sz="1500"/>
           </a:p>
@@ -16912,7 +15764,7 @@
                 <a:ea typeface="Arial"/>
                 <a:cs typeface="Arial"/>
               </a:rPr>
-              <a:t xml:space="preserve">failed, and what the checks established.</a:t>
+              <a:t xml:space="preserve">combination, which nobody can check, but</a:t>
             </a:r>
             <a:endParaRPr lang="en-US" sz="1500"/>
           </a:p>
@@ -16935,7 +15787,7 @@
                 <a:ea typeface="Arial"/>
                 <a:cs typeface="Arial"/>
               </a:rPr>
-              <a:t xml:space="preserve">Now ask it to consult that history before</a:t>
+              <a:t xml:space="preserve">many small ones you can afford to.</a:t>
             </a:r>
             <a:endParaRPr lang="en-US" sz="1500"/>
           </a:p>
@@ -16958,7 +15810,7 @@
                 <a:ea typeface="Arial"/>
                 <a:cs typeface="Arial"/>
               </a:rPr>
-              <a:t xml:space="preserve">it hands you the next answer.</a:t>
+              <a:t xml:space="preserve"/>
             </a:r>
             <a:endParaRPr lang="en-US" sz="1500"/>
           </a:p>
@@ -16981,7 +15833,7 @@
                 <a:ea typeface="Arial"/>
                 <a:cs typeface="Arial"/>
               </a:rPr>
-              <a:t xml:space="preserve"/>
+              <a:t xml:space="preserve">Pick one integration that already costs</a:t>
             </a:r>
             <a:endParaRPr lang="en-US" sz="1500"/>
           </a:p>
@@ -17004,7 +15856,7 @@
                 <a:ea typeface="Arial"/>
                 <a:cs typeface="Arial"/>
               </a:rPr>
-              <a:t xml:space="preserve">Suppose a reporting query keeps forgetting</a:t>
+              <a:t xml:space="preserve">your team mornings. Give it a conjured</a:t>
             </a:r>
             <a:endParaRPr lang="en-US" sz="1500"/>
           </a:p>
@@ -17027,7 +15879,7 @@
                 <a:ea typeface="Arial"/>
                 <a:cs typeface="Arial"/>
               </a:rPr>
-              <a:t xml:space="preserve">the tenant filter. It runs perfectly well;</a:t>
+              <a:t xml:space="preserve">agent with a bounded way to investigate, a</a:t>
             </a:r>
             <a:endParaRPr lang="en-US" sz="1500"/>
           </a:p>
@@ -17050,7 +15902,7 @@
                 <a:ea typeface="Arial"/>
                 <a:cs typeface="Arial"/>
               </a:rPr>
-              <a:t xml:space="preserve">it reports the wrong population. An</a:t>
+              <a:t xml:space="preserve">test it did not write, and a place to</a:t>
             </a:r>
             <a:endParaRPr lang="en-US" sz="1500"/>
           </a:p>
@@ -17073,7 +15925,7 @@
                 <a:ea typeface="Arial"/>
                 <a:cs typeface="Arial"/>
               </a:rPr>
-              <a:t xml:space="preserve">independent preflight check rejects it</a:t>
+              <a:t xml:space="preserve">record what happened. Or start with one</a:t>
             </a:r>
             <a:endParaRPr lang="en-US" sz="1500"/>
           </a:p>
@@ -17096,7 +15948,7 @@
                 <a:ea typeface="Arial"/>
                 <a:cs typeface="Arial"/>
               </a:rPr>
-              <a:t xml:space="preserve">before dispatch. Record the draft, the</a:t>
+              <a:t xml:space="preserve">reporting agent: keep its execution</a:t>
             </a:r>
             <a:endParaRPr lang="en-US" sz="1500"/>
           </a:p>
@@ -17119,7 +15971,7 @@
                 <a:ea typeface="Arial"/>
                 <a:cs typeface="Arial"/>
               </a:rPr>
-              <a:t xml:space="preserve">failed check, the correction and the</a:t>
+              <a:t xml:space="preserve">observations, make it check them before</a:t>
             </a:r>
             <a:endParaRPr lang="en-US" sz="1500"/>
           </a:p>
@@ -17142,7 +15994,7 @@
                 <a:ea typeface="Arial"/>
                 <a:cs typeface="Arial"/>
               </a:rPr>
-              <a:t xml:space="preserve">eventual result. Next time, retrieve that</a:t>
+              <a:t xml:space="preserve">returning work, and measure whether the</a:t>
             </a:r>
             <a:endParaRPr lang="en-US" sz="1500"/>
           </a:p>
@@ -17165,7 +16017,7 @@
                 <a:ea typeface="Arial"/>
                 <a:cs typeface="Arial"/>
               </a:rPr>
-              <a:t xml:space="preserve">pattern while the agent is still drafting.</a:t>
+              <a:t xml:space="preserve">same mistake comes back. That is enough to</a:t>
             </a:r>
             <a:endParaRPr lang="en-US" sz="1500"/>
           </a:p>
@@ -17188,76 +16040,7 @@
                 <a:ea typeface="Arial"/>
                 <a:cs typeface="Arial"/>
               </a:rPr>
-              <a:t xml:space="preserve">Fix the omission before returning the SQL,</a:t>
-            </a:r>
-            <a:endParaRPr lang="en-US" sz="1500"/>
-          </a:p>
-          <a:p>
-            <a:pPr marL="0" indent="0">
-              <a:lnSpc>
-                <a:spcPts val="1950"/>
-              </a:lnSpc>
-              <a:spcAft>
-                <a:spcPts val="0"/>
-              </a:spcAft>
-              <a:buNone/>
-            </a:pPr>
-            <a:r>
-              <a:rPr lang="en-US" sz="1500" b="0">
-                <a:solidFill>
-                  <a:srgbClr val="202B33"/>
-                </a:solidFill>
-                <a:latin typeface="Arial"/>
-                <a:ea typeface="Arial"/>
-                <a:cs typeface="Arial"/>
-              </a:rPr>
-              <a:t xml:space="preserve">then run the check again. That is adaptive</a:t>
-            </a:r>
-            <a:endParaRPr lang="en-US" sz="1500"/>
-          </a:p>
-          <a:p>
-            <a:pPr marL="0" indent="0">
-              <a:lnSpc>
-                <a:spcPts val="1950"/>
-              </a:lnSpc>
-              <a:spcAft>
-                <a:spcPts val="0"/>
-              </a:spcAft>
-              <a:buNone/>
-            </a:pPr>
-            <a:r>
-              <a:rPr lang="en-US" sz="1500" b="0">
-                <a:solidFill>
-                  <a:srgbClr val="202B33"/>
-                </a:solidFill>
-                <a:latin typeface="Arial"/>
-                <a:ea typeface="Arial"/>
-                <a:cs typeface="Arial"/>
-              </a:rPr>
-              <a:t xml:space="preserve">behavior you can build with one agent and a</a:t>
-            </a:r>
-            <a:endParaRPr lang="en-US" sz="1500"/>
-          </a:p>
-          <a:p>
-            <a:pPr marL="0" indent="0">
-              <a:lnSpc>
-                <a:spcPts val="1950"/>
-              </a:lnSpc>
-              <a:spcAft>
-                <a:spcPts val="0"/>
-              </a:spcAft>
-              <a:buNone/>
-            </a:pPr>
-            <a:r>
-              <a:rPr lang="en-US" sz="1500" b="0">
-                <a:solidFill>
-                  <a:srgbClr val="202B33"/>
-                </a:solidFill>
-                <a:latin typeface="Arial"/>
-                <a:ea typeface="Arial"/>
-                <a:cs typeface="Arial"/>
-              </a:rPr>
-              <a:t xml:space="preserve">small log.</a:t>
+              <a:t xml:space="preserve">start.</a:t>
             </a:r>
             <a:endParaRPr lang="en-US" sz="1500"/>
           </a:p>
@@ -17437,7 +16220,7 @@
                 <a:ea typeface="Arial"/>
                 <a:cs typeface="Arial"/>
               </a:rPr>
-              <a:t xml:space="preserve">12 / 13    SOURCE SLIDE 14</a:t>
+              <a:t xml:space="preserve">SOURCE REFERENCES</a:t>
             </a:r>
             <a:endParaRPr lang="en-US" sz="1050"/>
           </a:p>
@@ -17486,7 +16269,7 @@
                 <a:ea typeface="Arial"/>
                 <a:cs typeface="Arial"/>
               </a:rPr>
-              <a:t xml:space="preserve">Start smaller: remember what happened (continued)</a:t>
+              <a:t xml:space="preserve">References</a:t>
             </a:r>
             <a:endParaRPr lang="en-US" sz="2550"/>
           </a:p>
@@ -17535,7 +16318,7 @@
                 <a:ea typeface="Arial"/>
                 <a:cs typeface="Arial"/>
               </a:rPr>
-              <a:t xml:space="preserve">The instruction is simple: before returning</a:t>
+              <a:t xml:space="preserve">Saltzer and Schroeder (1975), The</a:t>
             </a:r>
             <a:endParaRPr lang="en-US" sz="1500"/>
           </a:p>
@@ -17558,7 +16341,7 @@
                 <a:ea typeface="Arial"/>
                 <a:cs typeface="Arial"/>
               </a:rPr>
-              <a:t xml:space="preserve">generated work, retrieve relevant memory</a:t>
+              <a:t xml:space="preserve">Protection of Information in Computer</a:t>
             </a:r>
             <a:endParaRPr lang="en-US" sz="1500"/>
           </a:p>
@@ -17581,7 +16364,7 @@
                 <a:ea typeface="Arial"/>
                 <a:cs typeface="Arial"/>
               </a:rPr>
-              <a:t xml:space="preserve">and correct applicable mistakes; after an</a:t>
+              <a:t xml:space="preserve">Systems —</a:t>
             </a:r>
             <a:endParaRPr lang="en-US" sz="1500"/>
           </a:p>
@@ -17604,7 +16387,7 @@
                 <a:ea typeface="Arial"/>
                 <a:cs typeface="Arial"/>
               </a:rPr>
-              <a:t xml:space="preserve">authorized execution, record the observed</a:t>
+              <a:t xml:space="preserve">https://doi.org/10.1109/PROC.1975.9939),</a:t>
             </a:r>
             <a:endParaRPr lang="en-US" sz="1500"/>
           </a:p>
@@ -17627,7 +16410,30 @@
                 <a:ea typeface="Arial"/>
                 <a:cs typeface="Arial"/>
               </a:rPr>
-              <a:t xml:space="preserve">outcome and update the pattern counts. If</a:t>
+              <a:t xml:space="preserve">Proceedings of the IEEE 63(9), 1278 to</a:t>
+            </a:r>
+            <a:endParaRPr lang="en-US" sz="1500"/>
+          </a:p>
+          <a:p>
+            <a:pPr marL="0" indent="0">
+              <a:lnSpc>
+                <a:spcPts val="1950"/>
+              </a:lnSpc>
+              <a:spcAft>
+                <a:spcPts val="0"/>
+              </a:spcAft>
+              <a:buNone/>
+            </a:pPr>
+            <a:r>
+              <a:rPr lang="en-US" sz="1500" b="0">
+                <a:solidFill>
+                  <a:srgbClr val="202B33"/>
+                </a:solidFill>
+                <a:latin typeface="Arial"/>
+                <a:ea typeface="Arial"/>
+                <a:cs typeface="Arial"/>
+              </a:rPr>
+              <a:t xml:space="preserve">1308. Least privilege is their principle</a:t>
             </a:r>
             <a:endParaRPr lang="en-US" sz="1500"/>
           </a:p>
@@ -17676,7 +16482,7 @@
                 <a:ea typeface="Arial"/>
                 <a:cs typeface="Arial"/>
               </a:rPr>
-              <a:t xml:space="preserve">you cannot check something safely, say what</a:t>
+              <a:t xml:space="preserve">(f.</a:t>
             </a:r>
             <a:endParaRPr lang="en-US" sz="1500"/>
           </a:p>
@@ -17699,7 +16505,7 @@
                 <a:ea typeface="Arial"/>
                 <a:cs typeface="Arial"/>
               </a:rPr>
-              <a:t xml:space="preserve">remains unverified. Remembered output is</a:t>
+              <a:t xml:space="preserve"/>
             </a:r>
             <a:endParaRPr lang="en-US" sz="1500"/>
           </a:p>
@@ -17722,7 +16528,7 @@
                 <a:ea typeface="Arial"/>
                 <a:cs typeface="Arial"/>
               </a:rPr>
-              <a:t xml:space="preserve">untrusted data and grants no new</a:t>
+              <a:t xml:space="preserve">Vaughan (1996), The Challenger Launch</a:t>
             </a:r>
             <a:endParaRPr lang="en-US" sz="1500"/>
           </a:p>
@@ -17745,7 +16551,7 @@
                 <a:ea typeface="Arial"/>
                 <a:cs typeface="Arial"/>
               </a:rPr>
-              <a:t xml:space="preserve">permissions. The copyable prompt and a</a:t>
+              <a:t xml:space="preserve">Decision, University of Chicago Press, on</a:t>
             </a:r>
             <a:endParaRPr lang="en-US" sz="1500"/>
           </a:p>
@@ -17768,7 +16574,7 @@
                 <a:ea typeface="Arial"/>
                 <a:cs typeface="Arial"/>
               </a:rPr>
-              <a:t xml:space="preserve">small record format are in the handout.</a:t>
+              <a:t xml:space="preserve">normalization of deviance.</a:t>
             </a:r>
             <a:endParaRPr lang="en-US" sz="1500"/>
           </a:p>
@@ -17867,1115 +16673,6 @@
                 <a:cs typeface="Arial"/>
               </a:rPr>
               <a:t xml:space="preserve">18</a:t>
-            </a:r>
-            <a:endParaRPr lang="en-US" sz="975"/>
-          </a:p>
-        </p:txBody>
-      </p:sp>
-    </p:spTree>
-  </p:cSld>
-  <p:clrMapOvr>
-    <a:masterClrMapping/>
-  </p:clrMapOvr>
-</p:sld>
-</file>
-
-<file path=ppt/slides/slide19.xml><?xml version="1.0" encoding="utf-8"?>
-<p:sld xmlns:a="http://schemas.openxmlformats.org/drawingml/2006/main" xmlns:r="http://schemas.openxmlformats.org/officeDocument/2006/relationships" xmlns:p="http://schemas.openxmlformats.org/presentationml/2006/main">
-  <p:cSld name="Slide 19">
-    <p:bg>
-      <p:bgPr>
-        <a:solidFill>
-          <a:srgbClr val="FAFAF7"/>
-        </a:solidFill>
-        <a:effectLst/>
-      </p:bgPr>
-    </p:bg>
-    <p:spTree>
-      <p:nvGrpSpPr>
-        <p:cNvPr id="1" name=""/>
-        <p:cNvGrpSpPr/>
-        <p:nvPr/>
-      </p:nvGrpSpPr>
-      <p:grpSpPr>
-        <a:xfrm>
-          <a:off x="0" y="0"/>
-          <a:ext cx="0" cy="0"/>
-          <a:chOff x="0" y="0"/>
-          <a:chExt cx="0" cy="0"/>
-        </a:xfrm>
-      </p:grpSpPr>
-      <p:sp>
-        <p:nvSpPr>
-          <p:cNvPr id="2" name="Text 2"/>
-          <p:cNvSpPr txBox="1"/>
-          <p:nvPr/>
-        </p:nvSpPr>
-        <p:spPr>
-          <a:xfrm>
-            <a:off x="457200" y="266700"/>
-            <a:ext cx="9144000" cy="228600"/>
-          </a:xfrm>
-          <a:prstGeom prst="rect">
-            <a:avLst/>
-          </a:prstGeom>
-          <a:noFill/>
-          <a:ln>
-            <a:noFill/>
-          </a:ln>
-        </p:spPr>
-        <p:txBody>
-          <a:bodyPr wrap="none" lIns="0" tIns="0" rIns="0" bIns="0" anchor="t">
-            <a:noAutofit/>
-          </a:bodyPr>
-          <a:lstStyle/>
-          <a:p>
-            <a:pPr marL="0" indent="0">
-              <a:lnSpc>
-                <a:spcPts val="1365"/>
-              </a:lnSpc>
-              <a:spcAft>
-                <a:spcPts val="0"/>
-              </a:spcAft>
-              <a:buNone/>
-            </a:pPr>
-            <a:r>
-              <a:rPr lang="en-US" sz="1050" b="1">
-                <a:solidFill>
-                  <a:srgbClr val="246957"/>
-                </a:solidFill>
-                <a:latin typeface="Arial"/>
-                <a:ea typeface="Arial"/>
-                <a:cs typeface="Arial"/>
-              </a:rPr>
-              <a:t xml:space="preserve">13 / 13    SOURCE SLIDE 15</a:t>
-            </a:r>
-            <a:endParaRPr lang="en-US" sz="1050"/>
-          </a:p>
-        </p:txBody>
-      </p:sp>
-      <p:sp>
-        <p:nvSpPr>
-          <p:cNvPr id="3" name="Text 3"/>
-          <p:cNvSpPr txBox="1"/>
-          <p:nvPr/>
-        </p:nvSpPr>
-        <p:spPr>
-          <a:xfrm>
-            <a:off x="457200" y="657225"/>
-            <a:ext cx="9144000" cy="1104900"/>
-          </a:xfrm>
-          <a:prstGeom prst="rect">
-            <a:avLst/>
-          </a:prstGeom>
-          <a:noFill/>
-          <a:ln>
-            <a:noFill/>
-          </a:ln>
-        </p:spPr>
-        <p:txBody>
-          <a:bodyPr wrap="none" lIns="0" tIns="0" rIns="0" bIns="0" anchor="t">
-            <a:noAutofit/>
-          </a:bodyPr>
-          <a:lstStyle/>
-          <a:p>
-            <a:pPr marL="0" indent="0">
-              <a:lnSpc>
-                <a:spcPts val="3060"/>
-              </a:lnSpc>
-              <a:spcAft>
-                <a:spcPts val="0"/>
-              </a:spcAft>
-              <a:buNone/>
-            </a:pPr>
-            <a:r>
-              <a:rPr lang="en-US" sz="2550" b="1">
-                <a:solidFill>
-                  <a:srgbClr val="202B33"/>
-                </a:solidFill>
-                <a:latin typeface="Arial"/>
-                <a:ea typeface="Arial"/>
-                <a:cs typeface="Arial"/>
-              </a:rPr>
-              <a:t xml:space="preserve">The next surprise should cost less</a:t>
-            </a:r>
-            <a:endParaRPr lang="en-US" sz="2550"/>
-          </a:p>
-        </p:txBody>
-      </p:sp>
-      <p:sp>
-        <p:nvSpPr>
-          <p:cNvPr id="4" name="Text 4"/>
-          <p:cNvSpPr txBox="1"/>
-          <p:nvPr/>
-        </p:nvSpPr>
-        <p:spPr>
-          <a:xfrm>
-            <a:off x="457200" y="1971675"/>
-            <a:ext cx="4352925" cy="5314950"/>
-          </a:xfrm>
-          <a:prstGeom prst="rect">
-            <a:avLst/>
-          </a:prstGeom>
-          <a:noFill/>
-          <a:ln>
-            <a:noFill/>
-          </a:ln>
-        </p:spPr>
-        <p:txBody>
-          <a:bodyPr wrap="none" lIns="0" tIns="0" rIns="0" bIns="0" anchor="t">
-            <a:noAutofit/>
-          </a:bodyPr>
-          <a:lstStyle/>
-          <a:p>
-            <a:pPr marL="0" indent="0">
-              <a:lnSpc>
-                <a:spcPts val="1950"/>
-              </a:lnSpc>
-              <a:spcAft>
-                <a:spcPts val="0"/>
-              </a:spcAft>
-              <a:buNone/>
-            </a:pPr>
-            <a:r>
-              <a:rPr lang="en-US" sz="1500" b="0">
-                <a:solidFill>
-                  <a:srgbClr val="202B33"/>
-                </a:solidFill>
-                <a:latin typeface="Arial"/>
-                <a:ea typeface="Arial"/>
-                <a:cs typeface="Arial"/>
-              </a:rPr>
-              <a:t xml:space="preserve">Conjure exactly enough</a:t>
-            </a:r>
-            <a:endParaRPr lang="en-US" sz="1500"/>
-          </a:p>
-          <a:p>
-            <a:pPr marL="0" indent="0">
-              <a:lnSpc>
-                <a:spcPts val="1950"/>
-              </a:lnSpc>
-              <a:spcAft>
-                <a:spcPts val="0"/>
-              </a:spcAft>
-              <a:buNone/>
-            </a:pPr>
-            <a:r>
-              <a:rPr lang="en-US" sz="1500" b="0">
-                <a:solidFill>
-                  <a:srgbClr val="202B33"/>
-                </a:solidFill>
-                <a:latin typeface="Arial"/>
-                <a:ea typeface="Arial"/>
-                <a:cs typeface="Arial"/>
-              </a:rPr>
-              <a:t xml:space="preserve"/>
-            </a:r>
-            <a:endParaRPr lang="en-US" sz="1500"/>
-          </a:p>
-          <a:p>
-            <a:pPr marL="0" indent="0">
-              <a:lnSpc>
-                <a:spcPts val="1950"/>
-              </a:lnSpc>
-              <a:spcAft>
-                <a:spcPts val="0"/>
-              </a:spcAft>
-              <a:buNone/>
-            </a:pPr>
-            <a:r>
-              <a:rPr lang="en-US" sz="1500" b="0">
-                <a:solidFill>
-                  <a:srgbClr val="202B33"/>
-                </a:solidFill>
-                <a:latin typeface="Arial"/>
-                <a:ea typeface="Arial"/>
-                <a:cs typeface="Arial"/>
-              </a:rPr>
-              <a:t xml:space="preserve">Prove the repair</a:t>
-            </a:r>
-            <a:endParaRPr lang="en-US" sz="1500"/>
-          </a:p>
-          <a:p>
-            <a:pPr marL="0" indent="0">
-              <a:lnSpc>
-                <a:spcPts val="1950"/>
-              </a:lnSpc>
-              <a:spcAft>
-                <a:spcPts val="0"/>
-              </a:spcAft>
-              <a:buNone/>
-            </a:pPr>
-            <a:r>
-              <a:rPr lang="en-US" sz="1500" b="0">
-                <a:solidFill>
-                  <a:srgbClr val="202B33"/>
-                </a:solidFill>
-                <a:latin typeface="Arial"/>
-                <a:ea typeface="Arial"/>
-                <a:cs typeface="Arial"/>
-              </a:rPr>
-              <a:t xml:space="preserve"/>
-            </a:r>
-            <a:endParaRPr lang="en-US" sz="1500"/>
-          </a:p>
-          <a:p>
-            <a:pPr marL="0" indent="0">
-              <a:lnSpc>
-                <a:spcPts val="1950"/>
-              </a:lnSpc>
-              <a:spcAft>
-                <a:spcPts val="0"/>
-              </a:spcAft>
-              <a:buNone/>
-            </a:pPr>
-            <a:r>
-              <a:rPr lang="en-US" sz="1500" b="0">
-                <a:solidFill>
-                  <a:srgbClr val="202B33"/>
-                </a:solidFill>
-                <a:latin typeface="Arial"/>
-                <a:ea typeface="Arial"/>
-                <a:cs typeface="Arial"/>
-              </a:rPr>
-              <a:t xml:space="preserve">Remember the known case</a:t>
-            </a:r>
-            <a:endParaRPr lang="en-US" sz="1500"/>
-          </a:p>
-          <a:p>
-            <a:pPr marL="0" indent="0">
-              <a:lnSpc>
-                <a:spcPts val="1950"/>
-              </a:lnSpc>
-              <a:spcAft>
-                <a:spcPts val="0"/>
-              </a:spcAft>
-              <a:buNone/>
-            </a:pPr>
-            <a:r>
-              <a:rPr lang="en-US" sz="1500" b="0">
-                <a:solidFill>
-                  <a:srgbClr val="202B33"/>
-                </a:solidFill>
-                <a:latin typeface="Arial"/>
-                <a:ea typeface="Arial"/>
-                <a:cs typeface="Arial"/>
-              </a:rPr>
-              <a:t xml:space="preserve"/>
-            </a:r>
-            <a:endParaRPr lang="en-US" sz="1500"/>
-          </a:p>
-          <a:p>
-            <a:pPr marL="0" indent="0">
-              <a:lnSpc>
-                <a:spcPts val="1950"/>
-              </a:lnSpc>
-              <a:spcAft>
-                <a:spcPts val="0"/>
-              </a:spcAft>
-              <a:buNone/>
-            </a:pPr>
-            <a:r>
-              <a:rPr lang="en-US" sz="1500" b="0">
-                <a:solidFill>
-                  <a:srgbClr val="202B33"/>
-                </a:solidFill>
-                <a:latin typeface="Arial"/>
-                <a:ea typeface="Arial"/>
-                <a:cs typeface="Arial"/>
-              </a:rPr>
-              <a:t xml:space="preserve">Return to the field that changed overnight.</a:t>
-            </a:r>
-            <a:endParaRPr lang="en-US" sz="1500"/>
-          </a:p>
-          <a:p>
-            <a:pPr marL="0" indent="0">
-              <a:lnSpc>
-                <a:spcPts val="1950"/>
-              </a:lnSpc>
-              <a:spcAft>
-                <a:spcPts val="0"/>
-              </a:spcAft>
-              <a:buNone/>
-            </a:pPr>
-            <a:r>
-              <a:rPr lang="en-US" sz="1500" b="0">
-                <a:solidFill>
-                  <a:srgbClr val="202B33"/>
-                </a:solidFill>
-                <a:latin typeface="Arial"/>
-                <a:ea typeface="Arial"/>
-                <a:cs typeface="Arial"/>
-              </a:rPr>
-              <a:t xml:space="preserve">We did not predict its spelling. We did</a:t>
-            </a:r>
-            <a:endParaRPr lang="en-US" sz="1500"/>
-          </a:p>
-          <a:p>
-            <a:pPr marL="0" indent="0">
-              <a:lnSpc>
-                <a:spcPts val="1950"/>
-              </a:lnSpc>
-              <a:spcAft>
-                <a:spcPts val="0"/>
-              </a:spcAft>
-              <a:buNone/>
-            </a:pPr>
-            <a:r>
-              <a:rPr lang="en-US" sz="1500" b="0">
-                <a:solidFill>
-                  <a:srgbClr val="202B33"/>
-                </a:solidFill>
-                <a:latin typeface="Arial"/>
-                <a:ea typeface="Arial"/>
-                <a:cs typeface="Arial"/>
-              </a:rPr>
-              <a:t xml:space="preserve">define what had to stay true, what evidence</a:t>
-            </a:r>
-            <a:endParaRPr lang="en-US" sz="1500"/>
-          </a:p>
-          <a:p>
-            <a:pPr marL="0" indent="0">
-              <a:lnSpc>
-                <a:spcPts val="1950"/>
-              </a:lnSpc>
-              <a:spcAft>
-                <a:spcPts val="0"/>
-              </a:spcAft>
-              <a:buNone/>
-            </a:pPr>
-            <a:r>
-              <a:rPr lang="en-US" sz="1500" b="0">
-                <a:solidFill>
-                  <a:srgbClr val="202B33"/>
-                </a:solidFill>
-                <a:latin typeface="Arial"/>
-                <a:ea typeface="Arial"/>
-                <a:cs typeface="Arial"/>
-              </a:rPr>
-              <a:t xml:space="preserve">a repair needed, which tools this one job</a:t>
-            </a:r>
-            <a:endParaRPr lang="en-US" sz="1500"/>
-          </a:p>
-          <a:p>
-            <a:pPr marL="0" indent="0">
-              <a:lnSpc>
-                <a:spcPts val="1950"/>
-              </a:lnSpc>
-              <a:spcAft>
-                <a:spcPts val="0"/>
-              </a:spcAft>
-              <a:buNone/>
-            </a:pPr>
-            <a:r>
-              <a:rPr lang="en-US" sz="1500" b="0">
-                <a:solidFill>
-                  <a:srgbClr val="202B33"/>
-                </a:solidFill>
-                <a:latin typeface="Arial"/>
-                <a:ea typeface="Arial"/>
-                <a:cs typeface="Arial"/>
-              </a:rPr>
-              <a:t xml:space="preserve">could have, and how far the app could go</a:t>
-            </a:r>
-            <a:endParaRPr lang="en-US" sz="1500"/>
-          </a:p>
-          <a:p>
-            <a:pPr marL="0" indent="0">
-              <a:lnSpc>
-                <a:spcPts val="1950"/>
-              </a:lnSpc>
-              <a:spcAft>
-                <a:spcPts val="0"/>
-              </a:spcAft>
-              <a:buNone/>
-            </a:pPr>
-            <a:r>
-              <a:rPr lang="en-US" sz="1500" b="0">
-                <a:solidFill>
-                  <a:srgbClr val="202B33"/>
-                </a:solidFill>
-                <a:latin typeface="Arial"/>
-                <a:ea typeface="Arial"/>
-                <a:cs typeface="Arial"/>
-              </a:rPr>
-              <a:t xml:space="preserve">without us.</a:t>
-            </a:r>
-            <a:endParaRPr lang="en-US" sz="1500"/>
-          </a:p>
-          <a:p>
-            <a:pPr marL="0" indent="0">
-              <a:lnSpc>
-                <a:spcPts val="1950"/>
-              </a:lnSpc>
-              <a:spcAft>
-                <a:spcPts val="0"/>
-              </a:spcAft>
-              <a:buNone/>
-            </a:pPr>
-            <a:r>
-              <a:rPr lang="en-US" sz="1500" b="0">
-                <a:solidFill>
-                  <a:srgbClr val="202B33"/>
-                </a:solidFill>
-                <a:latin typeface="Arial"/>
-                <a:ea typeface="Arial"/>
-                <a:cs typeface="Arial"/>
-              </a:rPr>
-              <a:t xml:space="preserve"/>
-            </a:r>
-            <a:endParaRPr lang="en-US" sz="1500"/>
-          </a:p>
-          <a:p>
-            <a:pPr marL="0" indent="0">
-              <a:lnSpc>
-                <a:spcPts val="1950"/>
-              </a:lnSpc>
-              <a:spcAft>
-                <a:spcPts val="0"/>
-              </a:spcAft>
-              <a:buNone/>
-            </a:pPr>
-            <a:r>
-              <a:rPr lang="en-US" sz="1500" b="0">
-                <a:solidFill>
-                  <a:srgbClr val="202B33"/>
-                </a:solidFill>
-                <a:latin typeface="Arial"/>
-                <a:ea typeface="Arial"/>
-                <a:cs typeface="Arial"/>
-              </a:rPr>
-              <a:t xml:space="preserve">And return to the assistant with</a:t>
-            </a:r>
-            <a:endParaRPr lang="en-US" sz="1500"/>
-          </a:p>
-          <a:p>
-            <a:pPr marL="0" indent="0">
-              <a:lnSpc>
-                <a:spcPts val="1950"/>
-              </a:lnSpc>
-              <a:spcAft>
-                <a:spcPts val="0"/>
-              </a:spcAft>
-              <a:buNone/>
-            </a:pPr>
-            <a:r>
-              <a:rPr lang="en-US" sz="1500" b="0">
-                <a:solidFill>
-                  <a:srgbClr val="202B33"/>
-                </a:solidFill>
-                <a:latin typeface="Arial"/>
-                <a:ea typeface="Arial"/>
-                <a:cs typeface="Arial"/>
-              </a:rPr>
-              <a:t xml:space="preserve">everything. It is still coming; nothing on</a:t>
-            </a:r>
-            <a:endParaRPr lang="en-US" sz="1500"/>
-          </a:p>
-          <a:p>
-            <a:pPr marL="0" indent="0">
-              <a:lnSpc>
-                <a:spcPts val="1950"/>
-              </a:lnSpc>
-              <a:spcAft>
-                <a:spcPts val="0"/>
-              </a:spcAft>
-              <a:buNone/>
-            </a:pPr>
-            <a:r>
-              <a:rPr lang="en-US" sz="1500" b="0">
-                <a:solidFill>
-                  <a:srgbClr val="202B33"/>
-                </a:solidFill>
-                <a:latin typeface="Arial"/>
-                <a:ea typeface="Arial"/>
-                <a:cs typeface="Arial"/>
-              </a:rPr>
-              <a:t xml:space="preserve">these slides stops it, and I would not want</a:t>
-            </a:r>
-            <a:endParaRPr lang="en-US" sz="1500"/>
-          </a:p>
-          <a:p>
-            <a:pPr marL="0" indent="0">
-              <a:lnSpc>
-                <a:spcPts val="1950"/>
-              </a:lnSpc>
-              <a:spcAft>
-                <a:spcPts val="0"/>
-              </a:spcAft>
-              <a:buNone/>
-            </a:pPr>
-            <a:r>
-              <a:rPr lang="en-US" sz="1500" b="0">
-                <a:solidFill>
-                  <a:srgbClr val="202B33"/>
-                </a:solidFill>
-                <a:latin typeface="Arial"/>
-                <a:ea typeface="Arial"/>
-                <a:cs typeface="Arial"/>
-              </a:rPr>
-              <a:t xml:space="preserve">to. What changed is how many of its</a:t>
-            </a:r>
-            <a:endParaRPr lang="en-US" sz="1500"/>
-          </a:p>
-          <a:p>
-            <a:pPr marL="0" indent="0">
-              <a:lnSpc>
-                <a:spcPts val="1950"/>
-              </a:lnSpc>
-              <a:spcAft>
-                <a:spcPts val="0"/>
-              </a:spcAft>
-              <a:buNone/>
-            </a:pPr>
-            <a:r>
-              <a:rPr lang="en-US" sz="1500" b="0">
-                <a:solidFill>
-                  <a:srgbClr val="202B33"/>
-                </a:solidFill>
-                <a:latin typeface="Arial"/>
-                <a:ea typeface="Arial"/>
-                <a:cs typeface="Arial"/>
-              </a:rPr>
-              <a:t xml:space="preserve">pathways are live at once. Each job gets a</a:t>
-            </a:r>
-            <a:endParaRPr lang="en-US" sz="1500"/>
-          </a:p>
-        </p:txBody>
-      </p:sp>
-      <p:sp>
-        <p:nvSpPr>
-          <p:cNvPr id="5" name="Text 5"/>
-          <p:cNvSpPr txBox="1"/>
-          <p:nvPr/>
-        </p:nvSpPr>
-        <p:spPr>
-          <a:xfrm>
-            <a:off x="5238750" y="1971675"/>
-            <a:ext cx="4362450" cy="5314950"/>
-          </a:xfrm>
-          <a:prstGeom prst="rect">
-            <a:avLst/>
-          </a:prstGeom>
-          <a:noFill/>
-          <a:ln>
-            <a:noFill/>
-          </a:ln>
-        </p:spPr>
-        <p:txBody>
-          <a:bodyPr wrap="none" lIns="0" tIns="0" rIns="0" bIns="0" anchor="t">
-            <a:noAutofit/>
-          </a:bodyPr>
-          <a:lstStyle/>
-          <a:p>
-            <a:pPr marL="0" indent="0">
-              <a:lnSpc>
-                <a:spcPts val="1950"/>
-              </a:lnSpc>
-              <a:spcAft>
-                <a:spcPts val="0"/>
-              </a:spcAft>
-              <a:buNone/>
-            </a:pPr>
-            <a:r>
-              <a:rPr lang="en-US" sz="1500" b="0">
-                <a:solidFill>
-                  <a:srgbClr val="202B33"/>
-                </a:solidFill>
-                <a:latin typeface="Arial"/>
-                <a:ea typeface="Arial"/>
-                <a:cs typeface="Arial"/>
-              </a:rPr>
-              <a:t xml:space="preserve">small agent with a tailored prompt, a short</a:t>
-            </a:r>
-            <a:endParaRPr lang="en-US" sz="1500"/>
-          </a:p>
-          <a:p>
-            <a:pPr marL="0" indent="0">
-              <a:lnSpc>
-                <a:spcPts val="1950"/>
-              </a:lnSpc>
-              <a:spcAft>
-                <a:spcPts val="0"/>
-              </a:spcAft>
-              <a:buNone/>
-            </a:pPr>
-            <a:r>
-              <a:rPr lang="en-US" sz="1500" b="0">
-                <a:solidFill>
-                  <a:srgbClr val="202B33"/>
-                </a:solidFill>
-                <a:latin typeface="Arial"/>
-                <a:ea typeface="Arial"/>
-                <a:cs typeface="Arial"/>
-              </a:rPr>
-              <a:t xml:space="preserve">tool list, a hard budget, and a log of</a:t>
-            </a:r>
-            <a:endParaRPr lang="en-US" sz="1500"/>
-          </a:p>
-          <a:p>
-            <a:pPr marL="0" indent="0">
-              <a:lnSpc>
-                <a:spcPts val="1950"/>
-              </a:lnSpc>
-              <a:spcAft>
-                <a:spcPts val="0"/>
-              </a:spcAft>
-              <a:buNone/>
-            </a:pPr>
-            <a:r>
-              <a:rPr lang="en-US" sz="1500" b="0">
-                <a:solidFill>
-                  <a:srgbClr val="202B33"/>
-                </a:solidFill>
-                <a:latin typeface="Arial"/>
-                <a:ea typeface="Arial"/>
-                <a:cs typeface="Arial"/>
-              </a:rPr>
-              <a:t xml:space="preserve">every time it asked for more. That is the</a:t>
-            </a:r>
-            <a:endParaRPr lang="en-US" sz="1500"/>
-          </a:p>
-          <a:p>
-            <a:pPr marL="0" indent="0">
-              <a:lnSpc>
-                <a:spcPts val="1950"/>
-              </a:lnSpc>
-              <a:spcAft>
-                <a:spcPts val="0"/>
-              </a:spcAft>
-              <a:buNone/>
-            </a:pPr>
-            <a:r>
-              <a:rPr lang="en-US" sz="1500" b="0">
-                <a:solidFill>
-                  <a:srgbClr val="202B33"/>
-                </a:solidFill>
-                <a:latin typeface="Arial"/>
-                <a:ea typeface="Arial"/>
-                <a:cs typeface="Arial"/>
-              </a:rPr>
-              <a:t xml:space="preserve">strategy I believe in for the next few</a:t>
-            </a:r>
-            <a:endParaRPr lang="en-US" sz="1500"/>
-          </a:p>
-          <a:p>
-            <a:pPr marL="0" indent="0">
-              <a:lnSpc>
-                <a:spcPts val="1950"/>
-              </a:lnSpc>
-              <a:spcAft>
-                <a:spcPts val="0"/>
-              </a:spcAft>
-              <a:buNone/>
-            </a:pPr>
-            <a:r>
-              <a:rPr lang="en-US" sz="1500" b="0">
-                <a:solidFill>
-                  <a:srgbClr val="202B33"/>
-                </a:solidFill>
-                <a:latin typeface="Arial"/>
-                <a:ea typeface="Arial"/>
-                <a:cs typeface="Arial"/>
-              </a:rPr>
-              <a:t xml:space="preserve">years: not one agent holding every</a:t>
-            </a:r>
-            <a:endParaRPr lang="en-US" sz="1500"/>
-          </a:p>
-          <a:p>
-            <a:pPr marL="0" indent="0">
-              <a:lnSpc>
-                <a:spcPts val="1950"/>
-              </a:lnSpc>
-              <a:spcAft>
-                <a:spcPts val="0"/>
-              </a:spcAft>
-              <a:buNone/>
-            </a:pPr>
-            <a:r>
-              <a:rPr lang="en-US" sz="1500" b="0">
-                <a:solidFill>
-                  <a:srgbClr val="202B33"/>
-                </a:solidFill>
-                <a:latin typeface="Arial"/>
-                <a:ea typeface="Arial"/>
-                <a:cs typeface="Arial"/>
-              </a:rPr>
-              <a:t xml:space="preserve">combination, which nobody can check, but</a:t>
-            </a:r>
-            <a:endParaRPr lang="en-US" sz="1500"/>
-          </a:p>
-          <a:p>
-            <a:pPr marL="0" indent="0">
-              <a:lnSpc>
-                <a:spcPts val="1950"/>
-              </a:lnSpc>
-              <a:spcAft>
-                <a:spcPts val="0"/>
-              </a:spcAft>
-              <a:buNone/>
-            </a:pPr>
-            <a:r>
-              <a:rPr lang="en-US" sz="1500" b="0">
-                <a:solidFill>
-                  <a:srgbClr val="202B33"/>
-                </a:solidFill>
-                <a:latin typeface="Arial"/>
-                <a:ea typeface="Arial"/>
-                <a:cs typeface="Arial"/>
-              </a:rPr>
-              <a:t xml:space="preserve">many small ones you can afford to.</a:t>
-            </a:r>
-            <a:endParaRPr lang="en-US" sz="1500"/>
-          </a:p>
-          <a:p>
-            <a:pPr marL="0" indent="0">
-              <a:lnSpc>
-                <a:spcPts val="1950"/>
-              </a:lnSpc>
-              <a:spcAft>
-                <a:spcPts val="0"/>
-              </a:spcAft>
-              <a:buNone/>
-            </a:pPr>
-            <a:r>
-              <a:rPr lang="en-US" sz="1500" b="0">
-                <a:solidFill>
-                  <a:srgbClr val="202B33"/>
-                </a:solidFill>
-                <a:latin typeface="Arial"/>
-                <a:ea typeface="Arial"/>
-                <a:cs typeface="Arial"/>
-              </a:rPr>
-              <a:t xml:space="preserve"/>
-            </a:r>
-            <a:endParaRPr lang="en-US" sz="1500"/>
-          </a:p>
-          <a:p>
-            <a:pPr marL="0" indent="0">
-              <a:lnSpc>
-                <a:spcPts val="1950"/>
-              </a:lnSpc>
-              <a:spcAft>
-                <a:spcPts val="0"/>
-              </a:spcAft>
-              <a:buNone/>
-            </a:pPr>
-            <a:r>
-              <a:rPr lang="en-US" sz="1500" b="0">
-                <a:solidFill>
-                  <a:srgbClr val="202B33"/>
-                </a:solidFill>
-                <a:latin typeface="Arial"/>
-                <a:ea typeface="Arial"/>
-                <a:cs typeface="Arial"/>
-              </a:rPr>
-              <a:t xml:space="preserve">Pick one integration that already costs</a:t>
-            </a:r>
-            <a:endParaRPr lang="en-US" sz="1500"/>
-          </a:p>
-          <a:p>
-            <a:pPr marL="0" indent="0">
-              <a:lnSpc>
-                <a:spcPts val="1950"/>
-              </a:lnSpc>
-              <a:spcAft>
-                <a:spcPts val="0"/>
-              </a:spcAft>
-              <a:buNone/>
-            </a:pPr>
-            <a:r>
-              <a:rPr lang="en-US" sz="1500" b="0">
-                <a:solidFill>
-                  <a:srgbClr val="202B33"/>
-                </a:solidFill>
-                <a:latin typeface="Arial"/>
-                <a:ea typeface="Arial"/>
-                <a:cs typeface="Arial"/>
-              </a:rPr>
-              <a:t xml:space="preserve">your team mornings. Give it a conjured</a:t>
-            </a:r>
-            <a:endParaRPr lang="en-US" sz="1500"/>
-          </a:p>
-          <a:p>
-            <a:pPr marL="0" indent="0">
-              <a:lnSpc>
-                <a:spcPts val="1950"/>
-              </a:lnSpc>
-              <a:spcAft>
-                <a:spcPts val="0"/>
-              </a:spcAft>
-              <a:buNone/>
-            </a:pPr>
-            <a:r>
-              <a:rPr lang="en-US" sz="1500" b="0">
-                <a:solidFill>
-                  <a:srgbClr val="202B33"/>
-                </a:solidFill>
-                <a:latin typeface="Arial"/>
-                <a:ea typeface="Arial"/>
-                <a:cs typeface="Arial"/>
-              </a:rPr>
-              <a:t xml:space="preserve">agent with a bounded way to investigate, a</a:t>
-            </a:r>
-            <a:endParaRPr lang="en-US" sz="1500"/>
-          </a:p>
-          <a:p>
-            <a:pPr marL="0" indent="0">
-              <a:lnSpc>
-                <a:spcPts val="1950"/>
-              </a:lnSpc>
-              <a:spcAft>
-                <a:spcPts val="0"/>
-              </a:spcAft>
-              <a:buNone/>
-            </a:pPr>
-            <a:r>
-              <a:rPr lang="en-US" sz="1500" b="0">
-                <a:solidFill>
-                  <a:srgbClr val="202B33"/>
-                </a:solidFill>
-                <a:latin typeface="Arial"/>
-                <a:ea typeface="Arial"/>
-                <a:cs typeface="Arial"/>
-              </a:rPr>
-              <a:t xml:space="preserve">test it did not write, and a place to</a:t>
-            </a:r>
-            <a:endParaRPr lang="en-US" sz="1500"/>
-          </a:p>
-          <a:p>
-            <a:pPr marL="0" indent="0">
-              <a:lnSpc>
-                <a:spcPts val="1950"/>
-              </a:lnSpc>
-              <a:spcAft>
-                <a:spcPts val="0"/>
-              </a:spcAft>
-              <a:buNone/>
-            </a:pPr>
-            <a:r>
-              <a:rPr lang="en-US" sz="1500" b="0">
-                <a:solidFill>
-                  <a:srgbClr val="202B33"/>
-                </a:solidFill>
-                <a:latin typeface="Arial"/>
-                <a:ea typeface="Arial"/>
-                <a:cs typeface="Arial"/>
-              </a:rPr>
-              <a:t xml:space="preserve">record what happened. Or start with one</a:t>
-            </a:r>
-            <a:endParaRPr lang="en-US" sz="1500"/>
-          </a:p>
-          <a:p>
-            <a:pPr marL="0" indent="0">
-              <a:lnSpc>
-                <a:spcPts val="1950"/>
-              </a:lnSpc>
-              <a:spcAft>
-                <a:spcPts val="0"/>
-              </a:spcAft>
-              <a:buNone/>
-            </a:pPr>
-            <a:r>
-              <a:rPr lang="en-US" sz="1500" b="0">
-                <a:solidFill>
-                  <a:srgbClr val="202B33"/>
-                </a:solidFill>
-                <a:latin typeface="Arial"/>
-                <a:ea typeface="Arial"/>
-                <a:cs typeface="Arial"/>
-              </a:rPr>
-              <a:t xml:space="preserve">reporting agent: keep its execution</a:t>
-            </a:r>
-            <a:endParaRPr lang="en-US" sz="1500"/>
-          </a:p>
-          <a:p>
-            <a:pPr marL="0" indent="0">
-              <a:lnSpc>
-                <a:spcPts val="1950"/>
-              </a:lnSpc>
-              <a:spcAft>
-                <a:spcPts val="0"/>
-              </a:spcAft>
-              <a:buNone/>
-            </a:pPr>
-            <a:r>
-              <a:rPr lang="en-US" sz="1500" b="0">
-                <a:solidFill>
-                  <a:srgbClr val="202B33"/>
-                </a:solidFill>
-                <a:latin typeface="Arial"/>
-                <a:ea typeface="Arial"/>
-                <a:cs typeface="Arial"/>
-              </a:rPr>
-              <a:t xml:space="preserve">observations, make it check them before</a:t>
-            </a:r>
-            <a:endParaRPr lang="en-US" sz="1500"/>
-          </a:p>
-          <a:p>
-            <a:pPr marL="0" indent="0">
-              <a:lnSpc>
-                <a:spcPts val="1950"/>
-              </a:lnSpc>
-              <a:spcAft>
-                <a:spcPts val="0"/>
-              </a:spcAft>
-              <a:buNone/>
-            </a:pPr>
-            <a:r>
-              <a:rPr lang="en-US" sz="1500" b="0">
-                <a:solidFill>
-                  <a:srgbClr val="202B33"/>
-                </a:solidFill>
-                <a:latin typeface="Arial"/>
-                <a:ea typeface="Arial"/>
-                <a:cs typeface="Arial"/>
-              </a:rPr>
-              <a:t xml:space="preserve">returning work, and measure whether the</a:t>
-            </a:r>
-            <a:endParaRPr lang="en-US" sz="1500"/>
-          </a:p>
-          <a:p>
-            <a:pPr marL="0" indent="0">
-              <a:lnSpc>
-                <a:spcPts val="1950"/>
-              </a:lnSpc>
-              <a:spcAft>
-                <a:spcPts val="0"/>
-              </a:spcAft>
-              <a:buNone/>
-            </a:pPr>
-            <a:r>
-              <a:rPr lang="en-US" sz="1500" b="0">
-                <a:solidFill>
-                  <a:srgbClr val="202B33"/>
-                </a:solidFill>
-                <a:latin typeface="Arial"/>
-                <a:ea typeface="Arial"/>
-                <a:cs typeface="Arial"/>
-              </a:rPr>
-              <a:t xml:space="preserve">same mistake comes back. That is enough to</a:t>
-            </a:r>
-            <a:endParaRPr lang="en-US" sz="1500"/>
-          </a:p>
-          <a:p>
-            <a:pPr marL="0" indent="0">
-              <a:lnSpc>
-                <a:spcPts val="1950"/>
-              </a:lnSpc>
-              <a:spcAft>
-                <a:spcPts val="0"/>
-              </a:spcAft>
-              <a:buNone/>
-            </a:pPr>
-            <a:r>
-              <a:rPr lang="en-US" sz="1500" b="0">
-                <a:solidFill>
-                  <a:srgbClr val="202B33"/>
-                </a:solidFill>
-                <a:latin typeface="Arial"/>
-                <a:ea typeface="Arial"/>
-                <a:cs typeface="Arial"/>
-              </a:rPr>
-              <a:t xml:space="preserve">start.</a:t>
-            </a:r>
-            <a:endParaRPr lang="en-US" sz="1500"/>
-          </a:p>
-        </p:txBody>
-      </p:sp>
-      <p:sp>
-        <p:nvSpPr>
-          <p:cNvPr id="6" name="Text 6"/>
-          <p:cNvSpPr txBox="1"/>
-          <p:nvPr/>
-        </p:nvSpPr>
-        <p:spPr>
-          <a:xfrm>
-            <a:off x="457200" y="7486650"/>
-            <a:ext cx="8820150" cy="190500"/>
-          </a:xfrm>
-          <a:prstGeom prst="rect">
-            <a:avLst/>
-          </a:prstGeom>
-          <a:noFill/>
-          <a:ln>
-            <a:noFill/>
-          </a:ln>
-        </p:spPr>
-        <p:txBody>
-          <a:bodyPr wrap="none" lIns="0" tIns="0" rIns="0" bIns="0" anchor="t">
-            <a:noAutofit/>
-          </a:bodyPr>
-          <a:lstStyle/>
-          <a:p>
-            <a:pPr marL="0" indent="0">
-              <a:lnSpc>
-                <a:spcPts val="1268"/>
-              </a:lnSpc>
-              <a:spcAft>
-                <a:spcPts val="0"/>
-              </a:spcAft>
-              <a:buNone/>
-            </a:pPr>
-            <a:r>
-              <a:rPr lang="en-US" sz="975" b="0">
-                <a:solidFill>
-                  <a:srgbClr val="48555B"/>
-                </a:solidFill>
-                <a:latin typeface="Arial"/>
-                <a:ea typeface="Arial"/>
-                <a:cs typeface="Arial"/>
-              </a:rPr>
-              <a:t xml:space="preserve">Adaptive, agentic apps</a:t>
-            </a:r>
-            <a:endParaRPr lang="en-US" sz="975"/>
-          </a:p>
-        </p:txBody>
-      </p:sp>
-      <p:sp>
-        <p:nvSpPr>
-          <p:cNvPr id="7" name="Text 7"/>
-          <p:cNvSpPr txBox="1"/>
-          <p:nvPr/>
-        </p:nvSpPr>
-        <p:spPr>
-          <a:xfrm>
-            <a:off x="9391650" y="7486650"/>
-            <a:ext cx="238125" cy="190500"/>
-          </a:xfrm>
-          <a:prstGeom prst="rect">
-            <a:avLst/>
-          </a:prstGeom>
-          <a:noFill/>
-          <a:ln>
-            <a:noFill/>
-          </a:ln>
-        </p:spPr>
-        <p:txBody>
-          <a:bodyPr wrap="none" lIns="0" tIns="0" rIns="0" bIns="0" anchor="t">
-            <a:noAutofit/>
-          </a:bodyPr>
-          <a:lstStyle/>
-          <a:p>
-            <a:pPr marL="0" indent="0">
-              <a:lnSpc>
-                <a:spcPts val="1268"/>
-              </a:lnSpc>
-              <a:spcAft>
-                <a:spcPts val="0"/>
-              </a:spcAft>
-              <a:buNone/>
-            </a:pPr>
-            <a:r>
-              <a:rPr lang="en-US" sz="975" b="0">
-                <a:solidFill>
-                  <a:srgbClr val="48555B"/>
-                </a:solidFill>
-                <a:latin typeface="Arial"/>
-                <a:ea typeface="Arial"/>
-                <a:cs typeface="Arial"/>
-              </a:rPr>
-              <a:t xml:space="preserve">19</a:t>
             </a:r>
             <a:endParaRPr lang="en-US" sz="975"/>
           </a:p>
@@ -19877,540 +17574,6 @@
 </p:sld>
 </file>
 
-<file path=ppt/slides/slide20.xml><?xml version="1.0" encoding="utf-8"?>
-<p:sld xmlns:a="http://schemas.openxmlformats.org/drawingml/2006/main" xmlns:r="http://schemas.openxmlformats.org/officeDocument/2006/relationships" xmlns:p="http://schemas.openxmlformats.org/presentationml/2006/main">
-  <p:cSld name="Slide 20">
-    <p:bg>
-      <p:bgPr>
-        <a:solidFill>
-          <a:srgbClr val="FAFAF7"/>
-        </a:solidFill>
-        <a:effectLst/>
-      </p:bgPr>
-    </p:bg>
-    <p:spTree>
-      <p:nvGrpSpPr>
-        <p:cNvPr id="1" name=""/>
-        <p:cNvGrpSpPr/>
-        <p:nvPr/>
-      </p:nvGrpSpPr>
-      <p:grpSpPr>
-        <a:xfrm>
-          <a:off x="0" y="0"/>
-          <a:ext cx="0" cy="0"/>
-          <a:chOff x="0" y="0"/>
-          <a:chExt cx="0" cy="0"/>
-        </a:xfrm>
-      </p:grpSpPr>
-      <p:sp>
-        <p:nvSpPr>
-          <p:cNvPr id="2" name="Text 2"/>
-          <p:cNvSpPr txBox="1"/>
-          <p:nvPr/>
-        </p:nvSpPr>
-        <p:spPr>
-          <a:xfrm>
-            <a:off x="457200" y="266700"/>
-            <a:ext cx="9144000" cy="228600"/>
-          </a:xfrm>
-          <a:prstGeom prst="rect">
-            <a:avLst/>
-          </a:prstGeom>
-          <a:noFill/>
-          <a:ln>
-            <a:noFill/>
-          </a:ln>
-        </p:spPr>
-        <p:txBody>
-          <a:bodyPr wrap="none" lIns="0" tIns="0" rIns="0" bIns="0" anchor="t">
-            <a:noAutofit/>
-          </a:bodyPr>
-          <a:lstStyle/>
-          <a:p>
-            <a:pPr marL="0" indent="0">
-              <a:lnSpc>
-                <a:spcPts val="1365"/>
-              </a:lnSpc>
-              <a:spcAft>
-                <a:spcPts val="0"/>
-              </a:spcAft>
-              <a:buNone/>
-            </a:pPr>
-            <a:r>
-              <a:rPr lang="en-US" sz="1050" b="1">
-                <a:solidFill>
-                  <a:srgbClr val="246957"/>
-                </a:solidFill>
-                <a:latin typeface="Arial"/>
-                <a:ea typeface="Arial"/>
-                <a:cs typeface="Arial"/>
-              </a:rPr>
-              <a:t xml:space="preserve">SOURCE REFERENCES</a:t>
-            </a:r>
-            <a:endParaRPr lang="en-US" sz="1050"/>
-          </a:p>
-        </p:txBody>
-      </p:sp>
-      <p:sp>
-        <p:nvSpPr>
-          <p:cNvPr id="3" name="Text 3"/>
-          <p:cNvSpPr txBox="1"/>
-          <p:nvPr/>
-        </p:nvSpPr>
-        <p:spPr>
-          <a:xfrm>
-            <a:off x="457200" y="657225"/>
-            <a:ext cx="9144000" cy="1104900"/>
-          </a:xfrm>
-          <a:prstGeom prst="rect">
-            <a:avLst/>
-          </a:prstGeom>
-          <a:noFill/>
-          <a:ln>
-            <a:noFill/>
-          </a:ln>
-        </p:spPr>
-        <p:txBody>
-          <a:bodyPr wrap="none" lIns="0" tIns="0" rIns="0" bIns="0" anchor="t">
-            <a:noAutofit/>
-          </a:bodyPr>
-          <a:lstStyle/>
-          <a:p>
-            <a:pPr marL="0" indent="0">
-              <a:lnSpc>
-                <a:spcPts val="3060"/>
-              </a:lnSpc>
-              <a:spcAft>
-                <a:spcPts val="0"/>
-              </a:spcAft>
-              <a:buNone/>
-            </a:pPr>
-            <a:r>
-              <a:rPr lang="en-US" sz="2550" b="1">
-                <a:solidFill>
-                  <a:srgbClr val="202B33"/>
-                </a:solidFill>
-                <a:latin typeface="Arial"/>
-                <a:ea typeface="Arial"/>
-                <a:cs typeface="Arial"/>
-              </a:rPr>
-              <a:t xml:space="preserve">References</a:t>
-            </a:r>
-            <a:endParaRPr lang="en-US" sz="2550"/>
-          </a:p>
-        </p:txBody>
-      </p:sp>
-      <p:sp>
-        <p:nvSpPr>
-          <p:cNvPr id="4" name="Text 4"/>
-          <p:cNvSpPr txBox="1"/>
-          <p:nvPr/>
-        </p:nvSpPr>
-        <p:spPr>
-          <a:xfrm>
-            <a:off x="457200" y="1971675"/>
-            <a:ext cx="4352925" cy="5314950"/>
-          </a:xfrm>
-          <a:prstGeom prst="rect">
-            <a:avLst/>
-          </a:prstGeom>
-          <a:noFill/>
-          <a:ln>
-            <a:noFill/>
-          </a:ln>
-        </p:spPr>
-        <p:txBody>
-          <a:bodyPr wrap="none" lIns="0" tIns="0" rIns="0" bIns="0" anchor="t">
-            <a:noAutofit/>
-          </a:bodyPr>
-          <a:lstStyle/>
-          <a:p>
-            <a:pPr marL="0" indent="0">
-              <a:lnSpc>
-                <a:spcPts val="1950"/>
-              </a:lnSpc>
-              <a:spcAft>
-                <a:spcPts val="0"/>
-              </a:spcAft>
-              <a:buNone/>
-            </a:pPr>
-            <a:r>
-              <a:rPr lang="en-US" sz="1500" b="0">
-                <a:solidFill>
-                  <a:srgbClr val="202B33"/>
-                </a:solidFill>
-                <a:latin typeface="Arial"/>
-                <a:ea typeface="Arial"/>
-                <a:cs typeface="Arial"/>
-              </a:rPr>
-              <a:t xml:space="preserve">Saltzer and Schroeder (1975), The</a:t>
-            </a:r>
-            <a:endParaRPr lang="en-US" sz="1500"/>
-          </a:p>
-          <a:p>
-            <a:pPr marL="0" indent="0">
-              <a:lnSpc>
-                <a:spcPts val="1950"/>
-              </a:lnSpc>
-              <a:spcAft>
-                <a:spcPts val="0"/>
-              </a:spcAft>
-              <a:buNone/>
-            </a:pPr>
-            <a:r>
-              <a:rPr lang="en-US" sz="1500" b="0">
-                <a:solidFill>
-                  <a:srgbClr val="202B33"/>
-                </a:solidFill>
-                <a:latin typeface="Arial"/>
-                <a:ea typeface="Arial"/>
-                <a:cs typeface="Arial"/>
-              </a:rPr>
-              <a:t xml:space="preserve">Protection of Information in Computer</a:t>
-            </a:r>
-            <a:endParaRPr lang="en-US" sz="1500"/>
-          </a:p>
-          <a:p>
-            <a:pPr marL="0" indent="0">
-              <a:lnSpc>
-                <a:spcPts val="1950"/>
-              </a:lnSpc>
-              <a:spcAft>
-                <a:spcPts val="0"/>
-              </a:spcAft>
-              <a:buNone/>
-            </a:pPr>
-            <a:r>
-              <a:rPr lang="en-US" sz="1500" b="0">
-                <a:solidFill>
-                  <a:srgbClr val="202B33"/>
-                </a:solidFill>
-                <a:latin typeface="Arial"/>
-                <a:ea typeface="Arial"/>
-                <a:cs typeface="Arial"/>
-              </a:rPr>
-              <a:t xml:space="preserve">Systems —</a:t>
-            </a:r>
-            <a:endParaRPr lang="en-US" sz="1500"/>
-          </a:p>
-          <a:p>
-            <a:pPr marL="0" indent="0">
-              <a:lnSpc>
-                <a:spcPts val="1950"/>
-              </a:lnSpc>
-              <a:spcAft>
-                <a:spcPts val="0"/>
-              </a:spcAft>
-              <a:buNone/>
-            </a:pPr>
-            <a:r>
-              <a:rPr lang="en-US" sz="1500" b="0">
-                <a:solidFill>
-                  <a:srgbClr val="202B33"/>
-                </a:solidFill>
-                <a:latin typeface="Arial"/>
-                <a:ea typeface="Arial"/>
-                <a:cs typeface="Arial"/>
-              </a:rPr>
-              <a:t xml:space="preserve">https://doi.org/10.1109/PROC.1975.9939),</a:t>
-            </a:r>
-            <a:endParaRPr lang="en-US" sz="1500"/>
-          </a:p>
-          <a:p>
-            <a:pPr marL="0" indent="0">
-              <a:lnSpc>
-                <a:spcPts val="1950"/>
-              </a:lnSpc>
-              <a:spcAft>
-                <a:spcPts val="0"/>
-              </a:spcAft>
-              <a:buNone/>
-            </a:pPr>
-            <a:r>
-              <a:rPr lang="en-US" sz="1500" b="0">
-                <a:solidFill>
-                  <a:srgbClr val="202B33"/>
-                </a:solidFill>
-                <a:latin typeface="Arial"/>
-                <a:ea typeface="Arial"/>
-                <a:cs typeface="Arial"/>
-              </a:rPr>
-              <a:t xml:space="preserve">Proceedings of the IEEE 63(9), 1278 to</a:t>
-            </a:r>
-            <a:endParaRPr lang="en-US" sz="1500"/>
-          </a:p>
-          <a:p>
-            <a:pPr marL="0" indent="0">
-              <a:lnSpc>
-                <a:spcPts val="1950"/>
-              </a:lnSpc>
-              <a:spcAft>
-                <a:spcPts val="0"/>
-              </a:spcAft>
-              <a:buNone/>
-            </a:pPr>
-            <a:r>
-              <a:rPr lang="en-US" sz="1500" b="0">
-                <a:solidFill>
-                  <a:srgbClr val="202B33"/>
-                </a:solidFill>
-                <a:latin typeface="Arial"/>
-                <a:ea typeface="Arial"/>
-                <a:cs typeface="Arial"/>
-              </a:rPr>
-              <a:t xml:space="preserve">1308. Least privilege is their principle</a:t>
-            </a:r>
-            <a:endParaRPr lang="en-US" sz="1500"/>
-          </a:p>
-        </p:txBody>
-      </p:sp>
-      <p:sp>
-        <p:nvSpPr>
-          <p:cNvPr id="5" name="Text 5"/>
-          <p:cNvSpPr txBox="1"/>
-          <p:nvPr/>
-        </p:nvSpPr>
-        <p:spPr>
-          <a:xfrm>
-            <a:off x="5238750" y="1971675"/>
-            <a:ext cx="4362450" cy="5314950"/>
-          </a:xfrm>
-          <a:prstGeom prst="rect">
-            <a:avLst/>
-          </a:prstGeom>
-          <a:noFill/>
-          <a:ln>
-            <a:noFill/>
-          </a:ln>
-        </p:spPr>
-        <p:txBody>
-          <a:bodyPr wrap="none" lIns="0" tIns="0" rIns="0" bIns="0" anchor="t">
-            <a:noAutofit/>
-          </a:bodyPr>
-          <a:lstStyle/>
-          <a:p>
-            <a:pPr marL="0" indent="0">
-              <a:lnSpc>
-                <a:spcPts val="1950"/>
-              </a:lnSpc>
-              <a:spcAft>
-                <a:spcPts val="0"/>
-              </a:spcAft>
-              <a:buNone/>
-            </a:pPr>
-            <a:r>
-              <a:rPr lang="en-US" sz="1500" b="0">
-                <a:solidFill>
-                  <a:srgbClr val="202B33"/>
-                </a:solidFill>
-                <a:latin typeface="Arial"/>
-                <a:ea typeface="Arial"/>
-                <a:cs typeface="Arial"/>
-              </a:rPr>
-              <a:t xml:space="preserve">(f.</a:t>
-            </a:r>
-            <a:endParaRPr lang="en-US" sz="1500"/>
-          </a:p>
-          <a:p>
-            <a:pPr marL="0" indent="0">
-              <a:lnSpc>
-                <a:spcPts val="1950"/>
-              </a:lnSpc>
-              <a:spcAft>
-                <a:spcPts val="0"/>
-              </a:spcAft>
-              <a:buNone/>
-            </a:pPr>
-            <a:r>
-              <a:rPr lang="en-US" sz="1500" b="0">
-                <a:solidFill>
-                  <a:srgbClr val="202B33"/>
-                </a:solidFill>
-                <a:latin typeface="Arial"/>
-                <a:ea typeface="Arial"/>
-                <a:cs typeface="Arial"/>
-              </a:rPr>
-              <a:t xml:space="preserve"/>
-            </a:r>
-            <a:endParaRPr lang="en-US" sz="1500"/>
-          </a:p>
-          <a:p>
-            <a:pPr marL="0" indent="0">
-              <a:lnSpc>
-                <a:spcPts val="1950"/>
-              </a:lnSpc>
-              <a:spcAft>
-                <a:spcPts val="0"/>
-              </a:spcAft>
-              <a:buNone/>
-            </a:pPr>
-            <a:r>
-              <a:rPr lang="en-US" sz="1500" b="0">
-                <a:solidFill>
-                  <a:srgbClr val="202B33"/>
-                </a:solidFill>
-                <a:latin typeface="Arial"/>
-                <a:ea typeface="Arial"/>
-                <a:cs typeface="Arial"/>
-              </a:rPr>
-              <a:t xml:space="preserve">Vaughan (1996), The Challenger Launch</a:t>
-            </a:r>
-            <a:endParaRPr lang="en-US" sz="1500"/>
-          </a:p>
-          <a:p>
-            <a:pPr marL="0" indent="0">
-              <a:lnSpc>
-                <a:spcPts val="1950"/>
-              </a:lnSpc>
-              <a:spcAft>
-                <a:spcPts val="0"/>
-              </a:spcAft>
-              <a:buNone/>
-            </a:pPr>
-            <a:r>
-              <a:rPr lang="en-US" sz="1500" b="0">
-                <a:solidFill>
-                  <a:srgbClr val="202B33"/>
-                </a:solidFill>
-                <a:latin typeface="Arial"/>
-                <a:ea typeface="Arial"/>
-                <a:cs typeface="Arial"/>
-              </a:rPr>
-              <a:t xml:space="preserve">Decision, University of Chicago Press, on</a:t>
-            </a:r>
-            <a:endParaRPr lang="en-US" sz="1500"/>
-          </a:p>
-          <a:p>
-            <a:pPr marL="0" indent="0">
-              <a:lnSpc>
-                <a:spcPts val="1950"/>
-              </a:lnSpc>
-              <a:spcAft>
-                <a:spcPts val="0"/>
-              </a:spcAft>
-              <a:buNone/>
-            </a:pPr>
-            <a:r>
-              <a:rPr lang="en-US" sz="1500" b="0">
-                <a:solidFill>
-                  <a:srgbClr val="202B33"/>
-                </a:solidFill>
-                <a:latin typeface="Arial"/>
-                <a:ea typeface="Arial"/>
-                <a:cs typeface="Arial"/>
-              </a:rPr>
-              <a:t xml:space="preserve">normalization of deviance.</a:t>
-            </a:r>
-            <a:endParaRPr lang="en-US" sz="1500"/>
-          </a:p>
-        </p:txBody>
-      </p:sp>
-      <p:sp>
-        <p:nvSpPr>
-          <p:cNvPr id="6" name="Text 6"/>
-          <p:cNvSpPr txBox="1"/>
-          <p:nvPr/>
-        </p:nvSpPr>
-        <p:spPr>
-          <a:xfrm>
-            <a:off x="457200" y="7486650"/>
-            <a:ext cx="8820150" cy="190500"/>
-          </a:xfrm>
-          <a:prstGeom prst="rect">
-            <a:avLst/>
-          </a:prstGeom>
-          <a:noFill/>
-          <a:ln>
-            <a:noFill/>
-          </a:ln>
-        </p:spPr>
-        <p:txBody>
-          <a:bodyPr wrap="none" lIns="0" tIns="0" rIns="0" bIns="0" anchor="t">
-            <a:noAutofit/>
-          </a:bodyPr>
-          <a:lstStyle/>
-          <a:p>
-            <a:pPr marL="0" indent="0">
-              <a:lnSpc>
-                <a:spcPts val="1268"/>
-              </a:lnSpc>
-              <a:spcAft>
-                <a:spcPts val="0"/>
-              </a:spcAft>
-              <a:buNone/>
-            </a:pPr>
-            <a:r>
-              <a:rPr lang="en-US" sz="975" b="0">
-                <a:solidFill>
-                  <a:srgbClr val="48555B"/>
-                </a:solidFill>
-                <a:latin typeface="Arial"/>
-                <a:ea typeface="Arial"/>
-                <a:cs typeface="Arial"/>
-              </a:rPr>
-              <a:t xml:space="preserve">Adaptive, agentic apps</a:t>
-            </a:r>
-            <a:endParaRPr lang="en-US" sz="975"/>
-          </a:p>
-        </p:txBody>
-      </p:sp>
-      <p:sp>
-        <p:nvSpPr>
-          <p:cNvPr id="7" name="Text 7"/>
-          <p:cNvSpPr txBox="1"/>
-          <p:nvPr/>
-        </p:nvSpPr>
-        <p:spPr>
-          <a:xfrm>
-            <a:off x="9391650" y="7486650"/>
-            <a:ext cx="238125" cy="190500"/>
-          </a:xfrm>
-          <a:prstGeom prst="rect">
-            <a:avLst/>
-          </a:prstGeom>
-          <a:noFill/>
-          <a:ln>
-            <a:noFill/>
-          </a:ln>
-        </p:spPr>
-        <p:txBody>
-          <a:bodyPr wrap="none" lIns="0" tIns="0" rIns="0" bIns="0" anchor="t">
-            <a:noAutofit/>
-          </a:bodyPr>
-          <a:lstStyle/>
-          <a:p>
-            <a:pPr marL="0" indent="0">
-              <a:lnSpc>
-                <a:spcPts val="1268"/>
-              </a:lnSpc>
-              <a:spcAft>
-                <a:spcPts val="0"/>
-              </a:spcAft>
-              <a:buNone/>
-            </a:pPr>
-            <a:r>
-              <a:rPr lang="en-US" sz="975" b="0">
-                <a:solidFill>
-                  <a:srgbClr val="48555B"/>
-                </a:solidFill>
-                <a:latin typeface="Arial"/>
-                <a:ea typeface="Arial"/>
-                <a:cs typeface="Arial"/>
-              </a:rPr>
-              <a:t xml:space="preserve">20</a:t>
-            </a:r>
-            <a:endParaRPr lang="en-US" sz="975"/>
-          </a:p>
-        </p:txBody>
-      </p:sp>
-    </p:spTree>
-  </p:cSld>
-  <p:clrMapOvr>
-    <a:masterClrMapping/>
-  </p:clrMapOvr>
-</p:sld>
-</file>
-
 <file path=ppt/slides/slide3.xml><?xml version="1.0" encoding="utf-8"?>
 <p:sld xmlns:a="http://schemas.openxmlformats.org/drawingml/2006/main" xmlns:r="http://schemas.openxmlformats.org/officeDocument/2006/relationships" xmlns:p="http://schemas.openxmlformats.org/presentationml/2006/main">
   <p:cSld name="Slide 3">
@@ -20834,52 +17997,6 @@
             </a:r>
             <a:endParaRPr lang="en-US" sz="1500"/>
           </a:p>
-          <a:p>
-            <a:pPr marL="0" indent="0">
-              <a:lnSpc>
-                <a:spcPts val="1950"/>
-              </a:lnSpc>
-              <a:spcAft>
-                <a:spcPts val="0"/>
-              </a:spcAft>
-              <a:buNone/>
-            </a:pPr>
-            <a:r>
-              <a:rPr lang="en-US" sz="1500" b="0">
-                <a:solidFill>
-                  <a:srgbClr val="202B33"/>
-                </a:solidFill>
-                <a:latin typeface="Arial"/>
-                <a:ea typeface="Arial"/>
-                <a:cs typeface="Arial"/>
-              </a:rPr>
-              <a:t xml:space="preserve">per surprise, and it does nothing for the</a:t>
-            </a:r>
-            <a:endParaRPr lang="en-US" sz="1500"/>
-          </a:p>
-          <a:p>
-            <a:pPr marL="0" indent="0">
-              <a:lnSpc>
-                <a:spcPts val="1950"/>
-              </a:lnSpc>
-              <a:spcAft>
-                <a:spcPts val="0"/>
-              </a:spcAft>
-              <a:buNone/>
-            </a:pPr>
-            <a:r>
-              <a:rPr lang="en-US" sz="1500" b="0">
-                <a:solidFill>
-                  <a:srgbClr val="202B33"/>
-                </a:solidFill>
-                <a:latin typeface="Arial"/>
-                <a:ea typeface="Arial"/>
-                <a:cs typeface="Arial"/>
-              </a:rPr>
-              <a:t xml:space="preserve">unaffected records that are stuck behind</a:t>
-            </a:r>
-            <a:endParaRPr lang="en-US" sz="1500"/>
-          </a:p>
         </p:txBody>
       </p:sp>
       <p:sp>
@@ -20925,6 +18042,52 @@
                 <a:ea typeface="Arial"/>
                 <a:cs typeface="Arial"/>
               </a:rPr>
+              <a:t xml:space="preserve">per surprise, and it does nothing for the</a:t>
+            </a:r>
+            <a:endParaRPr lang="en-US" sz="1500"/>
+          </a:p>
+          <a:p>
+            <a:pPr marL="0" indent="0">
+              <a:lnSpc>
+                <a:spcPts val="1950"/>
+              </a:lnSpc>
+              <a:spcAft>
+                <a:spcPts val="0"/>
+              </a:spcAft>
+              <a:buNone/>
+            </a:pPr>
+            <a:r>
+              <a:rPr lang="en-US" sz="1500" b="0">
+                <a:solidFill>
+                  <a:srgbClr val="202B33"/>
+                </a:solidFill>
+                <a:latin typeface="Arial"/>
+                <a:ea typeface="Arial"/>
+                <a:cs typeface="Arial"/>
+              </a:rPr>
+              <a:t xml:space="preserve">unaffected records that are stuck behind</a:t>
+            </a:r>
+            <a:endParaRPr lang="en-US" sz="1500"/>
+          </a:p>
+          <a:p>
+            <a:pPr marL="0" indent="0">
+              <a:lnSpc>
+                <a:spcPts val="1950"/>
+              </a:lnSpc>
+              <a:spcAft>
+                <a:spcPts val="0"/>
+              </a:spcAft>
+              <a:buNone/>
+            </a:pPr>
+            <a:r>
+              <a:rPr lang="en-US" sz="1500" b="0">
+                <a:solidFill>
+                  <a:srgbClr val="202B33"/>
+                </a:solidFill>
+                <a:latin typeface="Arial"/>
+                <a:ea typeface="Arial"/>
+                <a:cs typeface="Arial"/>
+              </a:rPr>
               <a:t xml:space="preserve">the broken ones.</a:t>
             </a:r>
             <a:endParaRPr lang="en-US" sz="1500"/>
@@ -21110,121 +18273,6 @@
                 <a:cs typeface="Arial"/>
               </a:rPr>
               <a:t xml:space="preserve">made operations worse.</a:t>
-            </a:r>
-            <a:endParaRPr lang="en-US" sz="1500"/>
-          </a:p>
-          <a:p>
-            <a:pPr marL="0" indent="0">
-              <a:lnSpc>
-                <a:spcPts val="1950"/>
-              </a:lnSpc>
-              <a:spcAft>
-                <a:spcPts val="0"/>
-              </a:spcAft>
-              <a:buNone/>
-            </a:pPr>
-            <a:r>
-              <a:rPr lang="en-US" sz="1500" b="0">
-                <a:solidFill>
-                  <a:srgbClr val="202B33"/>
-                </a:solidFill>
-                <a:latin typeface="Arial"/>
-                <a:ea typeface="Arial"/>
-                <a:cs typeface="Arial"/>
-              </a:rPr>
-              <a:t xml:space="preserve"/>
-            </a:r>
-            <a:endParaRPr lang="en-US" sz="1500"/>
-          </a:p>
-          <a:p>
-            <a:pPr marL="0" indent="0">
-              <a:lnSpc>
-                <a:spcPts val="1950"/>
-              </a:lnSpc>
-              <a:spcAft>
-                <a:spcPts val="0"/>
-              </a:spcAft>
-              <a:buNone/>
-            </a:pPr>
-            <a:r>
-              <a:rPr lang="en-US" sz="1500" b="0">
-                <a:solidFill>
-                  <a:srgbClr val="202B33"/>
-                </a:solidFill>
-                <a:latin typeface="Arial"/>
-                <a:ea typeface="Arial"/>
-                <a:cs typeface="Arial"/>
-              </a:rPr>
-              <a:t xml:space="preserve">So every slide from here is about buying</a:t>
-            </a:r>
-            <a:endParaRPr lang="en-US" sz="1500"/>
-          </a:p>
-          <a:p>
-            <a:pPr marL="0" indent="0">
-              <a:lnSpc>
-                <a:spcPts val="1950"/>
-              </a:lnSpc>
-              <a:spcAft>
-                <a:spcPts val="0"/>
-              </a:spcAft>
-              <a:buNone/>
-            </a:pPr>
-            <a:r>
-              <a:rPr lang="en-US" sz="1500" b="0">
-                <a:solidFill>
-                  <a:srgbClr val="202B33"/>
-                </a:solidFill>
-                <a:latin typeface="Arial"/>
-                <a:ea typeface="Arial"/>
-                <a:cs typeface="Arial"/>
-              </a:rPr>
-              <a:t xml:space="preserve">recovery speed without buying corruption.</a:t>
-            </a:r>
-            <a:endParaRPr lang="en-US" sz="1500"/>
-          </a:p>
-          <a:p>
-            <a:pPr marL="0" indent="0">
-              <a:lnSpc>
-                <a:spcPts val="1950"/>
-              </a:lnSpc>
-              <a:spcAft>
-                <a:spcPts val="0"/>
-              </a:spcAft>
-              <a:buNone/>
-            </a:pPr>
-            <a:r>
-              <a:rPr lang="en-US" sz="1500" b="0">
-                <a:solidFill>
-                  <a:srgbClr val="202B33"/>
-                </a:solidFill>
-                <a:latin typeface="Arial"/>
-                <a:ea typeface="Arial"/>
-                <a:cs typeface="Arial"/>
-              </a:rPr>
-              <a:t xml:space="preserve">Keep that trade in your head; it is the</a:t>
-            </a:r>
-            <a:endParaRPr lang="en-US" sz="1500"/>
-          </a:p>
-          <a:p>
-            <a:pPr marL="0" indent="0">
-              <a:lnSpc>
-                <a:spcPts val="1950"/>
-              </a:lnSpc>
-              <a:spcAft>
-                <a:spcPts val="0"/>
-              </a:spcAft>
-              <a:buNone/>
-            </a:pPr>
-            <a:r>
-              <a:rPr lang="en-US" sz="1500" b="0">
-                <a:solidFill>
-                  <a:srgbClr val="202B33"/>
-                </a:solidFill>
-                <a:latin typeface="Arial"/>
-                <a:ea typeface="Arial"/>
-                <a:cs typeface="Arial"/>
-              </a:rPr>
-              <a:t xml:space="preserve">whole talk.</a:t>
             </a:r>
             <a:endParaRPr lang="en-US" sz="1500"/>
           </a:p>
@@ -21814,6 +18862,29 @@
             </a:r>
             <a:endParaRPr lang="en-US" sz="1200"/>
           </a:p>
+          <a:p>
+            <a:pPr marL="0" indent="0">
+              <a:lnSpc>
+                <a:spcPts val="1575"/>
+              </a:lnSpc>
+              <a:spcAft>
+                <a:spcPts val="0"/>
+              </a:spcAft>
+              <a:buNone/>
+            </a:pPr>
+            <a:r>
+              <a:rPr lang="en-US" sz="1200" b="0">
+                <a:solidFill>
+                  <a:srgbClr val="202B33"/>
+                </a:solidFill>
+                <a:latin typeface="Arial"/>
+                <a:ea typeface="Arial"/>
+                <a:cs typeface="Arial"/>
+              </a:rPr>
+              <a:t xml:space="preserve">integration at a time, and not only in our products.</a:t>
+            </a:r>
+            <a:endParaRPr lang="en-US" sz="1200"/>
+          </a:p>
         </p:txBody>
       </p:sp>
       <p:sp>
@@ -21859,7 +18930,7 @@
                 <a:ea typeface="Arial"/>
                 <a:cs typeface="Arial"/>
               </a:rPr>
-              <a:t xml:space="preserve">integration at a time, and not only in our products.</a:t>
+              <a:t xml:space="preserve"/>
             </a:r>
             <a:endParaRPr lang="en-US" sz="1200"/>
           </a:p>
@@ -21882,7 +18953,7 @@
                 <a:ea typeface="Arial"/>
                 <a:cs typeface="Arial"/>
               </a:rPr>
-              <a:t xml:space="preserve">Browsers now ship a chat that drives the page. WebMCP</a:t>
+              <a:t xml:space="preserve">So here is the hazard, and it applies to the small</a:t>
             </a:r>
             <a:endParaRPr lang="en-US" sz="1200"/>
           </a:p>
@@ -21905,7 +18976,7 @@
                 <a:ea typeface="Arial"/>
                 <a:cs typeface="Arial"/>
               </a:rPr>
-              <a:t xml:space="preserve">lets an agent act on any site that opts in, and the</a:t>
+              <a:t xml:space="preserve">systems too. Risk does not grow with the number of</a:t>
             </a:r>
             <a:endParaRPr lang="en-US" sz="1200"/>
           </a:p>
@@ -21928,7 +18999,7 @@
                 <a:ea typeface="Arial"/>
                 <a:cs typeface="Arial"/>
               </a:rPr>
-              <a:t xml:space="preserve">list of sites that opt in only goes one direction.</a:t>
+              <a:t xml:space="preserve">tools. It grows with the number of pathways between</a:t>
             </a:r>
             <a:endParaRPr lang="en-US" sz="1200"/>
           </a:p>
@@ -21951,7 +19022,7 @@
                 <a:ea typeface="Arial"/>
                 <a:cs typeface="Arial"/>
               </a:rPr>
-              <a:t xml:space="preserve">The next generation of CLIs will take natural</a:t>
+              <a:t xml:space="preserve">them, and every integration multiplies those. Ten</a:t>
             </a:r>
             <a:endParaRPr lang="en-US" sz="1200"/>
           </a:p>
@@ -21974,7 +19045,7 @@
                 <a:ea typeface="Arial"/>
                 <a:cs typeface="Arial"/>
               </a:rPr>
-              <a:t xml:space="preserve">language by default, and you will pass --no-agent to</a:t>
+              <a:t xml:space="preserve">tools is forty-five pairs before you count chains.</a:t>
             </a:r>
             <a:endParaRPr lang="en-US" sz="1200"/>
           </a:p>
@@ -21997,7 +19068,7 @@
                 <a:ea typeface="Arial"/>
                 <a:cs typeface="Arial"/>
               </a:rPr>
-              <a:t xml:space="preserve">get the old behavior back. The intermediary</a:t>
+              <a:t xml:space="preserve">Plug in one SaaS with a dozen endpoints and you did</a:t>
             </a:r>
             <a:endParaRPr lang="en-US" sz="1200"/>
           </a:p>
@@ -22020,7 +19091,7 @@
                 <a:ea typeface="Arial"/>
                 <a:cs typeface="Arial"/>
               </a:rPr>
-              <a:t xml:space="preserve">intelligence layer is going to wrap everything, and I</a:t>
+              <a:t xml:space="preserve">not add twelve capabilities; you added hundreds of</a:t>
             </a:r>
             <a:endParaRPr lang="en-US" sz="1200"/>
           </a:p>
@@ -22043,7 +19114,7 @@
                 <a:ea typeface="Arial"/>
                 <a:cs typeface="Arial"/>
               </a:rPr>
-              <a:t xml:space="preserve">know who to blame: the kids. Actually, the kids hate</a:t>
+              <a:t xml:space="preserve">routes from something the agent can read to something</a:t>
             </a:r>
             <a:endParaRPr lang="en-US" sz="1200"/>
           </a:p>
@@ -22066,7 +19137,7 @@
                 <a:ea typeface="Arial"/>
                 <a:cs typeface="Arial"/>
               </a:rPr>
-              <a:t xml:space="preserve">AI. It will be their kids who demand an agent safety</a:t>
+              <a:t xml:space="preserve">it can do. Nobody reviews those combinations. Not</a:t>
             </a:r>
             <a:endParaRPr lang="en-US" sz="1200"/>
           </a:p>
@@ -22089,7 +19160,7 @@
                 <a:ea typeface="Arial"/>
                 <a:cs typeface="Arial"/>
               </a:rPr>
-              <a:t xml:space="preserve">blanket on everything. I will be in a rocking chair</a:t>
+              <a:t xml:space="preserve">your security team, not the model, not you at three</a:t>
             </a:r>
             <a:endParaRPr lang="en-US" sz="1200"/>
           </a:p>
@@ -22112,7 +19183,30 @@
                 <a:ea typeface="Arial"/>
                 <a:cs typeface="Arial"/>
               </a:rPr>
-              <a:t xml:space="preserve">explaining that the internet was better on vinyl.</a:t>
+              <a:t xml:space="preserve">in the morning. The dangerous pairing is never on the</a:t>
+            </a:r>
+            <a:endParaRPr lang="en-US" sz="1200"/>
+          </a:p>
+          <a:p>
+            <a:pPr marL="0" indent="0">
+              <a:lnSpc>
+                <a:spcPts val="1575"/>
+              </a:lnSpc>
+              <a:spcAft>
+                <a:spcPts val="0"/>
+              </a:spcAft>
+              <a:buNone/>
+            </a:pPr>
+            <a:r>
+              <a:rPr lang="en-US" sz="1200" b="0">
+                <a:solidFill>
+                  <a:srgbClr val="202B33"/>
+                </a:solidFill>
+                <a:latin typeface="Arial"/>
+                <a:ea typeface="Arial"/>
+                <a:cs typeface="Arial"/>
+              </a:rPr>
+              <a:t xml:space="preserve">roadmap. It gets discovered.</a:t>
             </a:r>
             <a:endParaRPr lang="en-US" sz="1200"/>
           </a:p>
@@ -22390,7 +19484,7 @@
                 <a:ea typeface="Arial"/>
                 <a:cs typeface="Arial"/>
               </a:rPr>
-              <a:t xml:space="preserve">So here is the hazard, and it applies to</a:t>
+              <a:t xml:space="preserve">So the question is not whether to give the</a:t>
             </a:r>
             <a:endParaRPr lang="en-US" sz="1500"/>
           </a:p>
@@ -22413,7 +19507,7 @@
                 <a:ea typeface="Arial"/>
                 <a:cs typeface="Arial"/>
               </a:rPr>
-              <a:t xml:space="preserve">the small systems too. Risk does not grow</a:t>
+              <a:t xml:space="preserve">assistant access. It is how to keep the</a:t>
             </a:r>
             <a:endParaRPr lang="en-US" sz="1500"/>
           </a:p>
@@ -22436,7 +19530,7 @@
                 <a:ea typeface="Arial"/>
                 <a:cs typeface="Arial"/>
               </a:rPr>
-              <a:t xml:space="preserve">with the number of tools. It grows with the</a:t>
+              <a:t xml:space="preserve">number of live pathways small enough to</a:t>
             </a:r>
             <a:endParaRPr lang="en-US" sz="1500"/>
           </a:p>
@@ -22459,306 +19553,7 @@
                 <a:ea typeface="Arial"/>
                 <a:cs typeface="Arial"/>
               </a:rPr>
-              <a:t xml:space="preserve">number of pathways between them, and every</a:t>
-            </a:r>
-            <a:endParaRPr lang="en-US" sz="1500"/>
-          </a:p>
-          <a:p>
-            <a:pPr marL="0" indent="0">
-              <a:lnSpc>
-                <a:spcPts val="1950"/>
-              </a:lnSpc>
-              <a:spcAft>
-                <a:spcPts val="0"/>
-              </a:spcAft>
-              <a:buNone/>
-            </a:pPr>
-            <a:r>
-              <a:rPr lang="en-US" sz="1500" b="0">
-                <a:solidFill>
-                  <a:srgbClr val="202B33"/>
-                </a:solidFill>
-                <a:latin typeface="Arial"/>
-                <a:ea typeface="Arial"/>
-                <a:cs typeface="Arial"/>
-              </a:rPr>
-              <a:t xml:space="preserve">integration multiplies those. Ten tools is</a:t>
-            </a:r>
-            <a:endParaRPr lang="en-US" sz="1500"/>
-          </a:p>
-          <a:p>
-            <a:pPr marL="0" indent="0">
-              <a:lnSpc>
-                <a:spcPts val="1950"/>
-              </a:lnSpc>
-              <a:spcAft>
-                <a:spcPts val="0"/>
-              </a:spcAft>
-              <a:buNone/>
-            </a:pPr>
-            <a:r>
-              <a:rPr lang="en-US" sz="1500" b="0">
-                <a:solidFill>
-                  <a:srgbClr val="202B33"/>
-                </a:solidFill>
-                <a:latin typeface="Arial"/>
-                <a:ea typeface="Arial"/>
-                <a:cs typeface="Arial"/>
-              </a:rPr>
-              <a:t xml:space="preserve">forty-five pairs before you count chains.</a:t>
-            </a:r>
-            <a:endParaRPr lang="en-US" sz="1500"/>
-          </a:p>
-          <a:p>
-            <a:pPr marL="0" indent="0">
-              <a:lnSpc>
-                <a:spcPts val="1950"/>
-              </a:lnSpc>
-              <a:spcAft>
-                <a:spcPts val="0"/>
-              </a:spcAft>
-              <a:buNone/>
-            </a:pPr>
-            <a:r>
-              <a:rPr lang="en-US" sz="1500" b="0">
-                <a:solidFill>
-                  <a:srgbClr val="202B33"/>
-                </a:solidFill>
-                <a:latin typeface="Arial"/>
-                <a:ea typeface="Arial"/>
-                <a:cs typeface="Arial"/>
-              </a:rPr>
-              <a:t xml:space="preserve">Plug in one SaaS with a dozen endpoints and</a:t>
-            </a:r>
-            <a:endParaRPr lang="en-US" sz="1500"/>
-          </a:p>
-          <a:p>
-            <a:pPr marL="0" indent="0">
-              <a:lnSpc>
-                <a:spcPts val="1950"/>
-              </a:lnSpc>
-              <a:spcAft>
-                <a:spcPts val="0"/>
-              </a:spcAft>
-              <a:buNone/>
-            </a:pPr>
-            <a:r>
-              <a:rPr lang="en-US" sz="1500" b="0">
-                <a:solidFill>
-                  <a:srgbClr val="202B33"/>
-                </a:solidFill>
-                <a:latin typeface="Arial"/>
-                <a:ea typeface="Arial"/>
-                <a:cs typeface="Arial"/>
-              </a:rPr>
-              <a:t xml:space="preserve">you did not add twelve capabilities; you</a:t>
-            </a:r>
-            <a:endParaRPr lang="en-US" sz="1500"/>
-          </a:p>
-          <a:p>
-            <a:pPr marL="0" indent="0">
-              <a:lnSpc>
-                <a:spcPts val="1950"/>
-              </a:lnSpc>
-              <a:spcAft>
-                <a:spcPts val="0"/>
-              </a:spcAft>
-              <a:buNone/>
-            </a:pPr>
-            <a:r>
-              <a:rPr lang="en-US" sz="1500" b="0">
-                <a:solidFill>
-                  <a:srgbClr val="202B33"/>
-                </a:solidFill>
-                <a:latin typeface="Arial"/>
-                <a:ea typeface="Arial"/>
-                <a:cs typeface="Arial"/>
-              </a:rPr>
-              <a:t xml:space="preserve">added hundreds of routes from something the</a:t>
-            </a:r>
-            <a:endParaRPr lang="en-US" sz="1500"/>
-          </a:p>
-          <a:p>
-            <a:pPr marL="0" indent="0">
-              <a:lnSpc>
-                <a:spcPts val="1950"/>
-              </a:lnSpc>
-              <a:spcAft>
-                <a:spcPts val="0"/>
-              </a:spcAft>
-              <a:buNone/>
-            </a:pPr>
-            <a:r>
-              <a:rPr lang="en-US" sz="1500" b="0">
-                <a:solidFill>
-                  <a:srgbClr val="202B33"/>
-                </a:solidFill>
-                <a:latin typeface="Arial"/>
-                <a:ea typeface="Arial"/>
-                <a:cs typeface="Arial"/>
-              </a:rPr>
-              <a:t xml:space="preserve">agent can read to something it can do.</a:t>
-            </a:r>
-            <a:endParaRPr lang="en-US" sz="1500"/>
-          </a:p>
-          <a:p>
-            <a:pPr marL="0" indent="0">
-              <a:lnSpc>
-                <a:spcPts val="1950"/>
-              </a:lnSpc>
-              <a:spcAft>
-                <a:spcPts val="0"/>
-              </a:spcAft>
-              <a:buNone/>
-            </a:pPr>
-            <a:r>
-              <a:rPr lang="en-US" sz="1500" b="0">
-                <a:solidFill>
-                  <a:srgbClr val="202B33"/>
-                </a:solidFill>
-                <a:latin typeface="Arial"/>
-                <a:ea typeface="Arial"/>
-                <a:cs typeface="Arial"/>
-              </a:rPr>
-              <a:t xml:space="preserve">Nobody reviews those combinations. Not your</a:t>
-            </a:r>
-            <a:endParaRPr lang="en-US" sz="1500"/>
-          </a:p>
-          <a:p>
-            <a:pPr marL="0" indent="0">
-              <a:lnSpc>
-                <a:spcPts val="1950"/>
-              </a:lnSpc>
-              <a:spcAft>
-                <a:spcPts val="0"/>
-              </a:spcAft>
-              <a:buNone/>
-            </a:pPr>
-            <a:r>
-              <a:rPr lang="en-US" sz="1500" b="0">
-                <a:solidFill>
-                  <a:srgbClr val="202B33"/>
-                </a:solidFill>
-                <a:latin typeface="Arial"/>
-                <a:ea typeface="Arial"/>
-                <a:cs typeface="Arial"/>
-              </a:rPr>
-              <a:t xml:space="preserve">security team, not the model, not you at</a:t>
-            </a:r>
-            <a:endParaRPr lang="en-US" sz="1500"/>
-          </a:p>
-          <a:p>
-            <a:pPr marL="0" indent="0">
-              <a:lnSpc>
-                <a:spcPts val="1950"/>
-              </a:lnSpc>
-              <a:spcAft>
-                <a:spcPts val="0"/>
-              </a:spcAft>
-              <a:buNone/>
-            </a:pPr>
-            <a:r>
-              <a:rPr lang="en-US" sz="1500" b="0">
-                <a:solidFill>
-                  <a:srgbClr val="202B33"/>
-                </a:solidFill>
-                <a:latin typeface="Arial"/>
-                <a:ea typeface="Arial"/>
-                <a:cs typeface="Arial"/>
-              </a:rPr>
-              <a:t xml:space="preserve">three in the morning. The dangerous pairing</a:t>
-            </a:r>
-            <a:endParaRPr lang="en-US" sz="1500"/>
-          </a:p>
-          <a:p>
-            <a:pPr marL="0" indent="0">
-              <a:lnSpc>
-                <a:spcPts val="1950"/>
-              </a:lnSpc>
-              <a:spcAft>
-                <a:spcPts val="0"/>
-              </a:spcAft>
-              <a:buNone/>
-            </a:pPr>
-            <a:r>
-              <a:rPr lang="en-US" sz="1500" b="0">
-                <a:solidFill>
-                  <a:srgbClr val="202B33"/>
-                </a:solidFill>
-                <a:latin typeface="Arial"/>
-                <a:ea typeface="Arial"/>
-                <a:cs typeface="Arial"/>
-              </a:rPr>
-              <a:t xml:space="preserve">is never on the roadmap. It gets</a:t>
-            </a:r>
-            <a:endParaRPr lang="en-US" sz="1500"/>
-          </a:p>
-          <a:p>
-            <a:pPr marL="0" indent="0">
-              <a:lnSpc>
-                <a:spcPts val="1950"/>
-              </a:lnSpc>
-              <a:spcAft>
-                <a:spcPts val="0"/>
-              </a:spcAft>
-              <a:buNone/>
-            </a:pPr>
-            <a:r>
-              <a:rPr lang="en-US" sz="1500" b="0">
-                <a:solidFill>
-                  <a:srgbClr val="202B33"/>
-                </a:solidFill>
-                <a:latin typeface="Arial"/>
-                <a:ea typeface="Arial"/>
-                <a:cs typeface="Arial"/>
-              </a:rPr>
-              <a:t xml:space="preserve">discovered.</a:t>
-            </a:r>
-            <a:endParaRPr lang="en-US" sz="1500"/>
-          </a:p>
-          <a:p>
-            <a:pPr marL="0" indent="0">
-              <a:lnSpc>
-                <a:spcPts val="1950"/>
-              </a:lnSpc>
-              <a:spcAft>
-                <a:spcPts val="0"/>
-              </a:spcAft>
-              <a:buNone/>
-            </a:pPr>
-            <a:r>
-              <a:rPr lang="en-US" sz="1500" b="0">
-                <a:solidFill>
-                  <a:srgbClr val="202B33"/>
-                </a:solidFill>
-                <a:latin typeface="Arial"/>
-                <a:ea typeface="Arial"/>
-                <a:cs typeface="Arial"/>
-              </a:rPr>
-              <a:t xml:space="preserve"/>
-            </a:r>
-            <a:endParaRPr lang="en-US" sz="1500"/>
-          </a:p>
-          <a:p>
-            <a:pPr marL="0" indent="0">
-              <a:lnSpc>
-                <a:spcPts val="1950"/>
-              </a:lnSpc>
-              <a:spcAft>
-                <a:spcPts val="0"/>
-              </a:spcAft>
-              <a:buNone/>
-            </a:pPr>
-            <a:r>
-              <a:rPr lang="en-US" sz="1500" b="0">
-                <a:solidFill>
-                  <a:srgbClr val="202B33"/>
-                </a:solidFill>
-                <a:latin typeface="Arial"/>
-                <a:ea typeface="Arial"/>
-                <a:cs typeface="Arial"/>
-              </a:rPr>
-              <a:t xml:space="preserve">Most of the damage will be accidents: a</a:t>
+              <a:t xml:space="preserve">reason about, one job at a time. That is</a:t>
             </a:r>
             <a:endParaRPr lang="en-US" sz="1500"/>
           </a:p>
@@ -22788,282 +19583,6 @@
             <a:noAutofit/>
           </a:bodyPr>
           <a:lstStyle/>
-          <a:p>
-            <a:pPr marL="0" indent="0">
-              <a:lnSpc>
-                <a:spcPts val="1950"/>
-              </a:lnSpc>
-              <a:spcAft>
-                <a:spcPts val="0"/>
-              </a:spcAft>
-              <a:buNone/>
-            </a:pPr>
-            <a:r>
-              <a:rPr lang="en-US" sz="1500" b="0">
-                <a:solidFill>
-                  <a:srgbClr val="202B33"/>
-                </a:solidFill>
-                <a:latin typeface="Arial"/>
-                <a:ea typeface="Arial"/>
-                <a:cs typeface="Arial"/>
-              </a:rPr>
-              <a:t xml:space="preserve">confident mapping, a helpful cleanup, a</a:t>
-            </a:r>
-            <a:endParaRPr lang="en-US" sz="1500"/>
-          </a:p>
-          <a:p>
-            <a:pPr marL="0" indent="0">
-              <a:lnSpc>
-                <a:spcPts val="1950"/>
-              </a:lnSpc>
-              <a:spcAft>
-                <a:spcPts val="0"/>
-              </a:spcAft>
-              <a:buNone/>
-            </a:pPr>
-            <a:r>
-              <a:rPr lang="en-US" sz="1500" b="0">
-                <a:solidFill>
-                  <a:srgbClr val="202B33"/>
-                </a:solidFill>
-                <a:latin typeface="Arial"/>
-                <a:ea typeface="Arial"/>
-                <a:cs typeface="Arial"/>
-              </a:rPr>
-              <a:t xml:space="preserve">tool called with the wrong ID. Then there</a:t>
-            </a:r>
-            <a:endParaRPr lang="en-US" sz="1500"/>
-          </a:p>
-          <a:p>
-            <a:pPr marL="0" indent="0">
-              <a:lnSpc>
-                <a:spcPts val="1950"/>
-              </a:lnSpc>
-              <a:spcAft>
-                <a:spcPts val="0"/>
-              </a:spcAft>
-              <a:buNone/>
-            </a:pPr>
-            <a:r>
-              <a:rPr lang="en-US" sz="1500" b="0">
-                <a:solidFill>
-                  <a:srgbClr val="202B33"/>
-                </a:solidFill>
-                <a:latin typeface="Arial"/>
-                <a:ea typeface="Arial"/>
-                <a:cs typeface="Arial"/>
-              </a:rPr>
-              <a:t xml:space="preserve">are the people who mean it. That renamed</a:t>
-            </a:r>
-            <a:endParaRPr lang="en-US" sz="1500"/>
-          </a:p>
-          <a:p>
-            <a:pPr marL="0" indent="0">
-              <a:lnSpc>
-                <a:spcPts val="1950"/>
-              </a:lnSpc>
-              <a:spcAft>
-                <a:spcPts val="0"/>
-              </a:spcAft>
-              <a:buNone/>
-            </a:pPr>
-            <a:r>
-              <a:rPr lang="en-US" sz="1500" b="0">
-                <a:solidFill>
-                  <a:srgbClr val="202B33"/>
-                </a:solidFill>
-                <a:latin typeface="Arial"/>
-                <a:ea typeface="Arial"/>
-                <a:cs typeface="Arial"/>
-              </a:rPr>
-              <a:t xml:space="preserve">field could carry a sentence aimed at the</a:t>
-            </a:r>
-            <a:endParaRPr lang="en-US" sz="1500"/>
-          </a:p>
-          <a:p>
-            <a:pPr marL="0" indent="0">
-              <a:lnSpc>
-                <a:spcPts val="1950"/>
-              </a:lnSpc>
-              <a:spcAft>
-                <a:spcPts val="0"/>
-              </a:spcAft>
-              <a:buNone/>
-            </a:pPr>
-            <a:r>
-              <a:rPr lang="en-US" sz="1500" b="0">
-                <a:solidFill>
-                  <a:srgbClr val="202B33"/>
-                </a:solidFill>
-                <a:latin typeface="Arial"/>
-                <a:ea typeface="Arial"/>
-                <a:cs typeface="Arial"/>
-              </a:rPr>
-              <a:t xml:space="preserve">model, and a vendor payload is untrusted</a:t>
-            </a:r>
-            <a:endParaRPr lang="en-US" sz="1500"/>
-          </a:p>
-          <a:p>
-            <a:pPr marL="0" indent="0">
-              <a:lnSpc>
-                <a:spcPts val="1950"/>
-              </a:lnSpc>
-              <a:spcAft>
-                <a:spcPts val="0"/>
-              </a:spcAft>
-              <a:buNone/>
-            </a:pPr>
-            <a:r>
-              <a:rPr lang="en-US" sz="1500" b="0">
-                <a:solidFill>
-                  <a:srgbClr val="202B33"/>
-                </a:solidFill>
-                <a:latin typeface="Arial"/>
-                <a:ea typeface="Arial"/>
-                <a:cs typeface="Arial"/>
-              </a:rPr>
-              <a:t xml:space="preserve">input that now gets read by something that</a:t>
-            </a:r>
-            <a:endParaRPr lang="en-US" sz="1500"/>
-          </a:p>
-          <a:p>
-            <a:pPr marL="0" indent="0">
-              <a:lnSpc>
-                <a:spcPts val="1950"/>
-              </a:lnSpc>
-              <a:spcAft>
-                <a:spcPts val="0"/>
-              </a:spcAft>
-              <a:buNone/>
-            </a:pPr>
-            <a:r>
-              <a:rPr lang="en-US" sz="1500" b="0">
-                <a:solidFill>
-                  <a:srgbClr val="202B33"/>
-                </a:solidFill>
-                <a:latin typeface="Arial"/>
-                <a:ea typeface="Arial"/>
-                <a:cs typeface="Arial"/>
-              </a:rPr>
-              <a:t xml:space="preserve">can act.</a:t>
-            </a:r>
-            <a:endParaRPr lang="en-US" sz="1500"/>
-          </a:p>
-          <a:p>
-            <a:pPr marL="0" indent="0">
-              <a:lnSpc>
-                <a:spcPts val="1950"/>
-              </a:lnSpc>
-              <a:spcAft>
-                <a:spcPts val="0"/>
-              </a:spcAft>
-              <a:buNone/>
-            </a:pPr>
-            <a:r>
-              <a:rPr lang="en-US" sz="1500" b="0">
-                <a:solidFill>
-                  <a:srgbClr val="202B33"/>
-                </a:solidFill>
-                <a:latin typeface="Arial"/>
-                <a:ea typeface="Arial"/>
-                <a:cs typeface="Arial"/>
-              </a:rPr>
-              <a:t xml:space="preserve"/>
-            </a:r>
-            <a:endParaRPr lang="en-US" sz="1500"/>
-          </a:p>
-          <a:p>
-            <a:pPr marL="0" indent="0">
-              <a:lnSpc>
-                <a:spcPts val="1950"/>
-              </a:lnSpc>
-              <a:spcAft>
-                <a:spcPts val="0"/>
-              </a:spcAft>
-              <a:buNone/>
-            </a:pPr>
-            <a:r>
-              <a:rPr lang="en-US" sz="1500" b="0">
-                <a:solidFill>
-                  <a:srgbClr val="202B33"/>
-                </a:solidFill>
-                <a:latin typeface="Arial"/>
-                <a:ea typeface="Arial"/>
-                <a:cs typeface="Arial"/>
-              </a:rPr>
-              <a:t xml:space="preserve">So the question is not whether to give the</a:t>
-            </a:r>
-            <a:endParaRPr lang="en-US" sz="1500"/>
-          </a:p>
-          <a:p>
-            <a:pPr marL="0" indent="0">
-              <a:lnSpc>
-                <a:spcPts val="1950"/>
-              </a:lnSpc>
-              <a:spcAft>
-                <a:spcPts val="0"/>
-              </a:spcAft>
-              <a:buNone/>
-            </a:pPr>
-            <a:r>
-              <a:rPr lang="en-US" sz="1500" b="0">
-                <a:solidFill>
-                  <a:srgbClr val="202B33"/>
-                </a:solidFill>
-                <a:latin typeface="Arial"/>
-                <a:ea typeface="Arial"/>
-                <a:cs typeface="Arial"/>
-              </a:rPr>
-              <a:t xml:space="preserve">assistant access. It is how to keep the</a:t>
-            </a:r>
-            <a:endParaRPr lang="en-US" sz="1500"/>
-          </a:p>
-          <a:p>
-            <a:pPr marL="0" indent="0">
-              <a:lnSpc>
-                <a:spcPts val="1950"/>
-              </a:lnSpc>
-              <a:spcAft>
-                <a:spcPts val="0"/>
-              </a:spcAft>
-              <a:buNone/>
-            </a:pPr>
-            <a:r>
-              <a:rPr lang="en-US" sz="1500" b="0">
-                <a:solidFill>
-                  <a:srgbClr val="202B33"/>
-                </a:solidFill>
-                <a:latin typeface="Arial"/>
-                <a:ea typeface="Arial"/>
-                <a:cs typeface="Arial"/>
-              </a:rPr>
-              <a:t xml:space="preserve">number of live pathways small enough to</a:t>
-            </a:r>
-            <a:endParaRPr lang="en-US" sz="1500"/>
-          </a:p>
-          <a:p>
-            <a:pPr marL="0" indent="0">
-              <a:lnSpc>
-                <a:spcPts val="1950"/>
-              </a:lnSpc>
-              <a:spcAft>
-                <a:spcPts val="0"/>
-              </a:spcAft>
-              <a:buNone/>
-            </a:pPr>
-            <a:r>
-              <a:rPr lang="en-US" sz="1500" b="0">
-                <a:solidFill>
-                  <a:srgbClr val="202B33"/>
-                </a:solidFill>
-                <a:latin typeface="Arial"/>
-                <a:ea typeface="Arial"/>
-                <a:cs typeface="Arial"/>
-              </a:rPr>
-              <a:t xml:space="preserve">reason about, one job at a time. That is</a:t>
-            </a:r>
-            <a:endParaRPr lang="en-US" sz="1500"/>
-          </a:p>
           <a:p>
             <a:pPr marL="0" indent="0">
               <a:lnSpc>
@@ -25767,121 +22286,6 @@
             </a:r>
             <a:endParaRPr lang="en-US" sz="1500"/>
           </a:p>
-          <a:p>
-            <a:pPr marL="0" indent="0">
-              <a:lnSpc>
-                <a:spcPts val="1950"/>
-              </a:lnSpc>
-              <a:spcAft>
-                <a:spcPts val="0"/>
-              </a:spcAft>
-              <a:buNone/>
-            </a:pPr>
-            <a:r>
-              <a:rPr lang="en-US" sz="1500" b="0">
-                <a:solidFill>
-                  <a:srgbClr val="202B33"/>
-                </a:solidFill>
-                <a:latin typeface="Arial"/>
-                <a:ea typeface="Arial"/>
-                <a:cs typeface="Arial"/>
-              </a:rPr>
-              <a:t xml:space="preserve">where data leaks: not through the model</a:t>
-            </a:r>
-            <a:endParaRPr lang="en-US" sz="1500"/>
-          </a:p>
-          <a:p>
-            <a:pPr marL="0" indent="0">
-              <a:lnSpc>
-                <a:spcPts val="1950"/>
-              </a:lnSpc>
-              <a:spcAft>
-                <a:spcPts val="0"/>
-              </a:spcAft>
-              <a:buNone/>
-            </a:pPr>
-            <a:r>
-              <a:rPr lang="en-US" sz="1500" b="0">
-                <a:solidFill>
-                  <a:srgbClr val="202B33"/>
-                </a:solidFill>
-                <a:latin typeface="Arial"/>
-                <a:ea typeface="Arial"/>
-                <a:cs typeface="Arial"/>
-              </a:rPr>
-              <a:t xml:space="preserve">being evil, but through a tool result</a:t>
-            </a:r>
-            <a:endParaRPr lang="en-US" sz="1500"/>
-          </a:p>
-          <a:p>
-            <a:pPr marL="0" indent="0">
-              <a:lnSpc>
-                <a:spcPts val="1950"/>
-              </a:lnSpc>
-              <a:spcAft>
-                <a:spcPts val="0"/>
-              </a:spcAft>
-              <a:buNone/>
-            </a:pPr>
-            <a:r>
-              <a:rPr lang="en-US" sz="1500" b="0">
-                <a:solidFill>
-                  <a:srgbClr val="202B33"/>
-                </a:solidFill>
-                <a:latin typeface="Arial"/>
-                <a:ea typeface="Arial"/>
-                <a:cs typeface="Arial"/>
-              </a:rPr>
-              <a:t xml:space="preserve">flowing into the next tool call.</a:t>
-            </a:r>
-            <a:endParaRPr lang="en-US" sz="1500"/>
-          </a:p>
-          <a:p>
-            <a:pPr marL="0" indent="0">
-              <a:lnSpc>
-                <a:spcPts val="1950"/>
-              </a:lnSpc>
-              <a:spcAft>
-                <a:spcPts val="0"/>
-              </a:spcAft>
-              <a:buNone/>
-            </a:pPr>
-            <a:r>
-              <a:rPr lang="en-US" sz="1500" b="0">
-                <a:solidFill>
-                  <a:srgbClr val="202B33"/>
-                </a:solidFill>
-                <a:latin typeface="Arial"/>
-                <a:ea typeface="Arial"/>
-                <a:cs typeface="Arial"/>
-              </a:rPr>
-              <a:t xml:space="preserve"/>
-            </a:r>
-            <a:endParaRPr lang="en-US" sz="1500"/>
-          </a:p>
-          <a:p>
-            <a:pPr marL="0" indent="0">
-              <a:lnSpc>
-                <a:spcPts val="1950"/>
-              </a:lnSpc>
-              <a:spcAft>
-                <a:spcPts val="0"/>
-              </a:spcAft>
-              <a:buNone/>
-            </a:pPr>
-            <a:r>
-              <a:rPr lang="en-US" sz="1500" b="0">
-                <a:solidFill>
-                  <a:srgbClr val="202B33"/>
-                </a:solidFill>
-                <a:latin typeface="Arial"/>
-                <a:ea typeface="Arial"/>
-                <a:cs typeface="Arial"/>
-              </a:rPr>
-              <a:t xml:space="preserve">For sensitive processing, the planner gets</a:t>
-            </a:r>
-            <a:endParaRPr lang="en-US" sz="1500"/>
-          </a:p>
         </p:txBody>
       </p:sp>
       <p:sp>
@@ -25927,7 +22331,7 @@
                 <a:ea typeface="Arial"/>
                 <a:cs typeface="Arial"/>
               </a:rPr>
-              <a:t xml:space="preserve">an opaque job reference. A trusted</a:t>
+              <a:t xml:space="preserve">where data leaks: not through the model</a:t>
             </a:r>
             <a:endParaRPr lang="en-US" sz="1500"/>
           </a:p>
@@ -25950,7 +22354,7 @@
                 <a:ea typeface="Arial"/>
                 <a:cs typeface="Arial"/>
               </a:rPr>
-              <a:t xml:space="preserve">dispatcher grants a local worker scoped</a:t>
+              <a:t xml:space="preserve">being evil, but through a tool result</a:t>
             </a:r>
             <a:endParaRPr lang="en-US" sz="1500"/>
           </a:p>
@@ -25973,122 +22377,7 @@
                 <a:ea typeface="Arial"/>
                 <a:cs typeface="Arial"/>
               </a:rPr>
-              <a:t xml:space="preserve">access; the worker touches the data; only</a:t>
-            </a:r>
-            <a:endParaRPr lang="en-US" sz="1500"/>
-          </a:p>
-          <a:p>
-            <a:pPr marL="0" indent="0">
-              <a:lnSpc>
-                <a:spcPts val="1950"/>
-              </a:lnSpc>
-              <a:spcAft>
-                <a:spcPts val="0"/>
-              </a:spcAft>
-              <a:buNone/>
-            </a:pPr>
-            <a:r>
-              <a:rPr lang="en-US" sz="1500" b="0">
-                <a:solidFill>
-                  <a:srgbClr val="202B33"/>
-                </a:solidFill>
-                <a:latin typeface="Arial"/>
-                <a:ea typeface="Arial"/>
-                <a:cs typeface="Arial"/>
-              </a:rPr>
-              <a:t xml:space="preserve">an allowlisted status comes back. A signed</a:t>
-            </a:r>
-            <a:endParaRPr lang="en-US" sz="1500"/>
-          </a:p>
-          <a:p>
-            <a:pPr marL="0" indent="0">
-              <a:lnSpc>
-                <a:spcPts val="1950"/>
-              </a:lnSpc>
-              <a:spcAft>
-                <a:spcPts val="0"/>
-              </a:spcAft>
-              <a:buNone/>
-            </a:pPr>
-            <a:r>
-              <a:rPr lang="en-US" sz="1500" b="0">
-                <a:solidFill>
-                  <a:srgbClr val="202B33"/>
-                </a:solidFill>
-                <a:latin typeface="Arial"/>
-                <a:ea typeface="Arial"/>
-                <a:cs typeface="Arial"/>
-              </a:rPr>
-              <a:t xml:space="preserve">download URL is a bearer credential.</a:t>
-            </a:r>
-            <a:endParaRPr lang="en-US" sz="1500"/>
-          </a:p>
-          <a:p>
-            <a:pPr marL="0" indent="0">
-              <a:lnSpc>
-                <a:spcPts val="1950"/>
-              </a:lnSpc>
-              <a:spcAft>
-                <a:spcPts val="0"/>
-              </a:spcAft>
-              <a:buNone/>
-            </a:pPr>
-            <a:r>
-              <a:rPr lang="en-US" sz="1500" b="0">
-                <a:solidFill>
-                  <a:srgbClr val="202B33"/>
-                </a:solidFill>
-                <a:latin typeface="Arial"/>
-                <a:ea typeface="Arial"/>
-                <a:cs typeface="Arial"/>
-              </a:rPr>
-              <a:t xml:space="preserve">Handing it to a model while asking the</a:t>
-            </a:r>
-            <a:endParaRPr lang="en-US" sz="1500"/>
-          </a:p>
-          <a:p>
-            <a:pPr marL="0" indent="0">
-              <a:lnSpc>
-                <a:spcPts val="1950"/>
-              </a:lnSpc>
-              <a:spcAft>
-                <a:spcPts val="0"/>
-              </a:spcAft>
-              <a:buNone/>
-            </a:pPr>
-            <a:r>
-              <a:rPr lang="en-US" sz="1500" b="0">
-                <a:solidFill>
-                  <a:srgbClr val="202B33"/>
-                </a:solidFill>
-                <a:latin typeface="Arial"/>
-                <a:ea typeface="Arial"/>
-                <a:cs typeface="Arial"/>
-              </a:rPr>
-              <a:t xml:space="preserve">model not to use it is not isolation, it is</a:t>
-            </a:r>
-            <a:endParaRPr lang="en-US" sz="1500"/>
-          </a:p>
-          <a:p>
-            <a:pPr marL="0" indent="0">
-              <a:lnSpc>
-                <a:spcPts val="1950"/>
-              </a:lnSpc>
-              <a:spcAft>
-                <a:spcPts val="0"/>
-              </a:spcAft>
-              <a:buNone/>
-            </a:pPr>
-            <a:r>
-              <a:rPr lang="en-US" sz="1500" b="0">
-                <a:solidFill>
-                  <a:srgbClr val="202B33"/>
-                </a:solidFill>
-                <a:latin typeface="Arial"/>
-                <a:ea typeface="Arial"/>
-                <a:cs typeface="Arial"/>
-              </a:rPr>
-              <a:t xml:space="preserve">hope.</a:t>
+              <a:t xml:space="preserve">flowing into the next tool call.</a:t>
             </a:r>
             <a:endParaRPr lang="en-US" sz="1500"/>
           </a:p>
